--- a/artifacts/Flaky-Test-Artifacts-Summary.pptx
+++ b/artifacts/Flaky-Test-Artifacts-Summary.pptx
@@ -5,21 +5,21 @@
     <p:sldMasterId id="2147483648" r:id="rId1"/>
   </p:sldMasterIdLst>
   <p:sldIdLst>
-    <p:sldId id="256" r:id="rId2"/>
-    <p:sldId id="257" r:id="rId3"/>
-    <p:sldId id="258" r:id="rId4"/>
-    <p:sldId id="259" r:id="rId5"/>
-    <p:sldId id="260" r:id="rId6"/>
-    <p:sldId id="261" r:id="rId7"/>
-    <p:sldId id="262" r:id="rId8"/>
-    <p:sldId id="263" r:id="rId9"/>
-    <p:sldId id="264" r:id="rId10"/>
-    <p:sldId id="265" r:id="rId11"/>
-    <p:sldId id="266" r:id="rId12"/>
-    <p:sldId id="267" r:id="rId13"/>
-    <p:sldId id="268" r:id="rId14"/>
+    <p:sldId id="256" r:id="rId7"/>
+    <p:sldId id="257" r:id="rId8"/>
+    <p:sldId id="258" r:id="rId9"/>
+    <p:sldId id="259" r:id="rId10"/>
+    <p:sldId id="260" r:id="rId11"/>
+    <p:sldId id="261" r:id="rId12"/>
+    <p:sldId id="262" r:id="rId13"/>
+    <p:sldId id="263" r:id="rId14"/>
+    <p:sldId id="264" r:id="rId15"/>
+    <p:sldId id="265" r:id="rId16"/>
+    <p:sldId id="266" r:id="rId17"/>
+    <p:sldId id="267" r:id="rId18"/>
+    <p:sldId id="268" r:id="rId19"/>
   </p:sldIdLst>
-  <p:sldSz cx="12192000" cy="6858000"/>
+  <p:sldSz cx="12191695" cy="6858000" type="screen4x3"/>
   <p:notesSz cx="6858000" cy="9144000"/>
   <p:defaultTextStyle>
     <a:defPPr>
@@ -116,22 +116,6 @@
       </a:defRPr>
     </a:lvl9pPr>
   </p:defaultTextStyle>
-  <p:extLst>
-    <p:ext uri="{EFAFB233-063F-42B5-8137-9DF3F51BA10A}">
-      <p15:sldGuideLst xmlns:p15="http://schemas.microsoft.com/office/powerpoint/2012/main">
-        <p15:guide id="1" orient="horz" pos="2160">
-          <p15:clr>
-            <a:srgbClr val="A4A3A4"/>
-          </p15:clr>
-        </p15:guide>
-        <p15:guide id="2" pos="2880">
-          <p15:clr>
-            <a:srgbClr val="A4A3A4"/>
-          </p15:clr>
-        </p15:guide>
-      </p15:sldGuideLst>
-    </p:ext>
-  </p:extLst>
 </p:presentation>
 </file>
 
@@ -173,9 +157,10 @@
           <a:lstStyle/>
           <a:p>
             <a:r>
-              <a:rPr lang="en-US"/>
+              <a:rPr lang="en-US" smtClean="0"/>
               <a:t>Click to edit Master title style</a:t>
             </a:r>
+            <a:endParaRPr lang="en-US"/>
           </a:p>
         </p:txBody>
       </p:sp>
@@ -291,9 +276,10 @@
           </a:lstStyle>
           <a:p>
             <a:r>
-              <a:rPr lang="en-US"/>
+              <a:rPr lang="en-US" smtClean="0"/>
               <a:t>Click to edit Master subtitle style</a:t>
             </a:r>
+            <a:endParaRPr lang="en-US"/>
           </a:p>
         </p:txBody>
       </p:sp>
@@ -314,7 +300,7 @@
           <a:p>
             <a:fld id="{5BCAD085-E8A6-8845-BD4E-CB4CCA059FC4}" type="datetimeFigureOut">
               <a:rPr lang="en-US" smtClean="0"/>
-              <a:t>8/30/2026</a:t>
+              <a:t>1/27/13</a:t>
             </a:fld>
             <a:endParaRPr lang="en-US"/>
           </a:p>
@@ -408,9 +394,10 @@
           <a:lstStyle/>
           <a:p>
             <a:r>
-              <a:rPr lang="en-US"/>
+              <a:rPr lang="en-US" smtClean="0"/>
               <a:t>Click to edit Master title style</a:t>
             </a:r>
+            <a:endParaRPr lang="en-US"/>
           </a:p>
         </p:txBody>
       </p:sp>
@@ -431,37 +418,38 @@
           <a:p>
             <a:pPr lvl="0"/>
             <a:r>
-              <a:rPr lang="en-US"/>
+              <a:rPr lang="en-US" smtClean="0"/>
               <a:t>Click to edit Master text styles</a:t>
             </a:r>
           </a:p>
           <a:p>
             <a:pPr lvl="1"/>
             <a:r>
-              <a:rPr lang="en-US"/>
+              <a:rPr lang="en-US" smtClean="0"/>
               <a:t>Second level</a:t>
             </a:r>
           </a:p>
           <a:p>
             <a:pPr lvl="2"/>
             <a:r>
-              <a:rPr lang="en-US"/>
+              <a:rPr lang="en-US" smtClean="0"/>
               <a:t>Third level</a:t>
             </a:r>
           </a:p>
           <a:p>
             <a:pPr lvl="3"/>
             <a:r>
-              <a:rPr lang="en-US"/>
+              <a:rPr lang="en-US" smtClean="0"/>
               <a:t>Fourth level</a:t>
             </a:r>
           </a:p>
           <a:p>
             <a:pPr lvl="4"/>
             <a:r>
-              <a:rPr lang="en-US"/>
+              <a:rPr lang="en-US" smtClean="0"/>
               <a:t>Fifth level</a:t>
             </a:r>
+            <a:endParaRPr lang="en-US"/>
           </a:p>
         </p:txBody>
       </p:sp>
@@ -482,7 +470,7 @@
           <a:p>
             <a:fld id="{5BCAD085-E8A6-8845-BD4E-CB4CCA059FC4}" type="datetimeFigureOut">
               <a:rPr lang="en-US" smtClean="0"/>
-              <a:t>8/30/2026</a:t>
+              <a:t>1/27/13</a:t>
             </a:fld>
             <a:endParaRPr lang="en-US"/>
           </a:p>
@@ -581,9 +569,10 @@
           <a:lstStyle/>
           <a:p>
             <a:r>
-              <a:rPr lang="en-US"/>
+              <a:rPr lang="en-US" smtClean="0"/>
               <a:t>Click to edit Master title style</a:t>
             </a:r>
+            <a:endParaRPr lang="en-US"/>
           </a:p>
         </p:txBody>
       </p:sp>
@@ -609,37 +598,38 @@
           <a:p>
             <a:pPr lvl="0"/>
             <a:r>
-              <a:rPr lang="en-US"/>
+              <a:rPr lang="en-US" smtClean="0"/>
               <a:t>Click to edit Master text styles</a:t>
             </a:r>
           </a:p>
           <a:p>
             <a:pPr lvl="1"/>
             <a:r>
-              <a:rPr lang="en-US"/>
+              <a:rPr lang="en-US" smtClean="0"/>
               <a:t>Second level</a:t>
             </a:r>
           </a:p>
           <a:p>
             <a:pPr lvl="2"/>
             <a:r>
-              <a:rPr lang="en-US"/>
+              <a:rPr lang="en-US" smtClean="0"/>
               <a:t>Third level</a:t>
             </a:r>
           </a:p>
           <a:p>
             <a:pPr lvl="3"/>
             <a:r>
-              <a:rPr lang="en-US"/>
+              <a:rPr lang="en-US" smtClean="0"/>
               <a:t>Fourth level</a:t>
             </a:r>
           </a:p>
           <a:p>
             <a:pPr lvl="4"/>
             <a:r>
-              <a:rPr lang="en-US"/>
+              <a:rPr lang="en-US" smtClean="0"/>
               <a:t>Fifth level</a:t>
             </a:r>
+            <a:endParaRPr lang="en-US"/>
           </a:p>
         </p:txBody>
       </p:sp>
@@ -660,7 +650,7 @@
           <a:p>
             <a:fld id="{5BCAD085-E8A6-8845-BD4E-CB4CCA059FC4}" type="datetimeFigureOut">
               <a:rPr lang="en-US" smtClean="0"/>
-              <a:t>8/30/2026</a:t>
+              <a:t>1/27/13</a:t>
             </a:fld>
             <a:endParaRPr lang="en-US"/>
           </a:p>
@@ -754,9 +744,10 @@
           <a:lstStyle/>
           <a:p>
             <a:r>
-              <a:rPr lang="en-US"/>
+              <a:rPr lang="en-US" smtClean="0"/>
               <a:t>Click to edit Master title style</a:t>
             </a:r>
+            <a:endParaRPr lang="en-US"/>
           </a:p>
         </p:txBody>
       </p:sp>
@@ -777,37 +768,38 @@
           <a:p>
             <a:pPr lvl="0"/>
             <a:r>
-              <a:rPr lang="en-US"/>
+              <a:rPr lang="en-US" smtClean="0"/>
               <a:t>Click to edit Master text styles</a:t>
             </a:r>
           </a:p>
           <a:p>
             <a:pPr lvl="1"/>
             <a:r>
-              <a:rPr lang="en-US"/>
+              <a:rPr lang="en-US" smtClean="0"/>
               <a:t>Second level</a:t>
             </a:r>
           </a:p>
           <a:p>
             <a:pPr lvl="2"/>
             <a:r>
-              <a:rPr lang="en-US"/>
+              <a:rPr lang="en-US" smtClean="0"/>
               <a:t>Third level</a:t>
             </a:r>
           </a:p>
           <a:p>
             <a:pPr lvl="3"/>
             <a:r>
-              <a:rPr lang="en-US"/>
+              <a:rPr lang="en-US" smtClean="0"/>
               <a:t>Fourth level</a:t>
             </a:r>
           </a:p>
           <a:p>
             <a:pPr lvl="4"/>
             <a:r>
-              <a:rPr lang="en-US"/>
+              <a:rPr lang="en-US" smtClean="0"/>
               <a:t>Fifth level</a:t>
             </a:r>
+            <a:endParaRPr lang="en-US"/>
           </a:p>
         </p:txBody>
       </p:sp>
@@ -828,7 +820,7 @@
           <a:p>
             <a:fld id="{5BCAD085-E8A6-8845-BD4E-CB4CCA059FC4}" type="datetimeFigureOut">
               <a:rPr lang="en-US" smtClean="0"/>
-              <a:t>8/30/2026</a:t>
+              <a:t>1/27/13</a:t>
             </a:fld>
             <a:endParaRPr lang="en-US"/>
           </a:p>
@@ -931,9 +923,10 @@
           </a:lstStyle>
           <a:p>
             <a:r>
-              <a:rPr lang="en-US"/>
+              <a:rPr lang="en-US" smtClean="0"/>
               <a:t>Click to edit Master title style</a:t>
             </a:r>
+            <a:endParaRPr lang="en-US"/>
           </a:p>
         </p:txBody>
       </p:sp>
@@ -1050,7 +1043,7 @@
           <a:p>
             <a:pPr lvl="0"/>
             <a:r>
-              <a:rPr lang="en-US"/>
+              <a:rPr lang="en-US" smtClean="0"/>
               <a:t>Click to edit Master text styles</a:t>
             </a:r>
           </a:p>
@@ -1073,7 +1066,7 @@
           <a:p>
             <a:fld id="{5BCAD085-E8A6-8845-BD4E-CB4CCA059FC4}" type="datetimeFigureOut">
               <a:rPr lang="en-US" smtClean="0"/>
-              <a:t>8/30/2026</a:t>
+              <a:t>1/27/13</a:t>
             </a:fld>
             <a:endParaRPr lang="en-US"/>
           </a:p>
@@ -1167,9 +1160,10 @@
           <a:lstStyle/>
           <a:p>
             <a:r>
-              <a:rPr lang="en-US"/>
+              <a:rPr lang="en-US" smtClean="0"/>
               <a:t>Click to edit Master title style</a:t>
             </a:r>
+            <a:endParaRPr lang="en-US"/>
           </a:p>
         </p:txBody>
       </p:sp>
@@ -1223,37 +1217,38 @@
           <a:p>
             <a:pPr lvl="0"/>
             <a:r>
-              <a:rPr lang="en-US"/>
+              <a:rPr lang="en-US" smtClean="0"/>
               <a:t>Click to edit Master text styles</a:t>
             </a:r>
           </a:p>
           <a:p>
             <a:pPr lvl="1"/>
             <a:r>
-              <a:rPr lang="en-US"/>
+              <a:rPr lang="en-US" smtClean="0"/>
               <a:t>Second level</a:t>
             </a:r>
           </a:p>
           <a:p>
             <a:pPr lvl="2"/>
             <a:r>
-              <a:rPr lang="en-US"/>
+              <a:rPr lang="en-US" smtClean="0"/>
               <a:t>Third level</a:t>
             </a:r>
           </a:p>
           <a:p>
             <a:pPr lvl="3"/>
             <a:r>
-              <a:rPr lang="en-US"/>
+              <a:rPr lang="en-US" smtClean="0"/>
               <a:t>Fourth level</a:t>
             </a:r>
           </a:p>
           <a:p>
             <a:pPr lvl="4"/>
             <a:r>
-              <a:rPr lang="en-US"/>
+              <a:rPr lang="en-US" smtClean="0"/>
               <a:t>Fifth level</a:t>
             </a:r>
+            <a:endParaRPr lang="en-US"/>
           </a:p>
         </p:txBody>
       </p:sp>
@@ -1307,37 +1302,38 @@
           <a:p>
             <a:pPr lvl="0"/>
             <a:r>
-              <a:rPr lang="en-US"/>
+              <a:rPr lang="en-US" smtClean="0"/>
               <a:t>Click to edit Master text styles</a:t>
             </a:r>
           </a:p>
           <a:p>
             <a:pPr lvl="1"/>
             <a:r>
-              <a:rPr lang="en-US"/>
+              <a:rPr lang="en-US" smtClean="0"/>
               <a:t>Second level</a:t>
             </a:r>
           </a:p>
           <a:p>
             <a:pPr lvl="2"/>
             <a:r>
-              <a:rPr lang="en-US"/>
+              <a:rPr lang="en-US" smtClean="0"/>
               <a:t>Third level</a:t>
             </a:r>
           </a:p>
           <a:p>
             <a:pPr lvl="3"/>
             <a:r>
-              <a:rPr lang="en-US"/>
+              <a:rPr lang="en-US" smtClean="0"/>
               <a:t>Fourth level</a:t>
             </a:r>
           </a:p>
           <a:p>
             <a:pPr lvl="4"/>
             <a:r>
-              <a:rPr lang="en-US"/>
+              <a:rPr lang="en-US" smtClean="0"/>
               <a:t>Fifth level</a:t>
             </a:r>
+            <a:endParaRPr lang="en-US"/>
           </a:p>
         </p:txBody>
       </p:sp>
@@ -1358,7 +1354,7 @@
           <a:p>
             <a:fld id="{5BCAD085-E8A6-8845-BD4E-CB4CCA059FC4}" type="datetimeFigureOut">
               <a:rPr lang="en-US" smtClean="0"/>
-              <a:t>8/30/2026</a:t>
+              <a:t>1/27/13</a:t>
             </a:fld>
             <a:endParaRPr lang="en-US"/>
           </a:p>
@@ -1456,9 +1452,10 @@
           </a:lstStyle>
           <a:p>
             <a:r>
-              <a:rPr lang="en-US"/>
+              <a:rPr lang="en-US" smtClean="0"/>
               <a:t>Click to edit Master title style</a:t>
             </a:r>
+            <a:endParaRPr lang="en-US"/>
           </a:p>
         </p:txBody>
       </p:sp>
@@ -1521,7 +1518,7 @@
           <a:p>
             <a:pPr lvl="0"/>
             <a:r>
-              <a:rPr lang="en-US"/>
+              <a:rPr lang="en-US" smtClean="0"/>
               <a:t>Click to edit Master text styles</a:t>
             </a:r>
           </a:p>
@@ -1577,37 +1574,38 @@
           <a:p>
             <a:pPr lvl="0"/>
             <a:r>
-              <a:rPr lang="en-US"/>
+              <a:rPr lang="en-US" smtClean="0"/>
               <a:t>Click to edit Master text styles</a:t>
             </a:r>
           </a:p>
           <a:p>
             <a:pPr lvl="1"/>
             <a:r>
-              <a:rPr lang="en-US"/>
+              <a:rPr lang="en-US" smtClean="0"/>
               <a:t>Second level</a:t>
             </a:r>
           </a:p>
           <a:p>
             <a:pPr lvl="2"/>
             <a:r>
-              <a:rPr lang="en-US"/>
+              <a:rPr lang="en-US" smtClean="0"/>
               <a:t>Third level</a:t>
             </a:r>
           </a:p>
           <a:p>
             <a:pPr lvl="3"/>
             <a:r>
-              <a:rPr lang="en-US"/>
+              <a:rPr lang="en-US" smtClean="0"/>
               <a:t>Fourth level</a:t>
             </a:r>
           </a:p>
           <a:p>
             <a:pPr lvl="4"/>
             <a:r>
-              <a:rPr lang="en-US"/>
+              <a:rPr lang="en-US" smtClean="0"/>
               <a:t>Fifth level</a:t>
             </a:r>
+            <a:endParaRPr lang="en-US"/>
           </a:p>
         </p:txBody>
       </p:sp>
@@ -1670,7 +1668,7 @@
           <a:p>
             <a:pPr lvl="0"/>
             <a:r>
-              <a:rPr lang="en-US"/>
+              <a:rPr lang="en-US" smtClean="0"/>
               <a:t>Click to edit Master text styles</a:t>
             </a:r>
           </a:p>
@@ -1726,37 +1724,38 @@
           <a:p>
             <a:pPr lvl="0"/>
             <a:r>
-              <a:rPr lang="en-US"/>
+              <a:rPr lang="en-US" smtClean="0"/>
               <a:t>Click to edit Master text styles</a:t>
             </a:r>
           </a:p>
           <a:p>
             <a:pPr lvl="1"/>
             <a:r>
-              <a:rPr lang="en-US"/>
+              <a:rPr lang="en-US" smtClean="0"/>
               <a:t>Second level</a:t>
             </a:r>
           </a:p>
           <a:p>
             <a:pPr lvl="2"/>
             <a:r>
-              <a:rPr lang="en-US"/>
+              <a:rPr lang="en-US" smtClean="0"/>
               <a:t>Third level</a:t>
             </a:r>
           </a:p>
           <a:p>
             <a:pPr lvl="3"/>
             <a:r>
-              <a:rPr lang="en-US"/>
+              <a:rPr lang="en-US" smtClean="0"/>
               <a:t>Fourth level</a:t>
             </a:r>
           </a:p>
           <a:p>
             <a:pPr lvl="4"/>
             <a:r>
-              <a:rPr lang="en-US"/>
+              <a:rPr lang="en-US" smtClean="0"/>
               <a:t>Fifth level</a:t>
             </a:r>
+            <a:endParaRPr lang="en-US"/>
           </a:p>
         </p:txBody>
       </p:sp>
@@ -1777,7 +1776,7 @@
           <a:p>
             <a:fld id="{5BCAD085-E8A6-8845-BD4E-CB4CCA059FC4}" type="datetimeFigureOut">
               <a:rPr lang="en-US" smtClean="0"/>
-              <a:t>8/30/2026</a:t>
+              <a:t>1/27/13</a:t>
             </a:fld>
             <a:endParaRPr lang="en-US"/>
           </a:p>
@@ -1871,9 +1870,10 @@
           <a:lstStyle/>
           <a:p>
             <a:r>
-              <a:rPr lang="en-US"/>
+              <a:rPr lang="en-US" smtClean="0"/>
               <a:t>Click to edit Master title style</a:t>
             </a:r>
+            <a:endParaRPr lang="en-US"/>
           </a:p>
         </p:txBody>
       </p:sp>
@@ -1894,7 +1894,7 @@
           <a:p>
             <a:fld id="{5BCAD085-E8A6-8845-BD4E-CB4CCA059FC4}" type="datetimeFigureOut">
               <a:rPr lang="en-US" smtClean="0"/>
-              <a:t>8/30/2026</a:t>
+              <a:t>1/27/13</a:t>
             </a:fld>
             <a:endParaRPr lang="en-US"/>
           </a:p>
@@ -1989,7 +1989,7 @@
           <a:p>
             <a:fld id="{5BCAD085-E8A6-8845-BD4E-CB4CCA059FC4}" type="datetimeFigureOut">
               <a:rPr lang="en-US" smtClean="0"/>
-              <a:t>8/30/2026</a:t>
+              <a:t>1/27/13</a:t>
             </a:fld>
             <a:endParaRPr lang="en-US"/>
           </a:p>
@@ -2092,9 +2092,10 @@
           </a:lstStyle>
           <a:p>
             <a:r>
-              <a:rPr lang="en-US"/>
+              <a:rPr lang="en-US" smtClean="0"/>
               <a:t>Click to edit Master title style</a:t>
             </a:r>
+            <a:endParaRPr lang="en-US"/>
           </a:p>
         </p:txBody>
       </p:sp>
@@ -2148,37 +2149,38 @@
           <a:p>
             <a:pPr lvl="0"/>
             <a:r>
-              <a:rPr lang="en-US"/>
+              <a:rPr lang="en-US" smtClean="0"/>
               <a:t>Click to edit Master text styles</a:t>
             </a:r>
           </a:p>
           <a:p>
             <a:pPr lvl="1"/>
             <a:r>
-              <a:rPr lang="en-US"/>
+              <a:rPr lang="en-US" smtClean="0"/>
               <a:t>Second level</a:t>
             </a:r>
           </a:p>
           <a:p>
             <a:pPr lvl="2"/>
             <a:r>
-              <a:rPr lang="en-US"/>
+              <a:rPr lang="en-US" smtClean="0"/>
               <a:t>Third level</a:t>
             </a:r>
           </a:p>
           <a:p>
             <a:pPr lvl="3"/>
             <a:r>
-              <a:rPr lang="en-US"/>
+              <a:rPr lang="en-US" smtClean="0"/>
               <a:t>Fourth level</a:t>
             </a:r>
           </a:p>
           <a:p>
             <a:pPr lvl="4"/>
             <a:r>
-              <a:rPr lang="en-US"/>
+              <a:rPr lang="en-US" smtClean="0"/>
               <a:t>Fifth level</a:t>
             </a:r>
+            <a:endParaRPr lang="en-US"/>
           </a:p>
         </p:txBody>
       </p:sp>
@@ -2241,7 +2243,7 @@
           <a:p>
             <a:pPr lvl="0"/>
             <a:r>
-              <a:rPr lang="en-US"/>
+              <a:rPr lang="en-US" smtClean="0"/>
               <a:t>Click to edit Master text styles</a:t>
             </a:r>
           </a:p>
@@ -2264,7 +2266,7 @@
           <a:p>
             <a:fld id="{5BCAD085-E8A6-8845-BD4E-CB4CCA059FC4}" type="datetimeFigureOut">
               <a:rPr lang="en-US" smtClean="0"/>
-              <a:t>8/30/2026</a:t>
+              <a:t>1/27/13</a:t>
             </a:fld>
             <a:endParaRPr lang="en-US"/>
           </a:p>
@@ -2367,9 +2369,10 @@
           </a:lstStyle>
           <a:p>
             <a:r>
-              <a:rPr lang="en-US"/>
+              <a:rPr lang="en-US" smtClean="0"/>
               <a:t>Click to edit Master title style</a:t>
             </a:r>
+            <a:endParaRPr lang="en-US"/>
           </a:p>
         </p:txBody>
       </p:sp>
@@ -2493,7 +2496,7 @@
           <a:p>
             <a:pPr lvl="0"/>
             <a:r>
-              <a:rPr lang="en-US"/>
+              <a:rPr lang="en-US" smtClean="0"/>
               <a:t>Click to edit Master text styles</a:t>
             </a:r>
           </a:p>
@@ -2516,7 +2519,7 @@
           <a:p>
             <a:fld id="{5BCAD085-E8A6-8845-BD4E-CB4CCA059FC4}" type="datetimeFigureOut">
               <a:rPr lang="en-US" smtClean="0"/>
-              <a:t>8/30/2026</a:t>
+              <a:t>1/27/13</a:t>
             </a:fld>
             <a:endParaRPr lang="en-US"/>
           </a:p>
@@ -2625,9 +2628,10 @@
           <a:lstStyle/>
           <a:p>
             <a:r>
-              <a:rPr lang="en-US"/>
+              <a:rPr lang="en-US" smtClean="0"/>
               <a:t>Click to edit Master title style</a:t>
             </a:r>
+            <a:endParaRPr lang="en-US"/>
           </a:p>
         </p:txBody>
       </p:sp>
@@ -2658,37 +2662,38 @@
           <a:p>
             <a:pPr lvl="0"/>
             <a:r>
-              <a:rPr lang="en-US"/>
+              <a:rPr lang="en-US" smtClean="0"/>
               <a:t>Click to edit Master text styles</a:t>
             </a:r>
           </a:p>
           <a:p>
             <a:pPr lvl="1"/>
             <a:r>
-              <a:rPr lang="en-US"/>
+              <a:rPr lang="en-US" smtClean="0"/>
               <a:t>Second level</a:t>
             </a:r>
           </a:p>
           <a:p>
             <a:pPr lvl="2"/>
             <a:r>
-              <a:rPr lang="en-US"/>
+              <a:rPr lang="en-US" smtClean="0"/>
               <a:t>Third level</a:t>
             </a:r>
           </a:p>
           <a:p>
             <a:pPr lvl="3"/>
             <a:r>
-              <a:rPr lang="en-US"/>
+              <a:rPr lang="en-US" smtClean="0"/>
               <a:t>Fourth level</a:t>
             </a:r>
           </a:p>
           <a:p>
             <a:pPr lvl="4"/>
             <a:r>
-              <a:rPr lang="en-US"/>
+              <a:rPr lang="en-US" smtClean="0"/>
               <a:t>Fifth level</a:t>
             </a:r>
+            <a:endParaRPr lang="en-US"/>
           </a:p>
         </p:txBody>
       </p:sp>
@@ -2727,7 +2732,7 @@
           <a:p>
             <a:fld id="{5BCAD085-E8A6-8845-BD4E-CB4CCA059FC4}" type="datetimeFigureOut">
               <a:rPr lang="en-US" smtClean="0"/>
-              <a:t>8/30/2026</a:t>
+              <a:t>1/27/13</a:t>
             </a:fld>
             <a:endParaRPr lang="en-US"/>
           </a:p>
@@ -3086,7 +3091,7 @@
 </file>
 
 <file path=ppt/slides/slide1.xml><?xml version="1.0" encoding="utf-8"?>
-<p:sld xmlns:a="http://schemas.openxmlformats.org/drawingml/2006/main" xmlns:r="http://schemas.openxmlformats.org/officeDocument/2006/relationships" xmlns:p="http://schemas.openxmlformats.org/presentationml/2006/main">
+<p:sld xmlns:a="http://schemas.openxmlformats.org/drawingml/2006/main" xmlns:p="http://schemas.openxmlformats.org/presentationml/2006/main" xmlns:r="http://schemas.openxmlformats.org/officeDocument/2006/relationships">
   <p:cSld>
     <p:bg>
       <p:bgPr>
@@ -3102,14 +3107,7 @@
         <p:cNvGrpSpPr/>
         <p:nvPr/>
       </p:nvGrpSpPr>
-      <p:grpSpPr>
-        <a:xfrm>
-          <a:off x="0" y="0"/>
-          <a:ext cx="0" cy="0"/>
-          <a:chOff x="0" y="0"/>
-          <a:chExt cx="0" cy="0"/>
-        </a:xfrm>
-      </p:grpSpPr>
+      <p:grpSpPr/>
       <p:sp>
         <p:nvSpPr>
           <p:cNvPr id="2" name="Rectangle 1"/>
@@ -3147,11 +3145,10 @@
           </a:fontRef>
         </p:style>
         <p:txBody>
-          <a:bodyPr wrap="square" rtlCol="0" anchor="ctr"/>
+          <a:bodyPr rtlCol="0" anchor="ctr" wrap="square"/>
           <a:lstStyle/>
           <a:p>
             <a:pPr algn="ctr"/>
-            <a:endParaRPr/>
           </a:p>
         </p:txBody>
       </p:sp>
@@ -3192,11 +3189,10 @@
           </a:fontRef>
         </p:style>
         <p:txBody>
-          <a:bodyPr wrap="square" rtlCol="0" anchor="ctr"/>
+          <a:bodyPr rtlCol="0" anchor="ctr" wrap="square"/>
           <a:lstStyle/>
           <a:p>
             <a:pPr algn="ctr"/>
-            <a:endParaRPr/>
           </a:p>
         </p:txBody>
       </p:sp>
@@ -3217,7 +3213,7 @@
           <a:noFill/>
         </p:spPr>
         <p:txBody>
-          <a:bodyPr wrap="square" lIns="0" tIns="0" rIns="0" bIns="0">
+          <a:bodyPr wrap="square" lIns="0" rIns="0" tIns="0" bIns="0">
             <a:spAutoFit/>
           </a:bodyPr>
           <a:lstStyle/>
@@ -3262,7 +3258,7 @@
           <a:noFill/>
         </p:spPr>
         <p:txBody>
-          <a:bodyPr wrap="square" lIns="0" tIns="0" rIns="0" bIns="0">
+          <a:bodyPr wrap="square" lIns="0" rIns="0" tIns="0" bIns="0">
             <a:spAutoFit/>
           </a:bodyPr>
           <a:lstStyle/>
@@ -3349,11 +3345,10 @@
           </a:fontRef>
         </p:style>
         <p:txBody>
-          <a:bodyPr wrap="square" rtlCol="0" anchor="ctr"/>
+          <a:bodyPr rtlCol="0" anchor="ctr" wrap="square"/>
           <a:lstStyle/>
           <a:p>
             <a:pPr algn="ctr"/>
-            <a:endParaRPr/>
           </a:p>
         </p:txBody>
       </p:sp>
@@ -3374,7 +3369,7 @@
           <a:noFill/>
         </p:spPr>
         <p:txBody>
-          <a:bodyPr wrap="square" lIns="0" tIns="0" rIns="0" bIns="0">
+          <a:bodyPr wrap="square" lIns="0" rIns="0" tIns="0" bIns="0">
             <a:spAutoFit/>
           </a:bodyPr>
           <a:lstStyle/>
@@ -3419,7 +3414,7 @@
           <a:noFill/>
         </p:spPr>
         <p:txBody>
-          <a:bodyPr wrap="square" lIns="0" tIns="0" rIns="0" bIns="0">
+          <a:bodyPr wrap="square" lIns="0" rIns="0" tIns="0" bIns="0">
             <a:spAutoFit/>
           </a:bodyPr>
           <a:lstStyle/>
@@ -3456,7 +3451,7 @@
 </file>
 
 <file path=ppt/slides/slide10.xml><?xml version="1.0" encoding="utf-8"?>
-<p:sld xmlns:a="http://schemas.openxmlformats.org/drawingml/2006/main" xmlns:r="http://schemas.openxmlformats.org/officeDocument/2006/relationships" xmlns:p="http://schemas.openxmlformats.org/presentationml/2006/main">
+<p:sld xmlns:a="http://schemas.openxmlformats.org/drawingml/2006/main" xmlns:p="http://schemas.openxmlformats.org/presentationml/2006/main" xmlns:r="http://schemas.openxmlformats.org/officeDocument/2006/relationships">
   <p:cSld>
     <p:bg>
       <p:bgPr>
@@ -3472,14 +3467,7 @@
         <p:cNvGrpSpPr/>
         <p:nvPr/>
       </p:nvGrpSpPr>
-      <p:grpSpPr>
-        <a:xfrm>
-          <a:off x="0" y="0"/>
-          <a:ext cx="0" cy="0"/>
-          <a:chOff x="0" y="0"/>
-          <a:chExt cx="0" cy="0"/>
-        </a:xfrm>
-      </p:grpSpPr>
+      <p:grpSpPr/>
       <p:sp>
         <p:nvSpPr>
           <p:cNvPr id="2" name="Rectangle 1"/>
@@ -3517,11 +3505,10 @@
           </a:fontRef>
         </p:style>
         <p:txBody>
-          <a:bodyPr wrap="square" rtlCol="0" anchor="ctr"/>
+          <a:bodyPr rtlCol="0" anchor="ctr" wrap="square"/>
           <a:lstStyle/>
           <a:p>
             <a:pPr algn="ctr"/>
-            <a:endParaRPr/>
           </a:p>
         </p:txBody>
       </p:sp>
@@ -3542,7 +3529,7 @@
           <a:noFill/>
         </p:spPr>
         <p:txBody>
-          <a:bodyPr wrap="square" lIns="0" tIns="0" rIns="0" bIns="0">
+          <a:bodyPr wrap="square" lIns="0" rIns="0" tIns="0" bIns="0">
             <a:spAutoFit/>
           </a:bodyPr>
           <a:lstStyle/>
@@ -3587,7 +3574,7 @@
           <a:noFill/>
         </p:spPr>
         <p:txBody>
-          <a:bodyPr wrap="square" lIns="0" tIns="0" rIns="0" bIns="0">
+          <a:bodyPr wrap="square" lIns="0" rIns="0" tIns="0" bIns="0">
             <a:spAutoFit/>
           </a:bodyPr>
           <a:lstStyle/>
@@ -3652,11 +3639,10 @@
           </a:fontRef>
         </p:style>
         <p:txBody>
-          <a:bodyPr wrap="square" rtlCol="0" anchor="ctr"/>
+          <a:bodyPr rtlCol="0" anchor="ctr" wrap="square"/>
           <a:lstStyle/>
           <a:p>
             <a:pPr algn="ctr"/>
-            <a:endParaRPr/>
           </a:p>
         </p:txBody>
       </p:sp>
@@ -3677,7 +3663,7 @@
           <a:noFill/>
         </p:spPr>
         <p:txBody>
-          <a:bodyPr wrap="square" lIns="0" tIns="0" rIns="0" bIns="0">
+          <a:bodyPr wrap="square" lIns="0" rIns="0" tIns="0" bIns="0">
             <a:spAutoFit/>
           </a:bodyPr>
           <a:lstStyle/>
@@ -3722,7 +3708,7 @@
           <a:noFill/>
         </p:spPr>
         <p:txBody>
-          <a:bodyPr wrap="square" lIns="0" tIns="0" rIns="0" bIns="0">
+          <a:bodyPr wrap="square" lIns="0" rIns="0" tIns="0" bIns="0">
             <a:spAutoFit/>
           </a:bodyPr>
           <a:lstStyle/>
@@ -3787,11 +3773,10 @@
           </a:fontRef>
         </p:style>
         <p:txBody>
-          <a:bodyPr wrap="square" rtlCol="0" anchor="ctr"/>
+          <a:bodyPr rtlCol="0" anchor="ctr" wrap="square"/>
           <a:lstStyle/>
           <a:p>
             <a:pPr algn="ctr"/>
-            <a:endParaRPr/>
           </a:p>
         </p:txBody>
       </p:sp>
@@ -3812,7 +3797,7 @@
           <a:noFill/>
         </p:spPr>
         <p:txBody>
-          <a:bodyPr wrap="square" lIns="0" tIns="0" rIns="0" bIns="0">
+          <a:bodyPr wrap="square" lIns="0" rIns="0" tIns="0" bIns="0">
             <a:spAutoFit/>
           </a:bodyPr>
           <a:lstStyle/>
@@ -3923,7 +3908,7 @@
           <a:noFill/>
         </p:spPr>
         <p:txBody>
-          <a:bodyPr wrap="square" lIns="0" tIns="0" rIns="0" bIns="0">
+          <a:bodyPr wrap="square" lIns="0" rIns="0" tIns="0" bIns="0">
             <a:spAutoFit/>
           </a:bodyPr>
           <a:lstStyle/>
@@ -4008,7 +3993,7 @@
           <a:noFill/>
         </p:spPr>
         <p:txBody>
-          <a:bodyPr wrap="square" lIns="0" tIns="0" rIns="0" bIns="0">
+          <a:bodyPr wrap="square" lIns="0" rIns="0" tIns="0" bIns="0">
             <a:spAutoFit/>
           </a:bodyPr>
           <a:lstStyle/>
@@ -4053,7 +4038,7 @@
           <a:noFill/>
         </p:spPr>
         <p:txBody>
-          <a:bodyPr wrap="square" lIns="0" tIns="0" rIns="0" bIns="0">
+          <a:bodyPr wrap="square" lIns="0" rIns="0" tIns="0" bIns="0">
             <a:spAutoFit/>
           </a:bodyPr>
           <a:lstStyle/>
@@ -4200,7 +4185,7 @@
           <a:noFill/>
         </p:spPr>
         <p:txBody>
-          <a:bodyPr wrap="square" lIns="0" tIns="0" rIns="0" bIns="0">
+          <a:bodyPr wrap="square" lIns="0" rIns="0" tIns="0" bIns="0">
             <a:spAutoFit/>
           </a:bodyPr>
           <a:lstStyle/>
@@ -4245,7 +4230,7 @@
           <a:noFill/>
         </p:spPr>
         <p:txBody>
-          <a:bodyPr wrap="square" lIns="0" tIns="0" rIns="0" bIns="0">
+          <a:bodyPr wrap="square" lIns="0" rIns="0" tIns="0" bIns="0">
             <a:spAutoFit/>
           </a:bodyPr>
           <a:lstStyle/>
@@ -4282,7 +4267,7 @@
 </file>
 
 <file path=ppt/slides/slide11.xml><?xml version="1.0" encoding="utf-8"?>
-<p:sld xmlns:a="http://schemas.openxmlformats.org/drawingml/2006/main" xmlns:r="http://schemas.openxmlformats.org/officeDocument/2006/relationships" xmlns:p="http://schemas.openxmlformats.org/presentationml/2006/main">
+<p:sld xmlns:a="http://schemas.openxmlformats.org/drawingml/2006/main" xmlns:p="http://schemas.openxmlformats.org/presentationml/2006/main" xmlns:r="http://schemas.openxmlformats.org/officeDocument/2006/relationships">
   <p:cSld>
     <p:bg>
       <p:bgPr>
@@ -4298,14 +4283,7 @@
         <p:cNvGrpSpPr/>
         <p:nvPr/>
       </p:nvGrpSpPr>
-      <p:grpSpPr>
-        <a:xfrm>
-          <a:off x="0" y="0"/>
-          <a:ext cx="0" cy="0"/>
-          <a:chOff x="0" y="0"/>
-          <a:chExt cx="0" cy="0"/>
-        </a:xfrm>
-      </p:grpSpPr>
+      <p:grpSpPr/>
       <p:sp>
         <p:nvSpPr>
           <p:cNvPr id="2" name="Rectangle 1"/>
@@ -4343,11 +4321,10 @@
           </a:fontRef>
         </p:style>
         <p:txBody>
-          <a:bodyPr wrap="square" rtlCol="0" anchor="ctr"/>
+          <a:bodyPr rtlCol="0" anchor="ctr" wrap="square"/>
           <a:lstStyle/>
           <a:p>
             <a:pPr algn="ctr"/>
-            <a:endParaRPr/>
           </a:p>
         </p:txBody>
       </p:sp>
@@ -4368,7 +4345,7 @@
           <a:noFill/>
         </p:spPr>
         <p:txBody>
-          <a:bodyPr wrap="square" lIns="0" tIns="0" rIns="0" bIns="0">
+          <a:bodyPr wrap="square" lIns="0" rIns="0" tIns="0" bIns="0">
             <a:spAutoFit/>
           </a:bodyPr>
           <a:lstStyle/>
@@ -4413,7 +4390,7 @@
           <a:noFill/>
         </p:spPr>
         <p:txBody>
-          <a:bodyPr wrap="square" lIns="0" tIns="0" rIns="0" bIns="0">
+          <a:bodyPr wrap="square" lIns="0" rIns="0" tIns="0" bIns="0">
             <a:spAutoFit/>
           </a:bodyPr>
           <a:lstStyle/>
@@ -4478,11 +4455,10 @@
           </a:fontRef>
         </p:style>
         <p:txBody>
-          <a:bodyPr wrap="square" rtlCol="0" anchor="ctr"/>
+          <a:bodyPr rtlCol="0" anchor="ctr" wrap="square"/>
           <a:lstStyle/>
           <a:p>
             <a:pPr algn="ctr"/>
-            <a:endParaRPr/>
           </a:p>
         </p:txBody>
       </p:sp>
@@ -4523,11 +4499,10 @@
           </a:fontRef>
         </p:style>
         <p:txBody>
-          <a:bodyPr wrap="square" rtlCol="0" anchor="ctr"/>
+          <a:bodyPr rtlCol="0" anchor="ctr" wrap="square"/>
           <a:lstStyle/>
           <a:p>
             <a:pPr algn="ctr"/>
-            <a:endParaRPr/>
           </a:p>
         </p:txBody>
       </p:sp>
@@ -4568,11 +4543,10 @@
           </a:fontRef>
         </p:style>
         <p:txBody>
-          <a:bodyPr wrap="square" rtlCol="0" anchor="ctr"/>
+          <a:bodyPr rtlCol="0" anchor="ctr" wrap="square"/>
           <a:lstStyle/>
           <a:p>
             <a:pPr algn="ctr"/>
-            <a:endParaRPr/>
           </a:p>
         </p:txBody>
       </p:sp>
@@ -4593,7 +4567,7 @@
           <a:noFill/>
         </p:spPr>
         <p:txBody>
-          <a:bodyPr wrap="square" lIns="0" tIns="0" rIns="0" bIns="0">
+          <a:bodyPr wrap="square" lIns="0" rIns="0" tIns="0" bIns="0">
             <a:spAutoFit/>
           </a:bodyPr>
           <a:lstStyle/>
@@ -4680,11 +4654,10 @@
           </a:fontRef>
         </p:style>
         <p:txBody>
-          <a:bodyPr wrap="square" rtlCol="0" anchor="ctr"/>
+          <a:bodyPr rtlCol="0" anchor="ctr" wrap="square"/>
           <a:lstStyle/>
           <a:p>
             <a:pPr algn="ctr"/>
-            <a:endParaRPr/>
           </a:p>
         </p:txBody>
       </p:sp>
@@ -4725,11 +4698,10 @@
           </a:fontRef>
         </p:style>
         <p:txBody>
-          <a:bodyPr wrap="square" rtlCol="0" anchor="ctr"/>
+          <a:bodyPr rtlCol="0" anchor="ctr" wrap="square"/>
           <a:lstStyle/>
           <a:p>
             <a:pPr algn="ctr"/>
-            <a:endParaRPr/>
           </a:p>
         </p:txBody>
       </p:sp>
@@ -4750,7 +4722,7 @@
           <a:noFill/>
         </p:spPr>
         <p:txBody>
-          <a:bodyPr wrap="square" lIns="0" tIns="0" rIns="0" bIns="0">
+          <a:bodyPr wrap="square" lIns="0" rIns="0" tIns="0" bIns="0">
             <a:spAutoFit/>
           </a:bodyPr>
           <a:lstStyle/>
@@ -4837,11 +4809,10 @@
           </a:fontRef>
         </p:style>
         <p:txBody>
-          <a:bodyPr wrap="square" rtlCol="0" anchor="ctr"/>
+          <a:bodyPr rtlCol="0" anchor="ctr" wrap="square"/>
           <a:lstStyle/>
           <a:p>
             <a:pPr algn="ctr"/>
-            <a:endParaRPr/>
           </a:p>
         </p:txBody>
       </p:sp>
@@ -4882,11 +4853,10 @@
           </a:fontRef>
         </p:style>
         <p:txBody>
-          <a:bodyPr wrap="square" rtlCol="0" anchor="ctr"/>
+          <a:bodyPr rtlCol="0" anchor="ctr" wrap="square"/>
           <a:lstStyle/>
           <a:p>
             <a:pPr algn="ctr"/>
-            <a:endParaRPr/>
           </a:p>
         </p:txBody>
       </p:sp>
@@ -4907,7 +4877,7 @@
           <a:noFill/>
         </p:spPr>
         <p:txBody>
-          <a:bodyPr wrap="square" lIns="0" tIns="0" rIns="0" bIns="0">
+          <a:bodyPr wrap="square" lIns="0" rIns="0" tIns="0" bIns="0">
             <a:spAutoFit/>
           </a:bodyPr>
           <a:lstStyle/>
@@ -4994,11 +4964,10 @@
           </a:fontRef>
         </p:style>
         <p:txBody>
-          <a:bodyPr wrap="square" rtlCol="0" anchor="ctr"/>
+          <a:bodyPr rtlCol="0" anchor="ctr" wrap="square"/>
           <a:lstStyle/>
           <a:p>
             <a:pPr algn="ctr"/>
-            <a:endParaRPr/>
           </a:p>
         </p:txBody>
       </p:sp>
@@ -5039,11 +5008,10 @@
           </a:fontRef>
         </p:style>
         <p:txBody>
-          <a:bodyPr wrap="square" rtlCol="0" anchor="ctr"/>
+          <a:bodyPr rtlCol="0" anchor="ctr" wrap="square"/>
           <a:lstStyle/>
           <a:p>
             <a:pPr algn="ctr"/>
-            <a:endParaRPr/>
           </a:p>
         </p:txBody>
       </p:sp>
@@ -5064,7 +5032,7 @@
           <a:noFill/>
         </p:spPr>
         <p:txBody>
-          <a:bodyPr wrap="square" lIns="0" tIns="0" rIns="0" bIns="0">
+          <a:bodyPr wrap="square" lIns="0" rIns="0" tIns="0" bIns="0">
             <a:spAutoFit/>
           </a:bodyPr>
           <a:lstStyle/>
@@ -5151,11 +5119,10 @@
           </a:fontRef>
         </p:style>
         <p:txBody>
-          <a:bodyPr wrap="square" rtlCol="0" anchor="ctr"/>
+          <a:bodyPr rtlCol="0" anchor="ctr" wrap="square"/>
           <a:lstStyle/>
           <a:p>
             <a:pPr algn="ctr"/>
-            <a:endParaRPr/>
           </a:p>
         </p:txBody>
       </p:sp>
@@ -5196,11 +5163,10 @@
           </a:fontRef>
         </p:style>
         <p:txBody>
-          <a:bodyPr wrap="square" rtlCol="0" anchor="ctr"/>
+          <a:bodyPr rtlCol="0" anchor="ctr" wrap="square"/>
           <a:lstStyle/>
           <a:p>
             <a:pPr algn="ctr"/>
-            <a:endParaRPr/>
           </a:p>
         </p:txBody>
       </p:sp>
@@ -5221,7 +5187,7 @@
           <a:noFill/>
         </p:spPr>
         <p:txBody>
-          <a:bodyPr wrap="square" lIns="0" tIns="0" rIns="0" bIns="0">
+          <a:bodyPr wrap="square" lIns="0" rIns="0" tIns="0" bIns="0">
             <a:spAutoFit/>
           </a:bodyPr>
           <a:lstStyle/>
@@ -5288,7 +5254,7 @@
           <a:noFill/>
         </p:spPr>
         <p:txBody>
-          <a:bodyPr wrap="square" lIns="0" tIns="0" rIns="0" bIns="0">
+          <a:bodyPr wrap="square" lIns="0" rIns="0" tIns="0" bIns="0">
             <a:spAutoFit/>
           </a:bodyPr>
           <a:lstStyle/>
@@ -5353,11 +5319,10 @@
           </a:fontRef>
         </p:style>
         <p:txBody>
-          <a:bodyPr wrap="square" rtlCol="0" anchor="ctr"/>
+          <a:bodyPr rtlCol="0" anchor="ctr" wrap="square"/>
           <a:lstStyle/>
           <a:p>
             <a:pPr algn="ctr"/>
-            <a:endParaRPr/>
           </a:p>
         </p:txBody>
       </p:sp>
@@ -5378,7 +5343,7 @@
           <a:noFill/>
         </p:spPr>
         <p:txBody>
-          <a:bodyPr wrap="square" lIns="0" tIns="0" rIns="0" bIns="0">
+          <a:bodyPr wrap="square" lIns="0" rIns="0" tIns="0" bIns="0">
             <a:spAutoFit/>
           </a:bodyPr>
           <a:lstStyle/>
@@ -5423,7 +5388,7 @@
           <a:noFill/>
         </p:spPr>
         <p:txBody>
-          <a:bodyPr wrap="square" lIns="0" tIns="0" rIns="0" bIns="0">
+          <a:bodyPr wrap="square" lIns="0" rIns="0" tIns="0" bIns="0">
             <a:spAutoFit/>
           </a:bodyPr>
           <a:lstStyle/>
@@ -5468,7 +5433,7 @@
           <a:noFill/>
         </p:spPr>
         <p:txBody>
-          <a:bodyPr wrap="square" lIns="0" tIns="0" rIns="0" bIns="0">
+          <a:bodyPr wrap="square" lIns="0" rIns="0" tIns="0" bIns="0">
             <a:spAutoFit/>
           </a:bodyPr>
           <a:lstStyle/>
@@ -5513,7 +5478,7 @@
           <a:noFill/>
         </p:spPr>
         <p:txBody>
-          <a:bodyPr wrap="square" lIns="0" tIns="0" rIns="0" bIns="0">
+          <a:bodyPr wrap="square" lIns="0" rIns="0" tIns="0" bIns="0">
             <a:spAutoFit/>
           </a:bodyPr>
           <a:lstStyle/>
@@ -5558,7 +5523,7 @@
           <a:noFill/>
         </p:spPr>
         <p:txBody>
-          <a:bodyPr wrap="square" lIns="0" tIns="0" rIns="0" bIns="0">
+          <a:bodyPr wrap="square" lIns="0" rIns="0" tIns="0" bIns="0">
             <a:spAutoFit/>
           </a:bodyPr>
           <a:lstStyle/>
@@ -5603,7 +5568,7 @@
           <a:noFill/>
         </p:spPr>
         <p:txBody>
-          <a:bodyPr wrap="square" lIns="0" tIns="0" rIns="0" bIns="0">
+          <a:bodyPr wrap="square" lIns="0" rIns="0" tIns="0" bIns="0">
             <a:spAutoFit/>
           </a:bodyPr>
           <a:lstStyle/>
@@ -5668,11 +5633,10 @@
           </a:fontRef>
         </p:style>
         <p:txBody>
-          <a:bodyPr wrap="square" rtlCol="0" anchor="ctr"/>
+          <a:bodyPr rtlCol="0" anchor="ctr" wrap="square"/>
           <a:lstStyle/>
           <a:p>
             <a:pPr algn="ctr"/>
-            <a:endParaRPr/>
           </a:p>
         </p:txBody>
       </p:sp>
@@ -5693,7 +5657,7 @@
           <a:noFill/>
         </p:spPr>
         <p:txBody>
-          <a:bodyPr wrap="square" lIns="0" tIns="0" rIns="0" bIns="0">
+          <a:bodyPr wrap="square" lIns="0" rIns="0" tIns="0" bIns="0">
             <a:spAutoFit/>
           </a:bodyPr>
           <a:lstStyle/>
@@ -5738,7 +5702,7 @@
           <a:noFill/>
         </p:spPr>
         <p:txBody>
-          <a:bodyPr wrap="square" lIns="0" tIns="0" rIns="0" bIns="0">
+          <a:bodyPr wrap="square" lIns="0" rIns="0" tIns="0" bIns="0">
             <a:spAutoFit/>
           </a:bodyPr>
           <a:lstStyle/>
@@ -5783,7 +5747,7 @@
           <a:noFill/>
         </p:spPr>
         <p:txBody>
-          <a:bodyPr wrap="square" lIns="0" tIns="0" rIns="0" bIns="0">
+          <a:bodyPr wrap="square" lIns="0" rIns="0" tIns="0" bIns="0">
             <a:spAutoFit/>
           </a:bodyPr>
           <a:lstStyle/>
@@ -5828,7 +5792,7 @@
           <a:noFill/>
         </p:spPr>
         <p:txBody>
-          <a:bodyPr wrap="square" lIns="0" tIns="0" rIns="0" bIns="0">
+          <a:bodyPr wrap="square" lIns="0" rIns="0" tIns="0" bIns="0">
             <a:spAutoFit/>
           </a:bodyPr>
           <a:lstStyle/>
@@ -5873,7 +5837,7 @@
           <a:noFill/>
         </p:spPr>
         <p:txBody>
-          <a:bodyPr wrap="square" lIns="0" tIns="0" rIns="0" bIns="0">
+          <a:bodyPr wrap="square" lIns="0" rIns="0" tIns="0" bIns="0">
             <a:spAutoFit/>
           </a:bodyPr>
           <a:lstStyle/>
@@ -5918,7 +5882,7 @@
           <a:noFill/>
         </p:spPr>
         <p:txBody>
-          <a:bodyPr wrap="square" lIns="0" tIns="0" rIns="0" bIns="0">
+          <a:bodyPr wrap="square" lIns="0" rIns="0" tIns="0" bIns="0">
             <a:spAutoFit/>
           </a:bodyPr>
           <a:lstStyle/>
@@ -5983,11 +5947,10 @@
           </a:fontRef>
         </p:style>
         <p:txBody>
-          <a:bodyPr wrap="square" rtlCol="0" anchor="ctr"/>
+          <a:bodyPr rtlCol="0" anchor="ctr" wrap="square"/>
           <a:lstStyle/>
           <a:p>
             <a:pPr algn="ctr"/>
-            <a:endParaRPr/>
           </a:p>
         </p:txBody>
       </p:sp>
@@ -6008,7 +5971,7 @@
           <a:noFill/>
         </p:spPr>
         <p:txBody>
-          <a:bodyPr wrap="square" lIns="0" tIns="0" rIns="0" bIns="0">
+          <a:bodyPr wrap="square" lIns="0" rIns="0" tIns="0" bIns="0">
             <a:spAutoFit/>
           </a:bodyPr>
           <a:lstStyle/>
@@ -6053,7 +6016,7 @@
           <a:noFill/>
         </p:spPr>
         <p:txBody>
-          <a:bodyPr wrap="square" lIns="0" tIns="0" rIns="0" bIns="0">
+          <a:bodyPr wrap="square" lIns="0" rIns="0" tIns="0" bIns="0">
             <a:spAutoFit/>
           </a:bodyPr>
           <a:lstStyle/>
@@ -6098,7 +6061,7 @@
           <a:noFill/>
         </p:spPr>
         <p:txBody>
-          <a:bodyPr wrap="square" lIns="0" tIns="0" rIns="0" bIns="0">
+          <a:bodyPr wrap="square" lIns="0" rIns="0" tIns="0" bIns="0">
             <a:spAutoFit/>
           </a:bodyPr>
           <a:lstStyle/>
@@ -6143,7 +6106,7 @@
           <a:noFill/>
         </p:spPr>
         <p:txBody>
-          <a:bodyPr wrap="square" lIns="0" tIns="0" rIns="0" bIns="0">
+          <a:bodyPr wrap="square" lIns="0" rIns="0" tIns="0" bIns="0">
             <a:spAutoFit/>
           </a:bodyPr>
           <a:lstStyle/>
@@ -6188,7 +6151,7 @@
           <a:noFill/>
         </p:spPr>
         <p:txBody>
-          <a:bodyPr wrap="square" lIns="0" tIns="0" rIns="0" bIns="0">
+          <a:bodyPr wrap="square" lIns="0" rIns="0" tIns="0" bIns="0">
             <a:spAutoFit/>
           </a:bodyPr>
           <a:lstStyle/>
@@ -6233,7 +6196,7 @@
           <a:noFill/>
         </p:spPr>
         <p:txBody>
-          <a:bodyPr wrap="square" lIns="0" tIns="0" rIns="0" bIns="0">
+          <a:bodyPr wrap="square" lIns="0" rIns="0" tIns="0" bIns="0">
             <a:spAutoFit/>
           </a:bodyPr>
           <a:lstStyle/>
@@ -6298,11 +6261,10 @@
           </a:fontRef>
         </p:style>
         <p:txBody>
-          <a:bodyPr wrap="square" rtlCol="0" anchor="ctr"/>
+          <a:bodyPr rtlCol="0" anchor="ctr" wrap="square"/>
           <a:lstStyle/>
           <a:p>
             <a:pPr algn="ctr"/>
-            <a:endParaRPr/>
           </a:p>
         </p:txBody>
       </p:sp>
@@ -6323,7 +6285,7 @@
           <a:noFill/>
         </p:spPr>
         <p:txBody>
-          <a:bodyPr wrap="square" lIns="0" tIns="0" rIns="0" bIns="0">
+          <a:bodyPr wrap="square" lIns="0" rIns="0" tIns="0" bIns="0">
             <a:spAutoFit/>
           </a:bodyPr>
           <a:lstStyle/>
@@ -6368,7 +6330,7 @@
           <a:noFill/>
         </p:spPr>
         <p:txBody>
-          <a:bodyPr wrap="square" lIns="0" tIns="0" rIns="0" bIns="0">
+          <a:bodyPr wrap="square" lIns="0" rIns="0" tIns="0" bIns="0">
             <a:spAutoFit/>
           </a:bodyPr>
           <a:lstStyle/>
@@ -6413,7 +6375,7 @@
           <a:noFill/>
         </p:spPr>
         <p:txBody>
-          <a:bodyPr wrap="square" lIns="0" tIns="0" rIns="0" bIns="0">
+          <a:bodyPr wrap="square" lIns="0" rIns="0" tIns="0" bIns="0">
             <a:spAutoFit/>
           </a:bodyPr>
           <a:lstStyle/>
@@ -6478,11 +6440,10 @@
           </a:fontRef>
         </p:style>
         <p:txBody>
-          <a:bodyPr wrap="square" rtlCol="0" anchor="ctr"/>
+          <a:bodyPr rtlCol="0" anchor="ctr" wrap="square"/>
           <a:lstStyle/>
           <a:p>
             <a:pPr algn="ctr"/>
-            <a:endParaRPr/>
           </a:p>
         </p:txBody>
       </p:sp>
@@ -6523,11 +6484,10 @@
           </a:fontRef>
         </p:style>
         <p:txBody>
-          <a:bodyPr wrap="square" rtlCol="0" anchor="ctr"/>
+          <a:bodyPr rtlCol="0" anchor="ctr" wrap="square"/>
           <a:lstStyle/>
           <a:p>
             <a:pPr algn="ctr"/>
-            <a:endParaRPr/>
           </a:p>
         </p:txBody>
       </p:sp>
@@ -6548,7 +6508,7 @@
           <a:noFill/>
         </p:spPr>
         <p:txBody>
-          <a:bodyPr wrap="square" lIns="0" tIns="0" rIns="0" bIns="0">
+          <a:bodyPr wrap="square" lIns="0" rIns="0" tIns="0" bIns="0">
             <a:spAutoFit/>
           </a:bodyPr>
           <a:lstStyle/>
@@ -6599,7 +6559,7 @@
           <a:noFill/>
         </p:spPr>
         <p:txBody>
-          <a:bodyPr wrap="square" lIns="0" tIns="0" rIns="0" bIns="0">
+          <a:bodyPr wrap="square" lIns="0" rIns="0" tIns="0" bIns="0">
             <a:spAutoFit/>
           </a:bodyPr>
           <a:lstStyle/>
@@ -6664,11 +6624,10 @@
           </a:fontRef>
         </p:style>
         <p:txBody>
-          <a:bodyPr wrap="square" rtlCol="0" anchor="ctr"/>
+          <a:bodyPr rtlCol="0" anchor="ctr" wrap="square"/>
           <a:lstStyle/>
           <a:p>
             <a:pPr algn="ctr"/>
-            <a:endParaRPr/>
           </a:p>
         </p:txBody>
       </p:sp>
@@ -6689,7 +6648,7 @@
           <a:noFill/>
         </p:spPr>
         <p:txBody>
-          <a:bodyPr wrap="square" lIns="0" tIns="0" rIns="0" bIns="0">
+          <a:bodyPr wrap="square" lIns="0" rIns="0" tIns="0" bIns="0">
             <a:spAutoFit/>
           </a:bodyPr>
           <a:lstStyle/>
@@ -6734,7 +6693,7 @@
           <a:noFill/>
         </p:spPr>
         <p:txBody>
-          <a:bodyPr wrap="square" lIns="0" tIns="0" rIns="0" bIns="0">
+          <a:bodyPr wrap="square" lIns="0" rIns="0" tIns="0" bIns="0">
             <a:spAutoFit/>
           </a:bodyPr>
           <a:lstStyle/>
@@ -6779,7 +6738,7 @@
           <a:noFill/>
         </p:spPr>
         <p:txBody>
-          <a:bodyPr wrap="square" lIns="0" tIns="0" rIns="0" bIns="0">
+          <a:bodyPr wrap="square" lIns="0" rIns="0" tIns="0" bIns="0">
             <a:spAutoFit/>
           </a:bodyPr>
           <a:lstStyle/>
@@ -6824,7 +6783,7 @@
           <a:noFill/>
         </p:spPr>
         <p:txBody>
-          <a:bodyPr wrap="square" lIns="0" tIns="0" rIns="0" bIns="0">
+          <a:bodyPr wrap="square" lIns="0" rIns="0" tIns="0" bIns="0">
             <a:spAutoFit/>
           </a:bodyPr>
           <a:lstStyle/>
@@ -6869,7 +6828,7 @@
           <a:noFill/>
         </p:spPr>
         <p:txBody>
-          <a:bodyPr wrap="square" lIns="0" tIns="0" rIns="0" bIns="0">
+          <a:bodyPr wrap="square" lIns="0" rIns="0" tIns="0" bIns="0">
             <a:spAutoFit/>
           </a:bodyPr>
           <a:lstStyle/>
@@ -6914,7 +6873,7 @@
           <a:noFill/>
         </p:spPr>
         <p:txBody>
-          <a:bodyPr wrap="square" lIns="0" tIns="0" rIns="0" bIns="0">
+          <a:bodyPr wrap="square" lIns="0" rIns="0" tIns="0" bIns="0">
             <a:spAutoFit/>
           </a:bodyPr>
           <a:lstStyle/>
@@ -6959,7 +6918,7 @@
           <a:noFill/>
         </p:spPr>
         <p:txBody>
-          <a:bodyPr wrap="square" lIns="0" tIns="0" rIns="0" bIns="0">
+          <a:bodyPr wrap="square" lIns="0" rIns="0" tIns="0" bIns="0">
             <a:spAutoFit/>
           </a:bodyPr>
           <a:lstStyle/>
@@ -7004,7 +6963,7 @@
           <a:noFill/>
         </p:spPr>
         <p:txBody>
-          <a:bodyPr wrap="square" lIns="0" tIns="0" rIns="0" bIns="0">
+          <a:bodyPr wrap="square" lIns="0" rIns="0" tIns="0" bIns="0">
             <a:spAutoFit/>
           </a:bodyPr>
           <a:lstStyle/>
@@ -7049,7 +7008,7 @@
           <a:noFill/>
         </p:spPr>
         <p:txBody>
-          <a:bodyPr wrap="square" lIns="0" tIns="0" rIns="0" bIns="0">
+          <a:bodyPr wrap="square" lIns="0" rIns="0" tIns="0" bIns="0">
             <a:spAutoFit/>
           </a:bodyPr>
           <a:lstStyle/>
@@ -7094,7 +7053,7 @@
           <a:noFill/>
         </p:spPr>
         <p:txBody>
-          <a:bodyPr wrap="square" lIns="0" tIns="0" rIns="0" bIns="0">
+          <a:bodyPr wrap="square" lIns="0" rIns="0" tIns="0" bIns="0">
             <a:spAutoFit/>
           </a:bodyPr>
           <a:lstStyle/>
@@ -7159,11 +7118,10 @@
           </a:fontRef>
         </p:style>
         <p:txBody>
-          <a:bodyPr wrap="square" rtlCol="0" anchor="ctr"/>
+          <a:bodyPr rtlCol="0" anchor="ctr" wrap="square"/>
           <a:lstStyle/>
           <a:p>
             <a:pPr algn="ctr"/>
-            <a:endParaRPr/>
           </a:p>
         </p:txBody>
       </p:sp>
@@ -7184,7 +7142,7 @@
           <a:noFill/>
         </p:spPr>
         <p:txBody>
-          <a:bodyPr wrap="square" lIns="0" tIns="0" rIns="0" bIns="0">
+          <a:bodyPr wrap="square" lIns="0" rIns="0" tIns="0" bIns="0">
             <a:spAutoFit/>
           </a:bodyPr>
           <a:lstStyle/>
@@ -7229,7 +7187,7 @@
           <a:noFill/>
         </p:spPr>
         <p:txBody>
-          <a:bodyPr wrap="square" lIns="0" tIns="0" rIns="0" bIns="0">
+          <a:bodyPr wrap="square" lIns="0" rIns="0" tIns="0" bIns="0">
             <a:spAutoFit/>
           </a:bodyPr>
           <a:lstStyle/>
@@ -7274,7 +7232,7 @@
           <a:noFill/>
         </p:spPr>
         <p:txBody>
-          <a:bodyPr wrap="square" lIns="0" tIns="0" rIns="0" bIns="0">
+          <a:bodyPr wrap="square" lIns="0" rIns="0" tIns="0" bIns="0">
             <a:spAutoFit/>
           </a:bodyPr>
           <a:lstStyle/>
@@ -7319,7 +7277,7 @@
           <a:noFill/>
         </p:spPr>
         <p:txBody>
-          <a:bodyPr wrap="square" lIns="0" tIns="0" rIns="0" bIns="0">
+          <a:bodyPr wrap="square" lIns="0" rIns="0" tIns="0" bIns="0">
             <a:spAutoFit/>
           </a:bodyPr>
           <a:lstStyle/>
@@ -7364,7 +7322,7 @@
           <a:noFill/>
         </p:spPr>
         <p:txBody>
-          <a:bodyPr wrap="square" lIns="0" tIns="0" rIns="0" bIns="0">
+          <a:bodyPr wrap="square" lIns="0" rIns="0" tIns="0" bIns="0">
             <a:spAutoFit/>
           </a:bodyPr>
           <a:lstStyle/>
@@ -7409,7 +7367,7 @@
           <a:noFill/>
         </p:spPr>
         <p:txBody>
-          <a:bodyPr wrap="square" lIns="0" tIns="0" rIns="0" bIns="0">
+          <a:bodyPr wrap="square" lIns="0" rIns="0" tIns="0" bIns="0">
             <a:spAutoFit/>
           </a:bodyPr>
           <a:lstStyle/>
@@ -7454,7 +7412,7 @@
           <a:noFill/>
         </p:spPr>
         <p:txBody>
-          <a:bodyPr wrap="square" lIns="0" tIns="0" rIns="0" bIns="0">
+          <a:bodyPr wrap="square" lIns="0" rIns="0" tIns="0" bIns="0">
             <a:spAutoFit/>
           </a:bodyPr>
           <a:lstStyle/>
@@ -7499,7 +7457,7 @@
           <a:noFill/>
         </p:spPr>
         <p:txBody>
-          <a:bodyPr wrap="square" lIns="0" tIns="0" rIns="0" bIns="0">
+          <a:bodyPr wrap="square" lIns="0" rIns="0" tIns="0" bIns="0">
             <a:spAutoFit/>
           </a:bodyPr>
           <a:lstStyle/>
@@ -7544,7 +7502,7 @@
           <a:noFill/>
         </p:spPr>
         <p:txBody>
-          <a:bodyPr wrap="square" lIns="0" tIns="0" rIns="0" bIns="0">
+          <a:bodyPr wrap="square" lIns="0" rIns="0" tIns="0" bIns="0">
             <a:spAutoFit/>
           </a:bodyPr>
           <a:lstStyle/>
@@ -7589,7 +7547,7 @@
           <a:noFill/>
         </p:spPr>
         <p:txBody>
-          <a:bodyPr wrap="square" lIns="0" tIns="0" rIns="0" bIns="0">
+          <a:bodyPr wrap="square" lIns="0" rIns="0" tIns="0" bIns="0">
             <a:spAutoFit/>
           </a:bodyPr>
           <a:lstStyle/>
@@ -7654,11 +7612,10 @@
           </a:fontRef>
         </p:style>
         <p:txBody>
-          <a:bodyPr wrap="square" rtlCol="0" anchor="ctr"/>
+          <a:bodyPr rtlCol="0" anchor="ctr" wrap="square"/>
           <a:lstStyle/>
           <a:p>
             <a:pPr algn="ctr"/>
-            <a:endParaRPr/>
           </a:p>
         </p:txBody>
       </p:sp>
@@ -7679,7 +7636,7 @@
           <a:noFill/>
         </p:spPr>
         <p:txBody>
-          <a:bodyPr wrap="square" lIns="0" tIns="0" rIns="0" bIns="0">
+          <a:bodyPr wrap="square" lIns="0" rIns="0" tIns="0" bIns="0">
             <a:spAutoFit/>
           </a:bodyPr>
           <a:lstStyle/>
@@ -7724,7 +7681,7 @@
           <a:noFill/>
         </p:spPr>
         <p:txBody>
-          <a:bodyPr wrap="square" lIns="0" tIns="0" rIns="0" bIns="0">
+          <a:bodyPr wrap="square" lIns="0" rIns="0" tIns="0" bIns="0">
             <a:spAutoFit/>
           </a:bodyPr>
           <a:lstStyle/>
@@ -7769,7 +7726,7 @@
           <a:noFill/>
         </p:spPr>
         <p:txBody>
-          <a:bodyPr wrap="square" lIns="0" tIns="0" rIns="0" bIns="0">
+          <a:bodyPr wrap="square" lIns="0" rIns="0" tIns="0" bIns="0">
             <a:spAutoFit/>
           </a:bodyPr>
           <a:lstStyle/>
@@ -7814,7 +7771,7 @@
           <a:noFill/>
         </p:spPr>
         <p:txBody>
-          <a:bodyPr wrap="square" lIns="0" tIns="0" rIns="0" bIns="0">
+          <a:bodyPr wrap="square" lIns="0" rIns="0" tIns="0" bIns="0">
             <a:spAutoFit/>
           </a:bodyPr>
           <a:lstStyle/>
@@ -7859,7 +7816,7 @@
           <a:noFill/>
         </p:spPr>
         <p:txBody>
-          <a:bodyPr wrap="square" lIns="0" tIns="0" rIns="0" bIns="0">
+          <a:bodyPr wrap="square" lIns="0" rIns="0" tIns="0" bIns="0">
             <a:spAutoFit/>
           </a:bodyPr>
           <a:lstStyle/>
@@ -7924,11 +7881,10 @@
           </a:fontRef>
         </p:style>
         <p:txBody>
-          <a:bodyPr wrap="square" rtlCol="0" anchor="ctr"/>
+          <a:bodyPr rtlCol="0" anchor="ctr" wrap="square"/>
           <a:lstStyle/>
           <a:p>
             <a:pPr algn="ctr"/>
-            <a:endParaRPr/>
           </a:p>
         </p:txBody>
       </p:sp>
@@ -7969,11 +7925,10 @@
           </a:fontRef>
         </p:style>
         <p:txBody>
-          <a:bodyPr wrap="square" rtlCol="0" anchor="ctr"/>
+          <a:bodyPr rtlCol="0" anchor="ctr" wrap="square"/>
           <a:lstStyle/>
           <a:p>
             <a:pPr algn="ctr"/>
-            <a:endParaRPr/>
           </a:p>
         </p:txBody>
       </p:sp>
@@ -7994,7 +7949,7 @@
           <a:noFill/>
         </p:spPr>
         <p:txBody>
-          <a:bodyPr wrap="square" lIns="0" tIns="0" rIns="0" bIns="0">
+          <a:bodyPr wrap="square" lIns="0" rIns="0" tIns="0" bIns="0">
             <a:spAutoFit/>
           </a:bodyPr>
           <a:lstStyle/>
@@ -8045,7 +8000,7 @@
           <a:noFill/>
         </p:spPr>
         <p:txBody>
-          <a:bodyPr wrap="square" lIns="0" tIns="0" rIns="0" bIns="0">
+          <a:bodyPr wrap="square" lIns="0" rIns="0" tIns="0" bIns="0">
             <a:spAutoFit/>
           </a:bodyPr>
           <a:lstStyle/>
@@ -8090,7 +8045,7 @@
           <a:noFill/>
         </p:spPr>
         <p:txBody>
-          <a:bodyPr wrap="square" lIns="0" tIns="0" rIns="0" bIns="0">
+          <a:bodyPr wrap="square" lIns="0" rIns="0" tIns="0" bIns="0">
             <a:spAutoFit/>
           </a:bodyPr>
           <a:lstStyle/>
@@ -8127,7 +8082,7 @@
 </file>
 
 <file path=ppt/slides/slide12.xml><?xml version="1.0" encoding="utf-8"?>
-<p:sld xmlns:a="http://schemas.openxmlformats.org/drawingml/2006/main" xmlns:r="http://schemas.openxmlformats.org/officeDocument/2006/relationships" xmlns:p="http://schemas.openxmlformats.org/presentationml/2006/main">
+<p:sld xmlns:a="http://schemas.openxmlformats.org/drawingml/2006/main" xmlns:p="http://schemas.openxmlformats.org/presentationml/2006/main" xmlns:r="http://schemas.openxmlformats.org/officeDocument/2006/relationships">
   <p:cSld>
     <p:bg>
       <p:bgPr>
@@ -8143,14 +8098,7 @@
         <p:cNvGrpSpPr/>
         <p:nvPr/>
       </p:nvGrpSpPr>
-      <p:grpSpPr>
-        <a:xfrm>
-          <a:off x="0" y="0"/>
-          <a:ext cx="0" cy="0"/>
-          <a:chOff x="0" y="0"/>
-          <a:chExt cx="0" cy="0"/>
-        </a:xfrm>
-      </p:grpSpPr>
+      <p:grpSpPr/>
       <p:sp>
         <p:nvSpPr>
           <p:cNvPr id="2" name="Rectangle 1"/>
@@ -8188,11 +8136,10 @@
           </a:fontRef>
         </p:style>
         <p:txBody>
-          <a:bodyPr wrap="square" rtlCol="0" anchor="ctr"/>
+          <a:bodyPr rtlCol="0" anchor="ctr" wrap="square"/>
           <a:lstStyle/>
           <a:p>
             <a:pPr algn="ctr"/>
-            <a:endParaRPr/>
           </a:p>
         </p:txBody>
       </p:sp>
@@ -8213,7 +8160,7 @@
           <a:noFill/>
         </p:spPr>
         <p:txBody>
-          <a:bodyPr wrap="square" lIns="0" tIns="0" rIns="0" bIns="0">
+          <a:bodyPr wrap="square" lIns="0" rIns="0" tIns="0" bIns="0">
             <a:spAutoFit/>
           </a:bodyPr>
           <a:lstStyle/>
@@ -8258,7 +8205,7 @@
           <a:noFill/>
         </p:spPr>
         <p:txBody>
-          <a:bodyPr wrap="square" lIns="0" tIns="0" rIns="0" bIns="0">
+          <a:bodyPr wrap="square" lIns="0" rIns="0" tIns="0" bIns="0">
             <a:spAutoFit/>
           </a:bodyPr>
           <a:lstStyle/>
@@ -8323,11 +8270,10 @@
           </a:fontRef>
         </p:style>
         <p:txBody>
-          <a:bodyPr wrap="square" rtlCol="0" anchor="ctr"/>
+          <a:bodyPr rtlCol="0" anchor="ctr" wrap="square"/>
           <a:lstStyle/>
           <a:p>
             <a:pPr algn="ctr"/>
-            <a:endParaRPr/>
           </a:p>
         </p:txBody>
       </p:sp>
@@ -8348,7 +8294,7 @@
           <a:noFill/>
         </p:spPr>
         <p:txBody>
-          <a:bodyPr wrap="square" lIns="0" tIns="0" rIns="0" bIns="0">
+          <a:bodyPr wrap="square" lIns="0" rIns="0" tIns="0" bIns="0">
             <a:spAutoFit/>
           </a:bodyPr>
           <a:lstStyle/>
@@ -8413,11 +8359,10 @@
           </a:fontRef>
         </p:style>
         <p:txBody>
-          <a:bodyPr wrap="square" rtlCol="0" anchor="ctr"/>
+          <a:bodyPr rtlCol="0" anchor="ctr" wrap="square"/>
           <a:lstStyle/>
           <a:p>
             <a:pPr algn="ctr"/>
-            <a:endParaRPr/>
           </a:p>
         </p:txBody>
       </p:sp>
@@ -8438,7 +8383,7 @@
           <a:noFill/>
         </p:spPr>
         <p:txBody>
-          <a:bodyPr wrap="square" lIns="0" tIns="0" rIns="0" bIns="0">
+          <a:bodyPr wrap="square" lIns="0" rIns="0" tIns="0" bIns="0">
             <a:spAutoFit/>
           </a:bodyPr>
           <a:lstStyle/>
@@ -8483,7 +8428,7 @@
           <a:noFill/>
         </p:spPr>
         <p:txBody>
-          <a:bodyPr wrap="square" lIns="0" tIns="0" rIns="0" bIns="0">
+          <a:bodyPr wrap="square" lIns="0" rIns="0" tIns="0" bIns="0">
             <a:spAutoFit/>
           </a:bodyPr>
           <a:lstStyle/>
@@ -8528,7 +8473,7 @@
           <a:noFill/>
         </p:spPr>
         <p:txBody>
-          <a:bodyPr wrap="square" lIns="0" tIns="0" rIns="0" bIns="0">
+          <a:bodyPr wrap="square" lIns="0" rIns="0" tIns="0" bIns="0">
             <a:spAutoFit/>
           </a:bodyPr>
           <a:lstStyle/>
@@ -8573,7 +8518,7 @@
           <a:noFill/>
         </p:spPr>
         <p:txBody>
-          <a:bodyPr wrap="square" lIns="0" tIns="0" rIns="0" bIns="0">
+          <a:bodyPr wrap="square" lIns="0" rIns="0" tIns="0" bIns="0">
             <a:spAutoFit/>
           </a:bodyPr>
           <a:lstStyle/>
@@ -8618,7 +8563,7 @@
           <a:noFill/>
         </p:spPr>
         <p:txBody>
-          <a:bodyPr wrap="square" lIns="0" tIns="0" rIns="0" bIns="0">
+          <a:bodyPr wrap="square" lIns="0" rIns="0" tIns="0" bIns="0">
             <a:spAutoFit/>
           </a:bodyPr>
           <a:lstStyle/>
@@ -8663,7 +8608,7 @@
           <a:noFill/>
         </p:spPr>
         <p:txBody>
-          <a:bodyPr wrap="square" lIns="0" tIns="0" rIns="0" bIns="0">
+          <a:bodyPr wrap="square" lIns="0" rIns="0" tIns="0" bIns="0">
             <a:spAutoFit/>
           </a:bodyPr>
           <a:lstStyle/>
@@ -8728,11 +8673,10 @@
           </a:fontRef>
         </p:style>
         <p:txBody>
-          <a:bodyPr wrap="square" rtlCol="0" anchor="ctr"/>
+          <a:bodyPr rtlCol="0" anchor="ctr" wrap="square"/>
           <a:lstStyle/>
           <a:p>
             <a:pPr algn="ctr"/>
-            <a:endParaRPr/>
           </a:p>
         </p:txBody>
       </p:sp>
@@ -8753,7 +8697,7 @@
           <a:noFill/>
         </p:spPr>
         <p:txBody>
-          <a:bodyPr wrap="square" lIns="0" tIns="0" rIns="0" bIns="0">
+          <a:bodyPr wrap="square" lIns="0" rIns="0" tIns="0" bIns="0">
             <a:spAutoFit/>
           </a:bodyPr>
           <a:lstStyle/>
@@ -8798,7 +8742,7 @@
           <a:noFill/>
         </p:spPr>
         <p:txBody>
-          <a:bodyPr wrap="square" lIns="0" tIns="0" rIns="0" bIns="0">
+          <a:bodyPr wrap="square" lIns="0" rIns="0" tIns="0" bIns="0">
             <a:spAutoFit/>
           </a:bodyPr>
           <a:lstStyle/>
@@ -8843,7 +8787,7 @@
           <a:noFill/>
         </p:spPr>
         <p:txBody>
-          <a:bodyPr wrap="square" lIns="0" tIns="0" rIns="0" bIns="0">
+          <a:bodyPr wrap="square" lIns="0" rIns="0" tIns="0" bIns="0">
             <a:spAutoFit/>
           </a:bodyPr>
           <a:lstStyle/>
@@ -8888,7 +8832,7 @@
           <a:noFill/>
         </p:spPr>
         <p:txBody>
-          <a:bodyPr wrap="square" lIns="0" tIns="0" rIns="0" bIns="0">
+          <a:bodyPr wrap="square" lIns="0" rIns="0" tIns="0" bIns="0">
             <a:spAutoFit/>
           </a:bodyPr>
           <a:lstStyle/>
@@ -8933,7 +8877,7 @@
           <a:noFill/>
         </p:spPr>
         <p:txBody>
-          <a:bodyPr wrap="square" lIns="0" tIns="0" rIns="0" bIns="0">
+          <a:bodyPr wrap="square" lIns="0" rIns="0" tIns="0" bIns="0">
             <a:spAutoFit/>
           </a:bodyPr>
           <a:lstStyle/>
@@ -8978,7 +8922,7 @@
           <a:noFill/>
         </p:spPr>
         <p:txBody>
-          <a:bodyPr wrap="square" lIns="0" tIns="0" rIns="0" bIns="0">
+          <a:bodyPr wrap="square" lIns="0" rIns="0" tIns="0" bIns="0">
             <a:spAutoFit/>
           </a:bodyPr>
           <a:lstStyle/>
@@ -9043,11 +8987,10 @@
           </a:fontRef>
         </p:style>
         <p:txBody>
-          <a:bodyPr wrap="square" rtlCol="0" anchor="ctr"/>
+          <a:bodyPr rtlCol="0" anchor="ctr" wrap="square"/>
           <a:lstStyle/>
           <a:p>
             <a:pPr algn="ctr"/>
-            <a:endParaRPr/>
           </a:p>
         </p:txBody>
       </p:sp>
@@ -9068,7 +9011,7 @@
           <a:noFill/>
         </p:spPr>
         <p:txBody>
-          <a:bodyPr wrap="square" lIns="0" tIns="0" rIns="0" bIns="0">
+          <a:bodyPr wrap="square" lIns="0" rIns="0" tIns="0" bIns="0">
             <a:spAutoFit/>
           </a:bodyPr>
           <a:lstStyle/>
@@ -9113,7 +9056,7 @@
           <a:noFill/>
         </p:spPr>
         <p:txBody>
-          <a:bodyPr wrap="square" lIns="0" tIns="0" rIns="0" bIns="0">
+          <a:bodyPr wrap="square" lIns="0" rIns="0" tIns="0" bIns="0">
             <a:spAutoFit/>
           </a:bodyPr>
           <a:lstStyle/>
@@ -9158,7 +9101,7 @@
           <a:noFill/>
         </p:spPr>
         <p:txBody>
-          <a:bodyPr wrap="square" lIns="0" tIns="0" rIns="0" bIns="0">
+          <a:bodyPr wrap="square" lIns="0" rIns="0" tIns="0" bIns="0">
             <a:spAutoFit/>
           </a:bodyPr>
           <a:lstStyle/>
@@ -9203,7 +9146,7 @@
           <a:noFill/>
         </p:spPr>
         <p:txBody>
-          <a:bodyPr wrap="square" lIns="0" tIns="0" rIns="0" bIns="0">
+          <a:bodyPr wrap="square" lIns="0" rIns="0" tIns="0" bIns="0">
             <a:spAutoFit/>
           </a:bodyPr>
           <a:lstStyle/>
@@ -9248,7 +9191,7 @@
           <a:noFill/>
         </p:spPr>
         <p:txBody>
-          <a:bodyPr wrap="square" lIns="0" tIns="0" rIns="0" bIns="0">
+          <a:bodyPr wrap="square" lIns="0" rIns="0" tIns="0" bIns="0">
             <a:spAutoFit/>
           </a:bodyPr>
           <a:lstStyle/>
@@ -9293,7 +9236,7 @@
           <a:noFill/>
         </p:spPr>
         <p:txBody>
-          <a:bodyPr wrap="square" lIns="0" tIns="0" rIns="0" bIns="0">
+          <a:bodyPr wrap="square" lIns="0" rIns="0" tIns="0" bIns="0">
             <a:spAutoFit/>
           </a:bodyPr>
           <a:lstStyle/>
@@ -9358,11 +9301,10 @@
           </a:fontRef>
         </p:style>
         <p:txBody>
-          <a:bodyPr wrap="square" rtlCol="0" anchor="ctr"/>
+          <a:bodyPr rtlCol="0" anchor="ctr" wrap="square"/>
           <a:lstStyle/>
           <a:p>
             <a:pPr algn="ctr"/>
-            <a:endParaRPr/>
           </a:p>
         </p:txBody>
       </p:sp>
@@ -9403,11 +9345,10 @@
           </a:fontRef>
         </p:style>
         <p:txBody>
-          <a:bodyPr wrap="square" rtlCol="0" anchor="ctr"/>
+          <a:bodyPr rtlCol="0" anchor="ctr" wrap="square"/>
           <a:lstStyle/>
           <a:p>
             <a:pPr algn="ctr"/>
-            <a:endParaRPr/>
           </a:p>
         </p:txBody>
       </p:sp>
@@ -9428,7 +9369,7 @@
           <a:noFill/>
         </p:spPr>
         <p:txBody>
-          <a:bodyPr wrap="square" lIns="0" tIns="0" rIns="0" bIns="0">
+          <a:bodyPr wrap="square" lIns="0" rIns="0" tIns="0" bIns="0">
             <a:spAutoFit/>
           </a:bodyPr>
           <a:lstStyle/>
@@ -9479,7 +9420,7 @@
           <a:noFill/>
         </p:spPr>
         <p:txBody>
-          <a:bodyPr wrap="square" lIns="0" tIns="0" rIns="0" bIns="0">
+          <a:bodyPr wrap="square" lIns="0" rIns="0" tIns="0" bIns="0">
             <a:spAutoFit/>
           </a:bodyPr>
           <a:lstStyle/>
@@ -9524,7 +9465,7 @@
           <a:noFill/>
         </p:spPr>
         <p:txBody>
-          <a:bodyPr wrap="square" lIns="0" tIns="0" rIns="0" bIns="0">
+          <a:bodyPr wrap="square" lIns="0" rIns="0" tIns="0" bIns="0">
             <a:spAutoFit/>
           </a:bodyPr>
           <a:lstStyle/>
@@ -9702,7 +9643,7 @@
           <a:noFill/>
         </p:spPr>
         <p:txBody>
-          <a:bodyPr wrap="square" lIns="0" tIns="0" rIns="0" bIns="0">
+          <a:bodyPr wrap="square" lIns="0" rIns="0" tIns="0" bIns="0">
             <a:spAutoFit/>
           </a:bodyPr>
           <a:lstStyle/>
@@ -9747,7 +9688,7 @@
           <a:noFill/>
         </p:spPr>
         <p:txBody>
-          <a:bodyPr wrap="square" lIns="0" tIns="0" rIns="0" bIns="0">
+          <a:bodyPr wrap="square" lIns="0" rIns="0" tIns="0" bIns="0">
             <a:spAutoFit/>
           </a:bodyPr>
           <a:lstStyle/>
@@ -9784,7 +9725,7 @@
 </file>
 
 <file path=ppt/slides/slide13.xml><?xml version="1.0" encoding="utf-8"?>
-<p:sld xmlns:a="http://schemas.openxmlformats.org/drawingml/2006/main" xmlns:r="http://schemas.openxmlformats.org/officeDocument/2006/relationships" xmlns:p="http://schemas.openxmlformats.org/presentationml/2006/main">
+<p:sld xmlns:a="http://schemas.openxmlformats.org/drawingml/2006/main" xmlns:p="http://schemas.openxmlformats.org/presentationml/2006/main" xmlns:r="http://schemas.openxmlformats.org/officeDocument/2006/relationships">
   <p:cSld>
     <p:bg>
       <p:bgPr>
@@ -9800,14 +9741,7 @@
         <p:cNvGrpSpPr/>
         <p:nvPr/>
       </p:nvGrpSpPr>
-      <p:grpSpPr>
-        <a:xfrm>
-          <a:off x="0" y="0"/>
-          <a:ext cx="0" cy="0"/>
-          <a:chOff x="0" y="0"/>
-          <a:chExt cx="0" cy="0"/>
-        </a:xfrm>
-      </p:grpSpPr>
+      <p:grpSpPr/>
       <p:sp>
         <p:nvSpPr>
           <p:cNvPr id="2" name="Rectangle 1"/>
@@ -9845,11 +9779,10 @@
           </a:fontRef>
         </p:style>
         <p:txBody>
-          <a:bodyPr wrap="square" rtlCol="0" anchor="ctr"/>
+          <a:bodyPr rtlCol="0" anchor="ctr" wrap="square"/>
           <a:lstStyle/>
           <a:p>
             <a:pPr algn="ctr"/>
-            <a:endParaRPr/>
           </a:p>
         </p:txBody>
       </p:sp>
@@ -9870,7 +9803,7 @@
           <a:noFill/>
         </p:spPr>
         <p:txBody>
-          <a:bodyPr wrap="square" lIns="0" tIns="0" rIns="0" bIns="0">
+          <a:bodyPr wrap="square" lIns="0" rIns="0" tIns="0" bIns="0">
             <a:spAutoFit/>
           </a:bodyPr>
           <a:lstStyle/>
@@ -9915,7 +9848,7 @@
           <a:noFill/>
         </p:spPr>
         <p:txBody>
-          <a:bodyPr wrap="square" lIns="0" tIns="0" rIns="0" bIns="0">
+          <a:bodyPr wrap="square" lIns="0" rIns="0" tIns="0" bIns="0">
             <a:spAutoFit/>
           </a:bodyPr>
           <a:lstStyle/>
@@ -9980,11 +9913,10 @@
           </a:fontRef>
         </p:style>
         <p:txBody>
-          <a:bodyPr wrap="square" rtlCol="0" anchor="ctr"/>
+          <a:bodyPr rtlCol="0" anchor="ctr" wrap="square"/>
           <a:lstStyle/>
           <a:p>
             <a:pPr algn="ctr"/>
-            <a:endParaRPr/>
           </a:p>
         </p:txBody>
       </p:sp>
@@ -10025,11 +9957,10 @@
           </a:fontRef>
         </p:style>
         <p:txBody>
-          <a:bodyPr wrap="square" rtlCol="0" anchor="ctr"/>
+          <a:bodyPr rtlCol="0" anchor="ctr" wrap="square"/>
           <a:lstStyle/>
           <a:p>
             <a:pPr algn="ctr"/>
-            <a:endParaRPr/>
           </a:p>
         </p:txBody>
       </p:sp>
@@ -10050,7 +9981,7 @@
           <a:noFill/>
         </p:spPr>
         <p:txBody>
-          <a:bodyPr wrap="square" lIns="0" tIns="0" rIns="0" bIns="0">
+          <a:bodyPr wrap="square" lIns="0" rIns="0" tIns="0" bIns="0">
             <a:spAutoFit/>
           </a:bodyPr>
           <a:lstStyle/>
@@ -10095,7 +10026,7 @@
           <a:noFill/>
         </p:spPr>
         <p:txBody>
-          <a:bodyPr wrap="square" lIns="0" tIns="0" rIns="0" bIns="0">
+          <a:bodyPr wrap="square" lIns="0" rIns="0" tIns="0" bIns="0">
             <a:spAutoFit/>
           </a:bodyPr>
           <a:lstStyle/>
@@ -10140,7 +10071,7 @@
           <a:noFill/>
         </p:spPr>
         <p:txBody>
-          <a:bodyPr wrap="square" lIns="0" tIns="0" rIns="0" bIns="0">
+          <a:bodyPr wrap="square" lIns="0" rIns="0" tIns="0" bIns="0">
             <a:spAutoFit/>
           </a:bodyPr>
           <a:lstStyle/>
@@ -10185,7 +10116,7 @@
           <a:noFill/>
         </p:spPr>
         <p:txBody>
-          <a:bodyPr wrap="square" lIns="0" tIns="0" rIns="0" bIns="0">
+          <a:bodyPr wrap="square" lIns="0" rIns="0" tIns="0" bIns="0">
             <a:spAutoFit/>
           </a:bodyPr>
           <a:lstStyle/>
@@ -10230,7 +10161,7 @@
           <a:noFill/>
         </p:spPr>
         <p:txBody>
-          <a:bodyPr wrap="square" lIns="0" tIns="0" rIns="0" bIns="0">
+          <a:bodyPr wrap="square" lIns="0" rIns="0" tIns="0" bIns="0">
             <a:spAutoFit/>
           </a:bodyPr>
           <a:lstStyle/>
@@ -10275,7 +10206,7 @@
           <a:noFill/>
         </p:spPr>
         <p:txBody>
-          <a:bodyPr wrap="square" lIns="0" tIns="0" rIns="0" bIns="0">
+          <a:bodyPr wrap="square" lIns="0" rIns="0" tIns="0" bIns="0">
             <a:spAutoFit/>
           </a:bodyPr>
           <a:lstStyle/>
@@ -10320,7 +10251,7 @@
           <a:noFill/>
         </p:spPr>
         <p:txBody>
-          <a:bodyPr wrap="square" lIns="0" tIns="0" rIns="0" bIns="0">
+          <a:bodyPr wrap="square" lIns="0" rIns="0" tIns="0" bIns="0">
             <a:spAutoFit/>
           </a:bodyPr>
           <a:lstStyle/>
@@ -10365,7 +10296,7 @@
           <a:noFill/>
         </p:spPr>
         <p:txBody>
-          <a:bodyPr wrap="square" lIns="0" tIns="0" rIns="0" bIns="0">
+          <a:bodyPr wrap="square" lIns="0" rIns="0" tIns="0" bIns="0">
             <a:spAutoFit/>
           </a:bodyPr>
           <a:lstStyle/>
@@ -10430,11 +10361,10 @@
           </a:fontRef>
         </p:style>
         <p:txBody>
-          <a:bodyPr wrap="square" rtlCol="0" anchor="ctr"/>
+          <a:bodyPr rtlCol="0" anchor="ctr" wrap="square"/>
           <a:lstStyle/>
           <a:p>
             <a:pPr algn="ctr"/>
-            <a:endParaRPr/>
           </a:p>
         </p:txBody>
       </p:sp>
@@ -10455,7 +10385,7 @@
           <a:noFill/>
         </p:spPr>
         <p:txBody>
-          <a:bodyPr wrap="square" lIns="0" tIns="0" rIns="0" bIns="0">
+          <a:bodyPr wrap="square" lIns="0" rIns="0" tIns="0" bIns="0">
             <a:spAutoFit/>
           </a:bodyPr>
           <a:lstStyle/>
@@ -10500,7 +10430,7 @@
           <a:noFill/>
         </p:spPr>
         <p:txBody>
-          <a:bodyPr wrap="square" lIns="0" tIns="0" rIns="0" bIns="0">
+          <a:bodyPr wrap="square" lIns="0" rIns="0" tIns="0" bIns="0">
             <a:spAutoFit/>
           </a:bodyPr>
           <a:lstStyle/>
@@ -10545,7 +10475,7 @@
           <a:noFill/>
         </p:spPr>
         <p:txBody>
-          <a:bodyPr wrap="square" lIns="0" tIns="0" rIns="0" bIns="0">
+          <a:bodyPr wrap="square" lIns="0" rIns="0" tIns="0" bIns="0">
             <a:spAutoFit/>
           </a:bodyPr>
           <a:lstStyle/>
@@ -10590,7 +10520,7 @@
           <a:noFill/>
         </p:spPr>
         <p:txBody>
-          <a:bodyPr wrap="square" lIns="0" tIns="0" rIns="0" bIns="0">
+          <a:bodyPr wrap="square" lIns="0" rIns="0" tIns="0" bIns="0">
             <a:spAutoFit/>
           </a:bodyPr>
           <a:lstStyle/>
@@ -10635,7 +10565,7 @@
           <a:noFill/>
         </p:spPr>
         <p:txBody>
-          <a:bodyPr wrap="square" lIns="0" tIns="0" rIns="0" bIns="0">
+          <a:bodyPr wrap="square" lIns="0" rIns="0" tIns="0" bIns="0">
             <a:spAutoFit/>
           </a:bodyPr>
           <a:lstStyle/>
@@ -10680,7 +10610,7 @@
           <a:noFill/>
         </p:spPr>
         <p:txBody>
-          <a:bodyPr wrap="square" lIns="0" tIns="0" rIns="0" bIns="0">
+          <a:bodyPr wrap="square" lIns="0" rIns="0" tIns="0" bIns="0">
             <a:spAutoFit/>
           </a:bodyPr>
           <a:lstStyle/>
@@ -10725,7 +10655,7 @@
           <a:noFill/>
         </p:spPr>
         <p:txBody>
-          <a:bodyPr wrap="square" lIns="0" tIns="0" rIns="0" bIns="0">
+          <a:bodyPr wrap="square" lIns="0" rIns="0" tIns="0" bIns="0">
             <a:spAutoFit/>
           </a:bodyPr>
           <a:lstStyle/>
@@ -10770,7 +10700,7 @@
           <a:noFill/>
         </p:spPr>
         <p:txBody>
-          <a:bodyPr wrap="square" lIns="0" tIns="0" rIns="0" bIns="0">
+          <a:bodyPr wrap="square" lIns="0" rIns="0" tIns="0" bIns="0">
             <a:spAutoFit/>
           </a:bodyPr>
           <a:lstStyle/>
@@ -10815,7 +10745,7 @@
           <a:noFill/>
         </p:spPr>
         <p:txBody>
-          <a:bodyPr wrap="square" lIns="0" tIns="0" rIns="0" bIns="0">
+          <a:bodyPr wrap="square" lIns="0" rIns="0" tIns="0" bIns="0">
             <a:spAutoFit/>
           </a:bodyPr>
           <a:lstStyle/>
@@ -10860,7 +10790,7 @@
           <a:noFill/>
         </p:spPr>
         <p:txBody>
-          <a:bodyPr wrap="square" lIns="0" tIns="0" rIns="0" bIns="0">
+          <a:bodyPr wrap="square" lIns="0" rIns="0" tIns="0" bIns="0">
             <a:spAutoFit/>
           </a:bodyPr>
           <a:lstStyle/>
@@ -10976,7 +10906,7 @@
           <a:noFill/>
         </p:spPr>
         <p:txBody>
-          <a:bodyPr wrap="square" lIns="0" tIns="0" rIns="0" bIns="0">
+          <a:bodyPr wrap="square" lIns="0" rIns="0" tIns="0" bIns="0">
             <a:spAutoFit/>
           </a:bodyPr>
           <a:lstStyle/>
@@ -11021,7 +10951,7 @@
           <a:noFill/>
         </p:spPr>
         <p:txBody>
-          <a:bodyPr wrap="square" lIns="0" tIns="0" rIns="0" bIns="0">
+          <a:bodyPr wrap="square" lIns="0" rIns="0" tIns="0" bIns="0">
             <a:spAutoFit/>
           </a:bodyPr>
           <a:lstStyle/>
@@ -11058,7 +10988,7 @@
 </file>
 
 <file path=ppt/slides/slide2.xml><?xml version="1.0" encoding="utf-8"?>
-<p:sld xmlns:a="http://schemas.openxmlformats.org/drawingml/2006/main" xmlns:r="http://schemas.openxmlformats.org/officeDocument/2006/relationships" xmlns:p="http://schemas.openxmlformats.org/presentationml/2006/main">
+<p:sld xmlns:a="http://schemas.openxmlformats.org/drawingml/2006/main" xmlns:p="http://schemas.openxmlformats.org/presentationml/2006/main" xmlns:r="http://schemas.openxmlformats.org/officeDocument/2006/relationships">
   <p:cSld>
     <p:bg>
       <p:bgPr>
@@ -11074,14 +11004,7 @@
         <p:cNvGrpSpPr/>
         <p:nvPr/>
       </p:nvGrpSpPr>
-      <p:grpSpPr>
-        <a:xfrm>
-          <a:off x="0" y="0"/>
-          <a:ext cx="0" cy="0"/>
-          <a:chOff x="0" y="0"/>
-          <a:chExt cx="0" cy="0"/>
-        </a:xfrm>
-      </p:grpSpPr>
+      <p:grpSpPr/>
       <p:sp>
         <p:nvSpPr>
           <p:cNvPr id="2" name="Rectangle 1"/>
@@ -11119,11 +11042,10 @@
           </a:fontRef>
         </p:style>
         <p:txBody>
-          <a:bodyPr wrap="square" rtlCol="0" anchor="ctr"/>
+          <a:bodyPr rtlCol="0" anchor="ctr" wrap="square"/>
           <a:lstStyle/>
           <a:p>
             <a:pPr algn="ctr"/>
-            <a:endParaRPr/>
           </a:p>
         </p:txBody>
       </p:sp>
@@ -11144,7 +11066,7 @@
           <a:noFill/>
         </p:spPr>
         <p:txBody>
-          <a:bodyPr wrap="square" lIns="0" tIns="0" rIns="0" bIns="0">
+          <a:bodyPr wrap="square" lIns="0" rIns="0" tIns="0" bIns="0">
             <a:spAutoFit/>
           </a:bodyPr>
           <a:lstStyle/>
@@ -11189,7 +11111,7 @@
           <a:noFill/>
         </p:spPr>
         <p:txBody>
-          <a:bodyPr wrap="square" lIns="0" tIns="0" rIns="0" bIns="0">
+          <a:bodyPr wrap="square" lIns="0" rIns="0" tIns="0" bIns="0">
             <a:spAutoFit/>
           </a:bodyPr>
           <a:lstStyle/>
@@ -11254,11 +11176,10 @@
           </a:fontRef>
         </p:style>
         <p:txBody>
-          <a:bodyPr wrap="square" rtlCol="0" anchor="ctr"/>
+          <a:bodyPr rtlCol="0" anchor="ctr" wrap="square"/>
           <a:lstStyle/>
           <a:p>
             <a:pPr algn="ctr"/>
-            <a:endParaRPr/>
           </a:p>
         </p:txBody>
       </p:sp>
@@ -11279,7 +11200,7 @@
           <a:noFill/>
         </p:spPr>
         <p:txBody>
-          <a:bodyPr wrap="square" lIns="0" tIns="0" rIns="0" bIns="0">
+          <a:bodyPr wrap="square" lIns="0" rIns="0" tIns="0" bIns="0">
             <a:spAutoFit/>
           </a:bodyPr>
           <a:lstStyle/>
@@ -11344,11 +11265,10 @@
           </a:fontRef>
         </p:style>
         <p:txBody>
-          <a:bodyPr wrap="square" rtlCol="0" anchor="ctr"/>
+          <a:bodyPr rtlCol="0" anchor="ctr" wrap="square"/>
           <a:lstStyle/>
           <a:p>
             <a:pPr algn="ctr"/>
-            <a:endParaRPr/>
           </a:p>
         </p:txBody>
       </p:sp>
@@ -11389,11 +11309,10 @@
           </a:fontRef>
         </p:style>
         <p:txBody>
-          <a:bodyPr wrap="square" rtlCol="0" anchor="ctr"/>
+          <a:bodyPr rtlCol="0" anchor="ctr" wrap="square"/>
           <a:lstStyle/>
           <a:p>
             <a:pPr algn="ctr"/>
-            <a:endParaRPr/>
           </a:p>
         </p:txBody>
       </p:sp>
@@ -11414,7 +11333,7 @@
           <a:noFill/>
         </p:spPr>
         <p:txBody>
-          <a:bodyPr wrap="square" lIns="0" tIns="0" rIns="0" bIns="0">
+          <a:bodyPr wrap="square" lIns="0" rIns="0" tIns="0" bIns="0">
             <a:spAutoFit/>
           </a:bodyPr>
           <a:lstStyle/>
@@ -11501,11 +11420,10 @@
           </a:fontRef>
         </p:style>
         <p:txBody>
-          <a:bodyPr wrap="square" rtlCol="0" anchor="ctr"/>
+          <a:bodyPr rtlCol="0" anchor="ctr" wrap="square"/>
           <a:lstStyle/>
           <a:p>
             <a:pPr algn="ctr"/>
-            <a:endParaRPr/>
           </a:p>
         </p:txBody>
       </p:sp>
@@ -11546,11 +11464,10 @@
           </a:fontRef>
         </p:style>
         <p:txBody>
-          <a:bodyPr wrap="square" rtlCol="0" anchor="ctr"/>
+          <a:bodyPr rtlCol="0" anchor="ctr" wrap="square"/>
           <a:lstStyle/>
           <a:p>
             <a:pPr algn="ctr"/>
-            <a:endParaRPr/>
           </a:p>
         </p:txBody>
       </p:sp>
@@ -11571,7 +11488,7 @@
           <a:noFill/>
         </p:spPr>
         <p:txBody>
-          <a:bodyPr wrap="square" lIns="0" tIns="0" rIns="0" bIns="0">
+          <a:bodyPr wrap="square" lIns="0" rIns="0" tIns="0" bIns="0">
             <a:spAutoFit/>
           </a:bodyPr>
           <a:lstStyle/>
@@ -11658,11 +11575,10 @@
           </a:fontRef>
         </p:style>
         <p:txBody>
-          <a:bodyPr wrap="square" rtlCol="0" anchor="ctr"/>
+          <a:bodyPr rtlCol="0" anchor="ctr" wrap="square"/>
           <a:lstStyle/>
           <a:p>
             <a:pPr algn="ctr"/>
-            <a:endParaRPr/>
           </a:p>
         </p:txBody>
       </p:sp>
@@ -11703,11 +11619,10 @@
           </a:fontRef>
         </p:style>
         <p:txBody>
-          <a:bodyPr wrap="square" rtlCol="0" anchor="ctr"/>
+          <a:bodyPr rtlCol="0" anchor="ctr" wrap="square"/>
           <a:lstStyle/>
           <a:p>
             <a:pPr algn="ctr"/>
-            <a:endParaRPr/>
           </a:p>
         </p:txBody>
       </p:sp>
@@ -11728,7 +11643,7 @@
           <a:noFill/>
         </p:spPr>
         <p:txBody>
-          <a:bodyPr wrap="square" lIns="0" tIns="0" rIns="0" bIns="0">
+          <a:bodyPr wrap="square" lIns="0" rIns="0" tIns="0" bIns="0">
             <a:spAutoFit/>
           </a:bodyPr>
           <a:lstStyle/>
@@ -11815,11 +11730,10 @@
           </a:fontRef>
         </p:style>
         <p:txBody>
-          <a:bodyPr wrap="square" rtlCol="0" anchor="ctr"/>
+          <a:bodyPr rtlCol="0" anchor="ctr" wrap="square"/>
           <a:lstStyle/>
           <a:p>
             <a:pPr algn="ctr"/>
-            <a:endParaRPr/>
           </a:p>
         </p:txBody>
       </p:sp>
@@ -11860,11 +11774,10 @@
           </a:fontRef>
         </p:style>
         <p:txBody>
-          <a:bodyPr wrap="square" rtlCol="0" anchor="ctr"/>
+          <a:bodyPr rtlCol="0" anchor="ctr" wrap="square"/>
           <a:lstStyle/>
           <a:p>
             <a:pPr algn="ctr"/>
-            <a:endParaRPr/>
           </a:p>
         </p:txBody>
       </p:sp>
@@ -11885,7 +11798,7 @@
           <a:noFill/>
         </p:spPr>
         <p:txBody>
-          <a:bodyPr wrap="square" lIns="0" tIns="0" rIns="0" bIns="0">
+          <a:bodyPr wrap="square" lIns="0" rIns="0" tIns="0" bIns="0">
             <a:spAutoFit/>
           </a:bodyPr>
           <a:lstStyle/>
@@ -11972,11 +11885,10 @@
           </a:fontRef>
         </p:style>
         <p:txBody>
-          <a:bodyPr wrap="square" rtlCol="0" anchor="ctr"/>
+          <a:bodyPr rtlCol="0" anchor="ctr" wrap="square"/>
           <a:lstStyle/>
           <a:p>
             <a:pPr algn="ctr"/>
-            <a:endParaRPr/>
           </a:p>
         </p:txBody>
       </p:sp>
@@ -12017,11 +11929,10 @@
           </a:fontRef>
         </p:style>
         <p:txBody>
-          <a:bodyPr wrap="square" rtlCol="0" anchor="ctr"/>
+          <a:bodyPr rtlCol="0" anchor="ctr" wrap="square"/>
           <a:lstStyle/>
           <a:p>
             <a:pPr algn="ctr"/>
-            <a:endParaRPr/>
           </a:p>
         </p:txBody>
       </p:sp>
@@ -12042,7 +11953,7 @@
           <a:noFill/>
         </p:spPr>
         <p:txBody>
-          <a:bodyPr wrap="square" lIns="0" tIns="0" rIns="0" bIns="0">
+          <a:bodyPr wrap="square" lIns="0" rIns="0" tIns="0" bIns="0">
             <a:spAutoFit/>
           </a:bodyPr>
           <a:lstStyle/>
@@ -12129,11 +12040,10 @@
           </a:fontRef>
         </p:style>
         <p:txBody>
-          <a:bodyPr wrap="square" rtlCol="0" anchor="ctr"/>
+          <a:bodyPr rtlCol="0" anchor="ctr" wrap="square"/>
           <a:lstStyle/>
           <a:p>
             <a:pPr algn="ctr"/>
-            <a:endParaRPr/>
           </a:p>
         </p:txBody>
       </p:sp>
@@ -12154,7 +12064,7 @@
           <a:noFill/>
         </p:spPr>
         <p:txBody>
-          <a:bodyPr wrap="square" lIns="0" tIns="0" rIns="0" bIns="0">
+          <a:bodyPr wrap="square" lIns="0" rIns="0" tIns="0" bIns="0">
             <a:spAutoFit/>
           </a:bodyPr>
           <a:lstStyle/>
@@ -12199,7 +12109,7 @@
           <a:noFill/>
         </p:spPr>
         <p:txBody>
-          <a:bodyPr wrap="square" lIns="0" tIns="0" rIns="0" bIns="0">
+          <a:bodyPr wrap="square" lIns="0" rIns="0" tIns="0" bIns="0">
             <a:spAutoFit/>
           </a:bodyPr>
           <a:lstStyle/>
@@ -12244,7 +12154,7 @@
           <a:noFill/>
         </p:spPr>
         <p:txBody>
-          <a:bodyPr wrap="square" lIns="0" tIns="0" rIns="0" bIns="0">
+          <a:bodyPr wrap="square" lIns="0" rIns="0" tIns="0" bIns="0">
             <a:spAutoFit/>
           </a:bodyPr>
           <a:lstStyle/>
@@ -12289,7 +12199,7 @@
           <a:noFill/>
         </p:spPr>
         <p:txBody>
-          <a:bodyPr wrap="square" lIns="0" tIns="0" rIns="0" bIns="0">
+          <a:bodyPr wrap="square" lIns="0" rIns="0" tIns="0" bIns="0">
             <a:spAutoFit/>
           </a:bodyPr>
           <a:lstStyle/>
@@ -12334,7 +12244,7 @@
           <a:noFill/>
         </p:spPr>
         <p:txBody>
-          <a:bodyPr wrap="square" lIns="0" tIns="0" rIns="0" bIns="0">
+          <a:bodyPr wrap="square" lIns="0" rIns="0" tIns="0" bIns="0">
             <a:spAutoFit/>
           </a:bodyPr>
           <a:lstStyle/>
@@ -12379,7 +12289,7 @@
           <a:noFill/>
         </p:spPr>
         <p:txBody>
-          <a:bodyPr wrap="square" lIns="0" tIns="0" rIns="0" bIns="0">
+          <a:bodyPr wrap="square" lIns="0" rIns="0" tIns="0" bIns="0">
             <a:spAutoFit/>
           </a:bodyPr>
           <a:lstStyle/>
@@ -12424,7 +12334,7 @@
           <a:noFill/>
         </p:spPr>
         <p:txBody>
-          <a:bodyPr wrap="square" lIns="0" tIns="0" rIns="0" bIns="0">
+          <a:bodyPr wrap="square" lIns="0" rIns="0" tIns="0" bIns="0">
             <a:spAutoFit/>
           </a:bodyPr>
           <a:lstStyle/>
@@ -12469,7 +12379,7 @@
           <a:noFill/>
         </p:spPr>
         <p:txBody>
-          <a:bodyPr wrap="square" lIns="0" tIns="0" rIns="0" bIns="0">
+          <a:bodyPr wrap="square" lIns="0" rIns="0" tIns="0" bIns="0">
             <a:spAutoFit/>
           </a:bodyPr>
           <a:lstStyle/>
@@ -12534,11 +12444,10 @@
           </a:fontRef>
         </p:style>
         <p:txBody>
-          <a:bodyPr wrap="square" rtlCol="0" anchor="ctr"/>
+          <a:bodyPr rtlCol="0" anchor="ctr" wrap="square"/>
           <a:lstStyle/>
           <a:p>
             <a:pPr algn="ctr"/>
-            <a:endParaRPr/>
           </a:p>
         </p:txBody>
       </p:sp>
@@ -12559,7 +12468,7 @@
           <a:noFill/>
         </p:spPr>
         <p:txBody>
-          <a:bodyPr wrap="square" lIns="0" tIns="0" rIns="0" bIns="0">
+          <a:bodyPr wrap="square" lIns="0" rIns="0" tIns="0" bIns="0">
             <a:spAutoFit/>
           </a:bodyPr>
           <a:lstStyle/>
@@ -12604,7 +12513,7 @@
           <a:noFill/>
         </p:spPr>
         <p:txBody>
-          <a:bodyPr wrap="square" lIns="0" tIns="0" rIns="0" bIns="0">
+          <a:bodyPr wrap="square" lIns="0" rIns="0" tIns="0" bIns="0">
             <a:spAutoFit/>
           </a:bodyPr>
           <a:lstStyle/>
@@ -12649,7 +12558,7 @@
           <a:noFill/>
         </p:spPr>
         <p:txBody>
-          <a:bodyPr wrap="square" lIns="0" tIns="0" rIns="0" bIns="0">
+          <a:bodyPr wrap="square" lIns="0" rIns="0" tIns="0" bIns="0">
             <a:spAutoFit/>
           </a:bodyPr>
           <a:lstStyle/>
@@ -12694,7 +12603,7 @@
           <a:noFill/>
         </p:spPr>
         <p:txBody>
-          <a:bodyPr wrap="square" lIns="0" tIns="0" rIns="0" bIns="0">
+          <a:bodyPr wrap="square" lIns="0" rIns="0" tIns="0" bIns="0">
             <a:spAutoFit/>
           </a:bodyPr>
           <a:lstStyle/>
@@ -12739,7 +12648,7 @@
           <a:noFill/>
         </p:spPr>
         <p:txBody>
-          <a:bodyPr wrap="square" lIns="0" tIns="0" rIns="0" bIns="0">
+          <a:bodyPr wrap="square" lIns="0" rIns="0" tIns="0" bIns="0">
             <a:spAutoFit/>
           </a:bodyPr>
           <a:lstStyle/>
@@ -12784,7 +12693,7 @@
           <a:noFill/>
         </p:spPr>
         <p:txBody>
-          <a:bodyPr wrap="square" lIns="0" tIns="0" rIns="0" bIns="0">
+          <a:bodyPr wrap="square" lIns="0" rIns="0" tIns="0" bIns="0">
             <a:spAutoFit/>
           </a:bodyPr>
           <a:lstStyle/>
@@ -12829,7 +12738,7 @@
           <a:noFill/>
         </p:spPr>
         <p:txBody>
-          <a:bodyPr wrap="square" lIns="0" tIns="0" rIns="0" bIns="0">
+          <a:bodyPr wrap="square" lIns="0" rIns="0" tIns="0" bIns="0">
             <a:spAutoFit/>
           </a:bodyPr>
           <a:lstStyle/>
@@ -12874,7 +12783,7 @@
           <a:noFill/>
         </p:spPr>
         <p:txBody>
-          <a:bodyPr wrap="square" lIns="0" tIns="0" rIns="0" bIns="0">
+          <a:bodyPr wrap="square" lIns="0" rIns="0" tIns="0" bIns="0">
             <a:spAutoFit/>
           </a:bodyPr>
           <a:lstStyle/>
@@ -12939,11 +12848,10 @@
           </a:fontRef>
         </p:style>
         <p:txBody>
-          <a:bodyPr wrap="square" rtlCol="0" anchor="ctr"/>
+          <a:bodyPr rtlCol="0" anchor="ctr" wrap="square"/>
           <a:lstStyle/>
           <a:p>
             <a:pPr algn="ctr"/>
-            <a:endParaRPr/>
           </a:p>
         </p:txBody>
       </p:sp>
@@ -12964,7 +12872,7 @@
           <a:noFill/>
         </p:spPr>
         <p:txBody>
-          <a:bodyPr wrap="square" lIns="0" tIns="0" rIns="0" bIns="0">
+          <a:bodyPr wrap="square" lIns="0" rIns="0" tIns="0" bIns="0">
             <a:spAutoFit/>
           </a:bodyPr>
           <a:lstStyle/>
@@ -13009,7 +12917,7 @@
           <a:noFill/>
         </p:spPr>
         <p:txBody>
-          <a:bodyPr wrap="square" lIns="0" tIns="0" rIns="0" bIns="0">
+          <a:bodyPr wrap="square" lIns="0" rIns="0" tIns="0" bIns="0">
             <a:spAutoFit/>
           </a:bodyPr>
           <a:lstStyle/>
@@ -13054,7 +12962,7 @@
           <a:noFill/>
         </p:spPr>
         <p:txBody>
-          <a:bodyPr wrap="square" lIns="0" tIns="0" rIns="0" bIns="0">
+          <a:bodyPr wrap="square" lIns="0" rIns="0" tIns="0" bIns="0">
             <a:spAutoFit/>
           </a:bodyPr>
           <a:lstStyle/>
@@ -13099,7 +13007,7 @@
           <a:noFill/>
         </p:spPr>
         <p:txBody>
-          <a:bodyPr wrap="square" lIns="0" tIns="0" rIns="0" bIns="0">
+          <a:bodyPr wrap="square" lIns="0" rIns="0" tIns="0" bIns="0">
             <a:spAutoFit/>
           </a:bodyPr>
           <a:lstStyle/>
@@ -13144,7 +13052,7 @@
           <a:noFill/>
         </p:spPr>
         <p:txBody>
-          <a:bodyPr wrap="square" lIns="0" tIns="0" rIns="0" bIns="0">
+          <a:bodyPr wrap="square" lIns="0" rIns="0" tIns="0" bIns="0">
             <a:spAutoFit/>
           </a:bodyPr>
           <a:lstStyle/>
@@ -13189,7 +13097,7 @@
           <a:noFill/>
         </p:spPr>
         <p:txBody>
-          <a:bodyPr wrap="square" lIns="0" tIns="0" rIns="0" bIns="0">
+          <a:bodyPr wrap="square" lIns="0" rIns="0" tIns="0" bIns="0">
             <a:spAutoFit/>
           </a:bodyPr>
           <a:lstStyle/>
@@ -13234,7 +13142,7 @@
           <a:noFill/>
         </p:spPr>
         <p:txBody>
-          <a:bodyPr wrap="square" lIns="0" tIns="0" rIns="0" bIns="0">
+          <a:bodyPr wrap="square" lIns="0" rIns="0" tIns="0" bIns="0">
             <a:spAutoFit/>
           </a:bodyPr>
           <a:lstStyle/>
@@ -13279,7 +13187,7 @@
           <a:noFill/>
         </p:spPr>
         <p:txBody>
-          <a:bodyPr wrap="square" lIns="0" tIns="0" rIns="0" bIns="0">
+          <a:bodyPr wrap="square" lIns="0" rIns="0" tIns="0" bIns="0">
             <a:spAutoFit/>
           </a:bodyPr>
           <a:lstStyle/>
@@ -13344,11 +13252,10 @@
           </a:fontRef>
         </p:style>
         <p:txBody>
-          <a:bodyPr wrap="square" rtlCol="0" anchor="ctr"/>
+          <a:bodyPr rtlCol="0" anchor="ctr" wrap="square"/>
           <a:lstStyle/>
           <a:p>
             <a:pPr algn="ctr"/>
-            <a:endParaRPr/>
           </a:p>
         </p:txBody>
       </p:sp>
@@ -13369,7 +13276,7 @@
           <a:noFill/>
         </p:spPr>
         <p:txBody>
-          <a:bodyPr wrap="square" lIns="0" tIns="0" rIns="0" bIns="0">
+          <a:bodyPr wrap="square" lIns="0" rIns="0" tIns="0" bIns="0">
             <a:spAutoFit/>
           </a:bodyPr>
           <a:lstStyle/>
@@ -13414,7 +13321,7 @@
           <a:noFill/>
         </p:spPr>
         <p:txBody>
-          <a:bodyPr wrap="square" lIns="0" tIns="0" rIns="0" bIns="0">
+          <a:bodyPr wrap="square" lIns="0" rIns="0" tIns="0" bIns="0">
             <a:spAutoFit/>
           </a:bodyPr>
           <a:lstStyle/>
@@ -13459,7 +13366,7 @@
           <a:noFill/>
         </p:spPr>
         <p:txBody>
-          <a:bodyPr wrap="square" lIns="0" tIns="0" rIns="0" bIns="0">
+          <a:bodyPr wrap="square" lIns="0" rIns="0" tIns="0" bIns="0">
             <a:spAutoFit/>
           </a:bodyPr>
           <a:lstStyle/>
@@ -13504,7 +13411,7 @@
           <a:noFill/>
         </p:spPr>
         <p:txBody>
-          <a:bodyPr wrap="square" lIns="0" tIns="0" rIns="0" bIns="0">
+          <a:bodyPr wrap="square" lIns="0" rIns="0" tIns="0" bIns="0">
             <a:spAutoFit/>
           </a:bodyPr>
           <a:lstStyle/>
@@ -13569,11 +13476,10 @@
           </a:fontRef>
         </p:style>
         <p:txBody>
-          <a:bodyPr wrap="square" rtlCol="0" anchor="ctr"/>
+          <a:bodyPr rtlCol="0" anchor="ctr" wrap="square"/>
           <a:lstStyle/>
           <a:p>
             <a:pPr algn="ctr"/>
-            <a:endParaRPr/>
           </a:p>
         </p:txBody>
       </p:sp>
@@ -13614,11 +13520,10 @@
           </a:fontRef>
         </p:style>
         <p:txBody>
-          <a:bodyPr wrap="square" rtlCol="0" anchor="ctr"/>
+          <a:bodyPr rtlCol="0" anchor="ctr" wrap="square"/>
           <a:lstStyle/>
           <a:p>
             <a:pPr algn="ctr"/>
-            <a:endParaRPr/>
           </a:p>
         </p:txBody>
       </p:sp>
@@ -13639,7 +13544,7 @@
           <a:noFill/>
         </p:spPr>
         <p:txBody>
-          <a:bodyPr wrap="square" lIns="0" tIns="0" rIns="0" bIns="0">
+          <a:bodyPr wrap="square" lIns="0" rIns="0" tIns="0" bIns="0">
             <a:spAutoFit/>
           </a:bodyPr>
           <a:lstStyle/>
@@ -13690,7 +13595,7 @@
           <a:noFill/>
         </p:spPr>
         <p:txBody>
-          <a:bodyPr wrap="square" lIns="0" tIns="0" rIns="0" bIns="0">
+          <a:bodyPr wrap="square" lIns="0" rIns="0" tIns="0" bIns="0">
             <a:spAutoFit/>
           </a:bodyPr>
           <a:lstStyle/>
@@ -13735,7 +13640,7 @@
           <a:noFill/>
         </p:spPr>
         <p:txBody>
-          <a:bodyPr wrap="square" lIns="0" tIns="0" rIns="0" bIns="0">
+          <a:bodyPr wrap="square" lIns="0" rIns="0" tIns="0" bIns="0">
             <a:spAutoFit/>
           </a:bodyPr>
           <a:lstStyle/>
@@ -13772,7 +13677,7 @@
 </file>
 
 <file path=ppt/slides/slide3.xml><?xml version="1.0" encoding="utf-8"?>
-<p:sld xmlns:a="http://schemas.openxmlformats.org/drawingml/2006/main" xmlns:r="http://schemas.openxmlformats.org/officeDocument/2006/relationships" xmlns:p="http://schemas.openxmlformats.org/presentationml/2006/main">
+<p:sld xmlns:a="http://schemas.openxmlformats.org/drawingml/2006/main" xmlns:p="http://schemas.openxmlformats.org/presentationml/2006/main" xmlns:r="http://schemas.openxmlformats.org/officeDocument/2006/relationships">
   <p:cSld>
     <p:bg>
       <p:bgPr>
@@ -13788,14 +13693,7 @@
         <p:cNvGrpSpPr/>
         <p:nvPr/>
       </p:nvGrpSpPr>
-      <p:grpSpPr>
-        <a:xfrm>
-          <a:off x="0" y="0"/>
-          <a:ext cx="0" cy="0"/>
-          <a:chOff x="0" y="0"/>
-          <a:chExt cx="0" cy="0"/>
-        </a:xfrm>
-      </p:grpSpPr>
+      <p:grpSpPr/>
       <p:sp>
         <p:nvSpPr>
           <p:cNvPr id="2" name="Rectangle 1"/>
@@ -13833,11 +13731,10 @@
           </a:fontRef>
         </p:style>
         <p:txBody>
-          <a:bodyPr wrap="square" rtlCol="0" anchor="ctr"/>
+          <a:bodyPr rtlCol="0" anchor="ctr" wrap="square"/>
           <a:lstStyle/>
           <a:p>
             <a:pPr algn="ctr"/>
-            <a:endParaRPr/>
           </a:p>
         </p:txBody>
       </p:sp>
@@ -13858,7 +13755,7 @@
           <a:noFill/>
         </p:spPr>
         <p:txBody>
-          <a:bodyPr wrap="square" lIns="0" tIns="0" rIns="0" bIns="0">
+          <a:bodyPr wrap="square" lIns="0" rIns="0" tIns="0" bIns="0">
             <a:spAutoFit/>
           </a:bodyPr>
           <a:lstStyle/>
@@ -13903,7 +13800,7 @@
           <a:noFill/>
         </p:spPr>
         <p:txBody>
-          <a:bodyPr wrap="square" lIns="0" tIns="0" rIns="0" bIns="0">
+          <a:bodyPr wrap="square" lIns="0" rIns="0" tIns="0" bIns="0">
             <a:spAutoFit/>
           </a:bodyPr>
           <a:lstStyle/>
@@ -13968,11 +13865,10 @@
           </a:fontRef>
         </p:style>
         <p:txBody>
-          <a:bodyPr wrap="square" rtlCol="0" anchor="ctr"/>
+          <a:bodyPr rtlCol="0" anchor="ctr" wrap="square"/>
           <a:lstStyle/>
           <a:p>
             <a:pPr algn="ctr"/>
-            <a:endParaRPr/>
           </a:p>
         </p:txBody>
       </p:sp>
@@ -14013,11 +13909,10 @@
           </a:fontRef>
         </p:style>
         <p:txBody>
-          <a:bodyPr wrap="square" rtlCol="0" anchor="ctr"/>
+          <a:bodyPr rtlCol="0" anchor="ctr" wrap="square"/>
           <a:lstStyle/>
           <a:p>
             <a:pPr algn="ctr"/>
-            <a:endParaRPr/>
           </a:p>
         </p:txBody>
       </p:sp>
@@ -14038,7 +13933,7 @@
           <a:noFill/>
         </p:spPr>
         <p:txBody>
-          <a:bodyPr wrap="square" lIns="0" tIns="0" rIns="0" bIns="0">
+          <a:bodyPr wrap="square" lIns="0" rIns="0" tIns="0" bIns="0">
             <a:spAutoFit/>
           </a:bodyPr>
           <a:lstStyle/>
@@ -14083,7 +13978,7 @@
           <a:noFill/>
         </p:spPr>
         <p:txBody>
-          <a:bodyPr wrap="square" lIns="0" tIns="0" rIns="0" bIns="0">
+          <a:bodyPr wrap="square" lIns="0" rIns="0" tIns="0" bIns="0">
             <a:spAutoFit/>
           </a:bodyPr>
           <a:lstStyle/>
@@ -14128,7 +14023,7 @@
           <a:noFill/>
         </p:spPr>
         <p:txBody>
-          <a:bodyPr wrap="square" lIns="0" tIns="0" rIns="0" bIns="0">
+          <a:bodyPr wrap="square" lIns="0" rIns="0" tIns="0" bIns="0">
             <a:spAutoFit/>
           </a:bodyPr>
           <a:lstStyle/>
@@ -14173,7 +14068,7 @@
           <a:noFill/>
         </p:spPr>
         <p:txBody>
-          <a:bodyPr wrap="square" lIns="0" tIns="0" rIns="0" bIns="0">
+          <a:bodyPr wrap="square" lIns="0" rIns="0" tIns="0" bIns="0">
             <a:spAutoFit/>
           </a:bodyPr>
           <a:lstStyle/>
@@ -14238,11 +14133,10 @@
           </a:fontRef>
         </p:style>
         <p:txBody>
-          <a:bodyPr wrap="square" rtlCol="0" anchor="ctr"/>
+          <a:bodyPr rtlCol="0" anchor="ctr" wrap="square"/>
           <a:lstStyle/>
           <a:p>
             <a:pPr algn="ctr"/>
-            <a:endParaRPr/>
           </a:p>
         </p:txBody>
       </p:sp>
@@ -14263,7 +14157,7 @@
           <a:noFill/>
         </p:spPr>
         <p:txBody>
-          <a:bodyPr wrap="square" lIns="0" tIns="0" rIns="0" bIns="0">
+          <a:bodyPr wrap="square" lIns="0" rIns="0" tIns="0" bIns="0">
             <a:spAutoFit/>
           </a:bodyPr>
           <a:lstStyle/>
@@ -14308,7 +14202,7 @@
           <a:noFill/>
         </p:spPr>
         <p:txBody>
-          <a:bodyPr wrap="square" lIns="0" tIns="0" rIns="0" bIns="0">
+          <a:bodyPr wrap="square" lIns="0" rIns="0" tIns="0" bIns="0">
             <a:spAutoFit/>
           </a:bodyPr>
           <a:lstStyle/>
@@ -14353,7 +14247,7 @@
           <a:noFill/>
         </p:spPr>
         <p:txBody>
-          <a:bodyPr wrap="square" lIns="0" tIns="0" rIns="0" bIns="0">
+          <a:bodyPr wrap="square" lIns="0" rIns="0" tIns="0" bIns="0">
             <a:spAutoFit/>
           </a:bodyPr>
           <a:lstStyle/>
@@ -14398,7 +14292,7 @@
           <a:noFill/>
         </p:spPr>
         <p:txBody>
-          <a:bodyPr wrap="square" lIns="0" tIns="0" rIns="0" bIns="0">
+          <a:bodyPr wrap="square" lIns="0" rIns="0" tIns="0" bIns="0">
             <a:spAutoFit/>
           </a:bodyPr>
           <a:lstStyle/>
@@ -14463,11 +14357,10 @@
           </a:fontRef>
         </p:style>
         <p:txBody>
-          <a:bodyPr wrap="square" rtlCol="0" anchor="ctr"/>
+          <a:bodyPr rtlCol="0" anchor="ctr" wrap="square"/>
           <a:lstStyle/>
           <a:p>
             <a:pPr algn="ctr"/>
-            <a:endParaRPr/>
           </a:p>
         </p:txBody>
       </p:sp>
@@ -14488,7 +14381,7 @@
           <a:noFill/>
         </p:spPr>
         <p:txBody>
-          <a:bodyPr wrap="square" lIns="0" tIns="0" rIns="0" bIns="0">
+          <a:bodyPr wrap="square" lIns="0" rIns="0" tIns="0" bIns="0">
             <a:spAutoFit/>
           </a:bodyPr>
           <a:lstStyle/>
@@ -14533,7 +14426,7 @@
           <a:noFill/>
         </p:spPr>
         <p:txBody>
-          <a:bodyPr wrap="square" lIns="0" tIns="0" rIns="0" bIns="0">
+          <a:bodyPr wrap="square" lIns="0" rIns="0" tIns="0" bIns="0">
             <a:spAutoFit/>
           </a:bodyPr>
           <a:lstStyle/>
@@ -14578,7 +14471,7 @@
           <a:noFill/>
         </p:spPr>
         <p:txBody>
-          <a:bodyPr wrap="square" lIns="0" tIns="0" rIns="0" bIns="0">
+          <a:bodyPr wrap="square" lIns="0" rIns="0" tIns="0" bIns="0">
             <a:spAutoFit/>
           </a:bodyPr>
           <a:lstStyle/>
@@ -14623,7 +14516,7 @@
           <a:noFill/>
         </p:spPr>
         <p:txBody>
-          <a:bodyPr wrap="square" lIns="0" tIns="0" rIns="0" bIns="0">
+          <a:bodyPr wrap="square" lIns="0" rIns="0" tIns="0" bIns="0">
             <a:spAutoFit/>
           </a:bodyPr>
           <a:lstStyle/>
@@ -14688,11 +14581,10 @@
           </a:fontRef>
         </p:style>
         <p:txBody>
-          <a:bodyPr wrap="square" rtlCol="0" anchor="ctr"/>
+          <a:bodyPr rtlCol="0" anchor="ctr" wrap="square"/>
           <a:lstStyle/>
           <a:p>
             <a:pPr algn="ctr"/>
-            <a:endParaRPr/>
           </a:p>
         </p:txBody>
       </p:sp>
@@ -14713,7 +14605,7 @@
           <a:noFill/>
         </p:spPr>
         <p:txBody>
-          <a:bodyPr wrap="square" lIns="0" tIns="0" rIns="0" bIns="0">
+          <a:bodyPr wrap="square" lIns="0" rIns="0" tIns="0" bIns="0">
             <a:spAutoFit/>
           </a:bodyPr>
           <a:lstStyle/>
@@ -14758,7 +14650,7 @@
           <a:noFill/>
         </p:spPr>
         <p:txBody>
-          <a:bodyPr wrap="square" lIns="0" tIns="0" rIns="0" bIns="0">
+          <a:bodyPr wrap="square" lIns="0" rIns="0" tIns="0" bIns="0">
             <a:spAutoFit/>
           </a:bodyPr>
           <a:lstStyle/>
@@ -14803,7 +14695,7 @@
           <a:noFill/>
         </p:spPr>
         <p:txBody>
-          <a:bodyPr wrap="square" lIns="0" tIns="0" rIns="0" bIns="0">
+          <a:bodyPr wrap="square" lIns="0" rIns="0" tIns="0" bIns="0">
             <a:spAutoFit/>
           </a:bodyPr>
           <a:lstStyle/>
@@ -14848,7 +14740,7 @@
           <a:noFill/>
         </p:spPr>
         <p:txBody>
-          <a:bodyPr wrap="square" lIns="0" tIns="0" rIns="0" bIns="0">
+          <a:bodyPr wrap="square" lIns="0" rIns="0" tIns="0" bIns="0">
             <a:spAutoFit/>
           </a:bodyPr>
           <a:lstStyle/>
@@ -14913,11 +14805,10 @@
           </a:fontRef>
         </p:style>
         <p:txBody>
-          <a:bodyPr wrap="square" rtlCol="0" anchor="ctr"/>
+          <a:bodyPr rtlCol="0" anchor="ctr" wrap="square"/>
           <a:lstStyle/>
           <a:p>
             <a:pPr algn="ctr"/>
-            <a:endParaRPr/>
           </a:p>
         </p:txBody>
       </p:sp>
@@ -14938,7 +14829,7 @@
           <a:noFill/>
         </p:spPr>
         <p:txBody>
-          <a:bodyPr wrap="square" lIns="0" tIns="0" rIns="0" bIns="0">
+          <a:bodyPr wrap="square" lIns="0" rIns="0" tIns="0" bIns="0">
             <a:spAutoFit/>
           </a:bodyPr>
           <a:lstStyle/>
@@ -14983,7 +14874,7 @@
           <a:noFill/>
         </p:spPr>
         <p:txBody>
-          <a:bodyPr wrap="square" lIns="0" tIns="0" rIns="0" bIns="0">
+          <a:bodyPr wrap="square" lIns="0" rIns="0" tIns="0" bIns="0">
             <a:spAutoFit/>
           </a:bodyPr>
           <a:lstStyle/>
@@ -15028,7 +14919,7 @@
           <a:noFill/>
         </p:spPr>
         <p:txBody>
-          <a:bodyPr wrap="square" lIns="0" tIns="0" rIns="0" bIns="0">
+          <a:bodyPr wrap="square" lIns="0" rIns="0" tIns="0" bIns="0">
             <a:spAutoFit/>
           </a:bodyPr>
           <a:lstStyle/>
@@ -15073,7 +14964,7 @@
           <a:noFill/>
         </p:spPr>
         <p:txBody>
-          <a:bodyPr wrap="square" lIns="0" tIns="0" rIns="0" bIns="0">
+          <a:bodyPr wrap="square" lIns="0" rIns="0" tIns="0" bIns="0">
             <a:spAutoFit/>
           </a:bodyPr>
           <a:lstStyle/>
@@ -15209,11 +15100,10 @@
           </a:fontRef>
         </p:style>
         <p:txBody>
-          <a:bodyPr wrap="square" rtlCol="0" anchor="ctr"/>
+          <a:bodyPr rtlCol="0" anchor="ctr" wrap="square"/>
           <a:lstStyle/>
           <a:p>
             <a:pPr algn="ctr"/>
-            <a:endParaRPr/>
           </a:p>
         </p:txBody>
       </p:sp>
@@ -15254,11 +15144,10 @@
           </a:fontRef>
         </p:style>
         <p:txBody>
-          <a:bodyPr wrap="square" rtlCol="0" anchor="ctr"/>
+          <a:bodyPr rtlCol="0" anchor="ctr" wrap="square"/>
           <a:lstStyle/>
           <a:p>
             <a:pPr algn="ctr"/>
-            <a:endParaRPr/>
           </a:p>
         </p:txBody>
       </p:sp>
@@ -15279,7 +15168,7 @@
           <a:noFill/>
         </p:spPr>
         <p:txBody>
-          <a:bodyPr wrap="square" lIns="0" tIns="0" rIns="0" bIns="0">
+          <a:bodyPr wrap="square" lIns="0" rIns="0" tIns="0" bIns="0">
             <a:spAutoFit/>
           </a:bodyPr>
           <a:lstStyle/>
@@ -15330,7 +15219,7 @@
           <a:noFill/>
         </p:spPr>
         <p:txBody>
-          <a:bodyPr wrap="square" lIns="0" tIns="0" rIns="0" bIns="0">
+          <a:bodyPr wrap="square" lIns="0" rIns="0" tIns="0" bIns="0">
             <a:spAutoFit/>
           </a:bodyPr>
           <a:lstStyle/>
@@ -15375,7 +15264,7 @@
           <a:noFill/>
         </p:spPr>
         <p:txBody>
-          <a:bodyPr wrap="square" lIns="0" tIns="0" rIns="0" bIns="0">
+          <a:bodyPr wrap="square" lIns="0" rIns="0" tIns="0" bIns="0">
             <a:spAutoFit/>
           </a:bodyPr>
           <a:lstStyle/>
@@ -15412,7 +15301,7 @@
 </file>
 
 <file path=ppt/slides/slide4.xml><?xml version="1.0" encoding="utf-8"?>
-<p:sld xmlns:a="http://schemas.openxmlformats.org/drawingml/2006/main" xmlns:r="http://schemas.openxmlformats.org/officeDocument/2006/relationships" xmlns:p="http://schemas.openxmlformats.org/presentationml/2006/main">
+<p:sld xmlns:a="http://schemas.openxmlformats.org/drawingml/2006/main" xmlns:p="http://schemas.openxmlformats.org/presentationml/2006/main" xmlns:r="http://schemas.openxmlformats.org/officeDocument/2006/relationships">
   <p:cSld>
     <p:bg>
       <p:bgPr>
@@ -15428,14 +15317,7 @@
         <p:cNvGrpSpPr/>
         <p:nvPr/>
       </p:nvGrpSpPr>
-      <p:grpSpPr>
-        <a:xfrm>
-          <a:off x="0" y="0"/>
-          <a:ext cx="0" cy="0"/>
-          <a:chOff x="0" y="0"/>
-          <a:chExt cx="0" cy="0"/>
-        </a:xfrm>
-      </p:grpSpPr>
+      <p:grpSpPr/>
       <p:sp>
         <p:nvSpPr>
           <p:cNvPr id="2" name="Rectangle 1"/>
@@ -15473,11 +15355,10 @@
           </a:fontRef>
         </p:style>
         <p:txBody>
-          <a:bodyPr wrap="square" rtlCol="0" anchor="ctr"/>
+          <a:bodyPr rtlCol="0" anchor="ctr" wrap="square"/>
           <a:lstStyle/>
           <a:p>
             <a:pPr algn="ctr"/>
-            <a:endParaRPr/>
           </a:p>
         </p:txBody>
       </p:sp>
@@ -15498,7 +15379,7 @@
           <a:noFill/>
         </p:spPr>
         <p:txBody>
-          <a:bodyPr wrap="square" lIns="0" tIns="0" rIns="0" bIns="0">
+          <a:bodyPr wrap="square" lIns="0" rIns="0" tIns="0" bIns="0">
             <a:spAutoFit/>
           </a:bodyPr>
           <a:lstStyle/>
@@ -15543,7 +15424,7 @@
           <a:noFill/>
         </p:spPr>
         <p:txBody>
-          <a:bodyPr wrap="square" lIns="0" tIns="0" rIns="0" bIns="0">
+          <a:bodyPr wrap="square" lIns="0" rIns="0" tIns="0" bIns="0">
             <a:spAutoFit/>
           </a:bodyPr>
           <a:lstStyle/>
@@ -15608,11 +15489,10 @@
           </a:fontRef>
         </p:style>
         <p:txBody>
-          <a:bodyPr wrap="square" rtlCol="0" anchor="ctr"/>
+          <a:bodyPr rtlCol="0" anchor="ctr" wrap="square"/>
           <a:lstStyle/>
           <a:p>
             <a:pPr algn="ctr"/>
-            <a:endParaRPr/>
           </a:p>
         </p:txBody>
       </p:sp>
@@ -15633,7 +15513,7 @@
           <a:noFill/>
         </p:spPr>
         <p:txBody>
-          <a:bodyPr wrap="square" lIns="0" tIns="0" rIns="0" bIns="0">
+          <a:bodyPr wrap="square" lIns="0" rIns="0" tIns="0" bIns="0">
             <a:spAutoFit/>
           </a:bodyPr>
           <a:lstStyle/>
@@ -15678,7 +15558,7 @@
           <a:noFill/>
         </p:spPr>
         <p:txBody>
-          <a:bodyPr wrap="square" lIns="0" tIns="0" rIns="0" bIns="0">
+          <a:bodyPr wrap="square" lIns="0" rIns="0" tIns="0" bIns="0">
             <a:spAutoFit/>
           </a:bodyPr>
           <a:lstStyle/>
@@ -15743,11 +15623,10 @@
           </a:fontRef>
         </p:style>
         <p:txBody>
-          <a:bodyPr wrap="square" rtlCol="0" anchor="ctr"/>
+          <a:bodyPr rtlCol="0" anchor="ctr" wrap="square"/>
           <a:lstStyle/>
           <a:p>
             <a:pPr algn="ctr"/>
-            <a:endParaRPr/>
           </a:p>
         </p:txBody>
       </p:sp>
@@ -15768,7 +15647,7 @@
           <a:noFill/>
         </p:spPr>
         <p:txBody>
-          <a:bodyPr wrap="square" lIns="0" tIns="0" rIns="0" bIns="0">
+          <a:bodyPr wrap="square" lIns="0" rIns="0" tIns="0" bIns="0">
             <a:spAutoFit/>
           </a:bodyPr>
           <a:lstStyle/>
@@ -15871,15 +15750,15 @@
         <p:spPr>
           <a:xfrm>
             <a:off x="685800" y="4023360"/>
-            <a:ext cx="5212080" cy="2159950"/>
-          </a:xfrm>
-          <a:prstGeom prst="rect">
-            <a:avLst/>
-          </a:prstGeom>
-          <a:noFill/>
-        </p:spPr>
-        <p:txBody>
-          <a:bodyPr wrap="square" lIns="0" tIns="0" rIns="0" bIns="0">
+            <a:ext cx="5212080" cy="365760"/>
+          </a:xfrm>
+          <a:prstGeom prst="rect">
+            <a:avLst/>
+          </a:prstGeom>
+          <a:noFill/>
+        </p:spPr>
+        <p:txBody>
+          <a:bodyPr wrap="square" lIns="0" rIns="0" tIns="0" bIns="0">
             <a:spAutoFit/>
           </a:bodyPr>
           <a:lstStyle/>
@@ -15896,7 +15775,7 @@
               </a:spcAft>
             </a:pPr>
             <a:r>
-              <a:rPr sz="1300" b="1" dirty="0">
+              <a:rPr sz="1300" b="1">
                 <a:solidFill>
                   <a:srgbClr val="6B2D5C"/>
                 </a:solidFill>
@@ -15905,49 +15784,13 @@
               <a:t>Inference only.</a:t>
             </a:r>
             <a:r>
-              <a:rPr sz="1300" b="0" dirty="0">
-                <a:solidFill>
-                  <a:srgbClr val="1A1F2B"/>
-                </a:solidFill>
-                <a:latin typeface="Segoe UI"/>
-              </a:rPr>
-              <a:t>  fold-1 checkpoint, </a:t>
-            </a:r>
-            <a:r>
-              <a:rPr sz="1300" b="0" dirty="0" err="1">
-                <a:solidFill>
-                  <a:srgbClr val="1A1F2B"/>
-                </a:solidFill>
-                <a:latin typeface="Segoe UI"/>
-              </a:rPr>
-              <a:t>model.eval</a:t>
-            </a:r>
-            <a:r>
-              <a:rPr sz="1300" b="0" dirty="0">
-                <a:solidFill>
-                  <a:srgbClr val="1A1F2B"/>
-                </a:solidFill>
-                <a:latin typeface="Segoe UI"/>
-              </a:rPr>
-              <a:t>() under </a:t>
-            </a:r>
-            <a:r>
-              <a:rPr sz="1300" b="0" dirty="0" err="1">
-                <a:solidFill>
-                  <a:srgbClr val="1A1F2B"/>
-                </a:solidFill>
-                <a:latin typeface="Segoe UI"/>
-              </a:rPr>
-              <a:t>no_grad</a:t>
-            </a:r>
-            <a:r>
-              <a:rPr sz="1300" b="0" dirty="0">
-                <a:solidFill>
-                  <a:srgbClr val="1A1F2B"/>
-                </a:solidFill>
-                <a:latin typeface="Segoe UI"/>
-              </a:rPr>
-              <a:t>. 19 min for 797 tests on CPU.</a:t>
+              <a:rPr sz="1300" b="0">
+                <a:solidFill>
+                  <a:srgbClr val="1A1F2B"/>
+                </a:solidFill>
+                <a:latin typeface="Segoe UI"/>
+              </a:rPr>
+              <a:t>  fold-1 checkpoint, model.eval() under no_grad. 19 min for 797 tests on CPU.</a:t>
             </a:r>
           </a:p>
           <a:p>
@@ -15963,7 +15806,7 @@
               </a:spcAft>
             </a:pPr>
             <a:r>
-              <a:rPr sz="1300" b="1" dirty="0">
+              <a:rPr sz="1300" b="1">
                 <a:solidFill>
                   <a:srgbClr val="6B2D5C"/>
                 </a:solidFill>
@@ -15972,56 +15815,14 @@
               <a:t>Two runs.</a:t>
             </a:r>
             <a:r>
-              <a:rPr sz="1300" b="0" dirty="0">
-                <a:solidFill>
-                  <a:srgbClr val="1A1F2B"/>
-                </a:solidFill>
-                <a:latin typeface="Segoe UI"/>
-              </a:rPr>
-              <a:t>  run A = the corpus as our converter emits it; </a:t>
-            </a:r>
-            <a:r>
-              <a:rPr lang="en-US" sz="1300" b="0" dirty="0">
-                <a:solidFill>
-                  <a:srgbClr val="1A1F2B"/>
-                </a:solidFill>
-                <a:latin typeface="Segoe UI"/>
-              </a:rPr>
-              <a:t>run A couldn’t detect any non-flaky tests. So, we </a:t>
-            </a:r>
-            <a:r>
-              <a:rPr lang="en-US" sz="1300" dirty="0">
-                <a:solidFill>
-                  <a:srgbClr val="1A1F2B"/>
-                </a:solidFill>
-                <a:latin typeface="Segoe UI"/>
-              </a:rPr>
-              <a:t>had </a:t>
-            </a:r>
-            <a:r>
-              <a:rPr sz="1300" b="0" dirty="0">
-                <a:solidFill>
-                  <a:srgbClr val="1A1F2B"/>
-                </a:solidFill>
-                <a:latin typeface="Segoe UI"/>
-              </a:rPr>
-              <a:t>run B = the same corpus with one newline appended per test, nothing else changed.</a:t>
-            </a:r>
-            <a:r>
-              <a:rPr lang="en-US" sz="1300" b="0" dirty="0">
-                <a:solidFill>
-                  <a:srgbClr val="1A1F2B"/>
-                </a:solidFill>
-                <a:latin typeface="Segoe UI"/>
-              </a:rPr>
-              <a:t> Result improved significantly.</a:t>
-            </a:r>
-            <a:endParaRPr sz="1300" b="0" dirty="0">
-              <a:solidFill>
-                <a:srgbClr val="1A1F2B"/>
-              </a:solidFill>
-              <a:latin typeface="Segoe UI"/>
-            </a:endParaRPr>
+              <a:rPr sz="1300" b="0">
+                <a:solidFill>
+                  <a:srgbClr val="1A1F2B"/>
+                </a:solidFill>
+                <a:latin typeface="Segoe UI"/>
+              </a:rPr>
+              <a:t>  run A = the corpus as our converter emits it; run B = the same corpus with one newline appended per test, nothing else changed.</a:t>
+            </a:r>
           </a:p>
           <a:p>
             <a:pPr>
@@ -16036,7 +15837,7 @@
               </a:spcAft>
             </a:pPr>
             <a:r>
-              <a:rPr sz="1300" b="1" dirty="0">
+              <a:rPr sz="1300" b="1">
                 <a:solidFill>
                   <a:srgbClr val="6B2D5C"/>
                 </a:solidFill>
@@ -16045,7 +15846,7 @@
               <a:t>Control first.</a:t>
             </a:r>
             <a:r>
-              <a:rPr sz="1300" b="0" dirty="0">
+              <a:rPr sz="1300" b="0">
                 <a:solidFill>
                   <a:srgbClr val="1A1F2B"/>
                 </a:solidFill>
@@ -16073,7 +15874,7 @@
           <a:noFill/>
         </p:spPr>
         <p:txBody>
-          <a:bodyPr wrap="square" lIns="0" tIns="0" rIns="0" bIns="0">
+          <a:bodyPr wrap="square" lIns="0" rIns="0" tIns="0" bIns="0">
             <a:spAutoFit/>
           </a:bodyPr>
           <a:lstStyle/>
@@ -16138,11 +15939,10 @@
           </a:fontRef>
         </p:style>
         <p:txBody>
-          <a:bodyPr wrap="square" rtlCol="0" anchor="ctr"/>
+          <a:bodyPr rtlCol="0" anchor="ctr" wrap="square"/>
           <a:lstStyle/>
           <a:p>
             <a:pPr algn="ctr"/>
-            <a:endParaRPr/>
           </a:p>
         </p:txBody>
       </p:sp>
@@ -16163,7 +15963,7 @@
           <a:noFill/>
         </p:spPr>
         <p:txBody>
-          <a:bodyPr wrap="square" lIns="0" tIns="0" rIns="0" bIns="0">
+          <a:bodyPr wrap="square" lIns="0" rIns="0" tIns="0" bIns="0">
             <a:spAutoFit/>
           </a:bodyPr>
           <a:lstStyle/>
@@ -16208,7 +16008,7 @@
           <a:noFill/>
         </p:spPr>
         <p:txBody>
-          <a:bodyPr wrap="square" lIns="0" tIns="0" rIns="0" bIns="0">
+          <a:bodyPr wrap="square" lIns="0" rIns="0" tIns="0" bIns="0">
             <a:spAutoFit/>
           </a:bodyPr>
           <a:lstStyle/>
@@ -16253,7 +16053,7 @@
           <a:noFill/>
         </p:spPr>
         <p:txBody>
-          <a:bodyPr wrap="square" lIns="0" tIns="0" rIns="0" bIns="0">
+          <a:bodyPr wrap="square" lIns="0" rIns="0" tIns="0" bIns="0">
             <a:spAutoFit/>
           </a:bodyPr>
           <a:lstStyle/>
@@ -16298,7 +16098,7 @@
           <a:noFill/>
         </p:spPr>
         <p:txBody>
-          <a:bodyPr wrap="square" lIns="0" tIns="0" rIns="0" bIns="0">
+          <a:bodyPr wrap="square" lIns="0" rIns="0" tIns="0" bIns="0">
             <a:spAutoFit/>
           </a:bodyPr>
           <a:lstStyle/>
@@ -16363,11 +16163,10 @@
           </a:fontRef>
         </p:style>
         <p:txBody>
-          <a:bodyPr wrap="square" rtlCol="0" anchor="ctr"/>
+          <a:bodyPr rtlCol="0" anchor="ctr" wrap="square"/>
           <a:lstStyle/>
           <a:p>
             <a:pPr algn="ctr"/>
-            <a:endParaRPr/>
           </a:p>
         </p:txBody>
       </p:sp>
@@ -16388,7 +16187,7 @@
           <a:noFill/>
         </p:spPr>
         <p:txBody>
-          <a:bodyPr wrap="square" lIns="0" tIns="0" rIns="0" bIns="0">
+          <a:bodyPr wrap="square" lIns="0" rIns="0" tIns="0" bIns="0">
             <a:spAutoFit/>
           </a:bodyPr>
           <a:lstStyle/>
@@ -16433,7 +16232,7 @@
           <a:noFill/>
         </p:spPr>
         <p:txBody>
-          <a:bodyPr wrap="square" lIns="0" tIns="0" rIns="0" bIns="0">
+          <a:bodyPr wrap="square" lIns="0" rIns="0" tIns="0" bIns="0">
             <a:spAutoFit/>
           </a:bodyPr>
           <a:lstStyle/>
@@ -16478,7 +16277,7 @@
           <a:noFill/>
         </p:spPr>
         <p:txBody>
-          <a:bodyPr wrap="square" lIns="0" tIns="0" rIns="0" bIns="0">
+          <a:bodyPr wrap="square" lIns="0" rIns="0" tIns="0" bIns="0">
             <a:spAutoFit/>
           </a:bodyPr>
           <a:lstStyle/>
@@ -16523,7 +16322,7 @@
           <a:noFill/>
         </p:spPr>
         <p:txBody>
-          <a:bodyPr wrap="square" lIns="0" tIns="0" rIns="0" bIns="0">
+          <a:bodyPr wrap="square" lIns="0" rIns="0" tIns="0" bIns="0">
             <a:spAutoFit/>
           </a:bodyPr>
           <a:lstStyle/>
@@ -16588,11 +16387,10 @@
           </a:fontRef>
         </p:style>
         <p:txBody>
-          <a:bodyPr wrap="square" rtlCol="0" anchor="ctr"/>
+          <a:bodyPr rtlCol="0" anchor="ctr" wrap="square"/>
           <a:lstStyle/>
           <a:p>
             <a:pPr algn="ctr"/>
-            <a:endParaRPr/>
           </a:p>
         </p:txBody>
       </p:sp>
@@ -16613,7 +16411,7 @@
           <a:noFill/>
         </p:spPr>
         <p:txBody>
-          <a:bodyPr wrap="square" lIns="0" tIns="0" rIns="0" bIns="0">
+          <a:bodyPr wrap="square" lIns="0" rIns="0" tIns="0" bIns="0">
             <a:spAutoFit/>
           </a:bodyPr>
           <a:lstStyle/>
@@ -16658,7 +16456,7 @@
           <a:noFill/>
         </p:spPr>
         <p:txBody>
-          <a:bodyPr wrap="square" lIns="0" tIns="0" rIns="0" bIns="0">
+          <a:bodyPr wrap="square" lIns="0" rIns="0" tIns="0" bIns="0">
             <a:spAutoFit/>
           </a:bodyPr>
           <a:lstStyle/>
@@ -16703,7 +16501,7 @@
           <a:noFill/>
         </p:spPr>
         <p:txBody>
-          <a:bodyPr wrap="square" lIns="0" tIns="0" rIns="0" bIns="0">
+          <a:bodyPr wrap="square" lIns="0" rIns="0" tIns="0" bIns="0">
             <a:spAutoFit/>
           </a:bodyPr>
           <a:lstStyle/>
@@ -16748,7 +16546,7 @@
           <a:noFill/>
         </p:spPr>
         <p:txBody>
-          <a:bodyPr wrap="square" lIns="0" tIns="0" rIns="0" bIns="0">
+          <a:bodyPr wrap="square" lIns="0" rIns="0" tIns="0" bIns="0">
             <a:spAutoFit/>
           </a:bodyPr>
           <a:lstStyle/>
@@ -16813,11 +16611,10 @@
           </a:fontRef>
         </p:style>
         <p:txBody>
-          <a:bodyPr wrap="square" rtlCol="0" anchor="ctr"/>
+          <a:bodyPr rtlCol="0" anchor="ctr" wrap="square"/>
           <a:lstStyle/>
           <a:p>
             <a:pPr algn="ctr"/>
-            <a:endParaRPr/>
           </a:p>
         </p:txBody>
       </p:sp>
@@ -16838,7 +16635,7 @@
           <a:noFill/>
         </p:spPr>
         <p:txBody>
-          <a:bodyPr wrap="square" lIns="0" tIns="0" rIns="0" bIns="0">
+          <a:bodyPr wrap="square" lIns="0" rIns="0" tIns="0" bIns="0">
             <a:spAutoFit/>
           </a:bodyPr>
           <a:lstStyle/>
@@ -16883,7 +16680,7 @@
           <a:noFill/>
         </p:spPr>
         <p:txBody>
-          <a:bodyPr wrap="square" lIns="0" tIns="0" rIns="0" bIns="0">
+          <a:bodyPr wrap="square" lIns="0" rIns="0" tIns="0" bIns="0">
             <a:spAutoFit/>
           </a:bodyPr>
           <a:lstStyle/>
@@ -16948,11 +16745,10 @@
           </a:fontRef>
         </p:style>
         <p:txBody>
-          <a:bodyPr wrap="square" rtlCol="0" anchor="ctr"/>
+          <a:bodyPr rtlCol="0" anchor="ctr" wrap="square"/>
           <a:lstStyle/>
           <a:p>
             <a:pPr algn="ctr"/>
-            <a:endParaRPr/>
           </a:p>
         </p:txBody>
       </p:sp>
@@ -16993,11 +16789,10 @@
           </a:fontRef>
         </p:style>
         <p:txBody>
-          <a:bodyPr wrap="square" rtlCol="0" anchor="ctr"/>
+          <a:bodyPr rtlCol="0" anchor="ctr" wrap="square"/>
           <a:lstStyle/>
           <a:p>
             <a:pPr algn="ctr"/>
-            <a:endParaRPr/>
           </a:p>
         </p:txBody>
       </p:sp>
@@ -17018,7 +16813,7 @@
           <a:noFill/>
         </p:spPr>
         <p:txBody>
-          <a:bodyPr wrap="square" lIns="0" tIns="0" rIns="0" bIns="0">
+          <a:bodyPr wrap="square" lIns="0" rIns="0" tIns="0" bIns="0">
             <a:spAutoFit/>
           </a:bodyPr>
           <a:lstStyle/>
@@ -17069,7 +16864,7 @@
           <a:noFill/>
         </p:spPr>
         <p:txBody>
-          <a:bodyPr wrap="square" lIns="0" tIns="0" rIns="0" bIns="0">
+          <a:bodyPr wrap="square" lIns="0" rIns="0" tIns="0" bIns="0">
             <a:spAutoFit/>
           </a:bodyPr>
           <a:lstStyle/>
@@ -17114,7 +16909,7 @@
           <a:noFill/>
         </p:spPr>
         <p:txBody>
-          <a:bodyPr wrap="square" lIns="0" tIns="0" rIns="0" bIns="0">
+          <a:bodyPr wrap="square" lIns="0" rIns="0" tIns="0" bIns="0">
             <a:spAutoFit/>
           </a:bodyPr>
           <a:lstStyle/>
@@ -17151,7 +16946,7 @@
 </file>
 
 <file path=ppt/slides/slide5.xml><?xml version="1.0" encoding="utf-8"?>
-<p:sld xmlns:a="http://schemas.openxmlformats.org/drawingml/2006/main" xmlns:r="http://schemas.openxmlformats.org/officeDocument/2006/relationships" xmlns:p="http://schemas.openxmlformats.org/presentationml/2006/main">
+<p:sld xmlns:a="http://schemas.openxmlformats.org/drawingml/2006/main" xmlns:p="http://schemas.openxmlformats.org/presentationml/2006/main" xmlns:r="http://schemas.openxmlformats.org/officeDocument/2006/relationships">
   <p:cSld>
     <p:bg>
       <p:bgPr>
@@ -17167,14 +16962,7 @@
         <p:cNvGrpSpPr/>
         <p:nvPr/>
       </p:nvGrpSpPr>
-      <p:grpSpPr>
-        <a:xfrm>
-          <a:off x="0" y="0"/>
-          <a:ext cx="0" cy="0"/>
-          <a:chOff x="0" y="0"/>
-          <a:chExt cx="0" cy="0"/>
-        </a:xfrm>
-      </p:grpSpPr>
+      <p:grpSpPr/>
       <p:sp>
         <p:nvSpPr>
           <p:cNvPr id="2" name="Rectangle 1"/>
@@ -17212,11 +17000,10 @@
           </a:fontRef>
         </p:style>
         <p:txBody>
-          <a:bodyPr wrap="square" rtlCol="0" anchor="ctr"/>
+          <a:bodyPr rtlCol="0" anchor="ctr" wrap="square"/>
           <a:lstStyle/>
           <a:p>
             <a:pPr algn="ctr"/>
-            <a:endParaRPr/>
           </a:p>
         </p:txBody>
       </p:sp>
@@ -17237,7 +17024,7 @@
           <a:noFill/>
         </p:spPr>
         <p:txBody>
-          <a:bodyPr wrap="square" lIns="0" tIns="0" rIns="0" bIns="0">
+          <a:bodyPr wrap="square" lIns="0" rIns="0" tIns="0" bIns="0">
             <a:spAutoFit/>
           </a:bodyPr>
           <a:lstStyle/>
@@ -17282,7 +17069,7 @@
           <a:noFill/>
         </p:spPr>
         <p:txBody>
-          <a:bodyPr wrap="square" lIns="0" tIns="0" rIns="0" bIns="0">
+          <a:bodyPr wrap="square" lIns="0" rIns="0" tIns="0" bIns="0">
             <a:spAutoFit/>
           </a:bodyPr>
           <a:lstStyle/>
@@ -17347,11 +17134,10 @@
           </a:fontRef>
         </p:style>
         <p:txBody>
-          <a:bodyPr wrap="square" rtlCol="0" anchor="ctr"/>
+          <a:bodyPr rtlCol="0" anchor="ctr" wrap="square"/>
           <a:lstStyle/>
           <a:p>
             <a:pPr algn="ctr"/>
-            <a:endParaRPr/>
           </a:p>
         </p:txBody>
       </p:sp>
@@ -17392,11 +17178,10 @@
           </a:fontRef>
         </p:style>
         <p:txBody>
-          <a:bodyPr wrap="square" rtlCol="0" anchor="ctr"/>
+          <a:bodyPr rtlCol="0" anchor="ctr" wrap="square"/>
           <a:lstStyle/>
           <a:p>
             <a:pPr algn="ctr"/>
-            <a:endParaRPr/>
           </a:p>
         </p:txBody>
       </p:sp>
@@ -17437,11 +17222,10 @@
           </a:fontRef>
         </p:style>
         <p:txBody>
-          <a:bodyPr wrap="square" rtlCol="0" anchor="ctr"/>
+          <a:bodyPr rtlCol="0" anchor="ctr" wrap="square"/>
           <a:lstStyle/>
           <a:p>
             <a:pPr algn="ctr"/>
-            <a:endParaRPr/>
           </a:p>
         </p:txBody>
       </p:sp>
@@ -17462,7 +17246,7 @@
           <a:noFill/>
         </p:spPr>
         <p:txBody>
-          <a:bodyPr wrap="square" lIns="0" tIns="0" rIns="0" bIns="0">
+          <a:bodyPr wrap="square" lIns="0" rIns="0" tIns="0" bIns="0">
             <a:spAutoFit/>
           </a:bodyPr>
           <a:lstStyle/>
@@ -17549,11 +17333,10 @@
           </a:fontRef>
         </p:style>
         <p:txBody>
-          <a:bodyPr wrap="square" rtlCol="0" anchor="ctr"/>
+          <a:bodyPr rtlCol="0" anchor="ctr" wrap="square"/>
           <a:lstStyle/>
           <a:p>
             <a:pPr algn="ctr"/>
-            <a:endParaRPr/>
           </a:p>
         </p:txBody>
       </p:sp>
@@ -17594,11 +17377,10 @@
           </a:fontRef>
         </p:style>
         <p:txBody>
-          <a:bodyPr wrap="square" rtlCol="0" anchor="ctr"/>
+          <a:bodyPr rtlCol="0" anchor="ctr" wrap="square"/>
           <a:lstStyle/>
           <a:p>
             <a:pPr algn="ctr"/>
-            <a:endParaRPr/>
           </a:p>
         </p:txBody>
       </p:sp>
@@ -17619,7 +17401,7 @@
           <a:noFill/>
         </p:spPr>
         <p:txBody>
-          <a:bodyPr wrap="square" lIns="0" tIns="0" rIns="0" bIns="0">
+          <a:bodyPr wrap="square" lIns="0" rIns="0" tIns="0" bIns="0">
             <a:spAutoFit/>
           </a:bodyPr>
           <a:lstStyle/>
@@ -17706,11 +17488,10 @@
           </a:fontRef>
         </p:style>
         <p:txBody>
-          <a:bodyPr wrap="square" rtlCol="0" anchor="ctr"/>
+          <a:bodyPr rtlCol="0" anchor="ctr" wrap="square"/>
           <a:lstStyle/>
           <a:p>
             <a:pPr algn="ctr"/>
-            <a:endParaRPr/>
           </a:p>
         </p:txBody>
       </p:sp>
@@ -17751,11 +17532,10 @@
           </a:fontRef>
         </p:style>
         <p:txBody>
-          <a:bodyPr wrap="square" rtlCol="0" anchor="ctr"/>
+          <a:bodyPr rtlCol="0" anchor="ctr" wrap="square"/>
           <a:lstStyle/>
           <a:p>
             <a:pPr algn="ctr"/>
-            <a:endParaRPr/>
           </a:p>
         </p:txBody>
       </p:sp>
@@ -17776,7 +17556,7 @@
           <a:noFill/>
         </p:spPr>
         <p:txBody>
-          <a:bodyPr wrap="square" lIns="0" tIns="0" rIns="0" bIns="0">
+          <a:bodyPr wrap="square" lIns="0" rIns="0" tIns="0" bIns="0">
             <a:spAutoFit/>
           </a:bodyPr>
           <a:lstStyle/>
@@ -17863,11 +17643,10 @@
           </a:fontRef>
         </p:style>
         <p:txBody>
-          <a:bodyPr wrap="square" rtlCol="0" anchor="ctr"/>
+          <a:bodyPr rtlCol="0" anchor="ctr" wrap="square"/>
           <a:lstStyle/>
           <a:p>
             <a:pPr algn="ctr"/>
-            <a:endParaRPr/>
           </a:p>
         </p:txBody>
       </p:sp>
@@ -17908,11 +17687,10 @@
           </a:fontRef>
         </p:style>
         <p:txBody>
-          <a:bodyPr wrap="square" rtlCol="0" anchor="ctr"/>
+          <a:bodyPr rtlCol="0" anchor="ctr" wrap="square"/>
           <a:lstStyle/>
           <a:p>
             <a:pPr algn="ctr"/>
-            <a:endParaRPr/>
           </a:p>
         </p:txBody>
       </p:sp>
@@ -17933,7 +17711,7 @@
           <a:noFill/>
         </p:spPr>
         <p:txBody>
-          <a:bodyPr wrap="square" lIns="0" tIns="0" rIns="0" bIns="0">
+          <a:bodyPr wrap="square" lIns="0" rIns="0" tIns="0" bIns="0">
             <a:spAutoFit/>
           </a:bodyPr>
           <a:lstStyle/>
@@ -18000,7 +17778,7 @@
           <a:noFill/>
         </p:spPr>
         <p:txBody>
-          <a:bodyPr wrap="square" lIns="0" tIns="0" rIns="0" bIns="0">
+          <a:bodyPr wrap="square" lIns="0" rIns="0" tIns="0" bIns="0">
             <a:spAutoFit/>
           </a:bodyPr>
           <a:lstStyle/>
@@ -18065,11 +17843,10 @@
           </a:fontRef>
         </p:style>
         <p:txBody>
-          <a:bodyPr wrap="square" rtlCol="0" anchor="ctr"/>
+          <a:bodyPr rtlCol="0" anchor="ctr" wrap="square"/>
           <a:lstStyle/>
           <a:p>
             <a:pPr algn="ctr"/>
-            <a:endParaRPr/>
           </a:p>
         </p:txBody>
       </p:sp>
@@ -18090,7 +17867,7 @@
           <a:noFill/>
         </p:spPr>
         <p:txBody>
-          <a:bodyPr wrap="square" lIns="0" tIns="0" rIns="0" bIns="0">
+          <a:bodyPr wrap="square" lIns="0" rIns="0" tIns="0" bIns="0">
             <a:spAutoFit/>
           </a:bodyPr>
           <a:lstStyle/>
@@ -18135,7 +17912,7 @@
           <a:noFill/>
         </p:spPr>
         <p:txBody>
-          <a:bodyPr wrap="square" lIns="0" tIns="0" rIns="0" bIns="0">
+          <a:bodyPr wrap="square" lIns="0" rIns="0" tIns="0" bIns="0">
             <a:spAutoFit/>
           </a:bodyPr>
           <a:lstStyle/>
@@ -18180,7 +17957,7 @@
           <a:noFill/>
         </p:spPr>
         <p:txBody>
-          <a:bodyPr wrap="square" lIns="0" tIns="0" rIns="0" bIns="0">
+          <a:bodyPr wrap="square" lIns="0" rIns="0" tIns="0" bIns="0">
             <a:spAutoFit/>
           </a:bodyPr>
           <a:lstStyle/>
@@ -18225,7 +18002,7 @@
           <a:noFill/>
         </p:spPr>
         <p:txBody>
-          <a:bodyPr wrap="square" lIns="0" tIns="0" rIns="0" bIns="0">
+          <a:bodyPr wrap="square" lIns="0" rIns="0" tIns="0" bIns="0">
             <a:spAutoFit/>
           </a:bodyPr>
           <a:lstStyle/>
@@ -18270,7 +18047,7 @@
           <a:noFill/>
         </p:spPr>
         <p:txBody>
-          <a:bodyPr wrap="square" lIns="0" tIns="0" rIns="0" bIns="0">
+          <a:bodyPr wrap="square" lIns="0" rIns="0" tIns="0" bIns="0">
             <a:spAutoFit/>
           </a:bodyPr>
           <a:lstStyle/>
@@ -18315,7 +18092,7 @@
           <a:noFill/>
         </p:spPr>
         <p:txBody>
-          <a:bodyPr wrap="square" lIns="0" tIns="0" rIns="0" bIns="0">
+          <a:bodyPr wrap="square" lIns="0" rIns="0" tIns="0" bIns="0">
             <a:spAutoFit/>
           </a:bodyPr>
           <a:lstStyle/>
@@ -18360,7 +18137,7 @@
           <a:noFill/>
         </p:spPr>
         <p:txBody>
-          <a:bodyPr wrap="square" lIns="0" tIns="0" rIns="0" bIns="0">
+          <a:bodyPr wrap="square" lIns="0" rIns="0" tIns="0" bIns="0">
             <a:spAutoFit/>
           </a:bodyPr>
           <a:lstStyle/>
@@ -18405,7 +18182,7 @@
           <a:noFill/>
         </p:spPr>
         <p:txBody>
-          <a:bodyPr wrap="square" lIns="0" tIns="0" rIns="0" bIns="0">
+          <a:bodyPr wrap="square" lIns="0" rIns="0" tIns="0" bIns="0">
             <a:spAutoFit/>
           </a:bodyPr>
           <a:lstStyle/>
@@ -18470,11 +18247,10 @@
           </a:fontRef>
         </p:style>
         <p:txBody>
-          <a:bodyPr wrap="square" rtlCol="0" anchor="ctr"/>
+          <a:bodyPr rtlCol="0" anchor="ctr" wrap="square"/>
           <a:lstStyle/>
           <a:p>
             <a:pPr algn="ctr"/>
-            <a:endParaRPr/>
           </a:p>
         </p:txBody>
       </p:sp>
@@ -18495,7 +18271,7 @@
           <a:noFill/>
         </p:spPr>
         <p:txBody>
-          <a:bodyPr wrap="square" lIns="0" tIns="0" rIns="0" bIns="0">
+          <a:bodyPr wrap="square" lIns="0" rIns="0" tIns="0" bIns="0">
             <a:spAutoFit/>
           </a:bodyPr>
           <a:lstStyle/>
@@ -18540,7 +18316,7 @@
           <a:noFill/>
         </p:spPr>
         <p:txBody>
-          <a:bodyPr wrap="square" lIns="0" tIns="0" rIns="0" bIns="0">
+          <a:bodyPr wrap="square" lIns="0" rIns="0" tIns="0" bIns="0">
             <a:spAutoFit/>
           </a:bodyPr>
           <a:lstStyle/>
@@ -18585,7 +18361,7 @@
           <a:noFill/>
         </p:spPr>
         <p:txBody>
-          <a:bodyPr wrap="square" lIns="0" tIns="0" rIns="0" bIns="0">
+          <a:bodyPr wrap="square" lIns="0" rIns="0" tIns="0" bIns="0">
             <a:spAutoFit/>
           </a:bodyPr>
           <a:lstStyle/>
@@ -18630,7 +18406,7 @@
           <a:noFill/>
         </p:spPr>
         <p:txBody>
-          <a:bodyPr wrap="square" lIns="0" tIns="0" rIns="0" bIns="0">
+          <a:bodyPr wrap="square" lIns="0" rIns="0" tIns="0" bIns="0">
             <a:spAutoFit/>
           </a:bodyPr>
           <a:lstStyle/>
@@ -18675,7 +18451,7 @@
           <a:noFill/>
         </p:spPr>
         <p:txBody>
-          <a:bodyPr wrap="square" lIns="0" tIns="0" rIns="0" bIns="0">
+          <a:bodyPr wrap="square" lIns="0" rIns="0" tIns="0" bIns="0">
             <a:spAutoFit/>
           </a:bodyPr>
           <a:lstStyle/>
@@ -18720,7 +18496,7 @@
           <a:noFill/>
         </p:spPr>
         <p:txBody>
-          <a:bodyPr wrap="square" lIns="0" tIns="0" rIns="0" bIns="0">
+          <a:bodyPr wrap="square" lIns="0" rIns="0" tIns="0" bIns="0">
             <a:spAutoFit/>
           </a:bodyPr>
           <a:lstStyle/>
@@ -18765,7 +18541,7 @@
           <a:noFill/>
         </p:spPr>
         <p:txBody>
-          <a:bodyPr wrap="square" lIns="0" tIns="0" rIns="0" bIns="0">
+          <a:bodyPr wrap="square" lIns="0" rIns="0" tIns="0" bIns="0">
             <a:spAutoFit/>
           </a:bodyPr>
           <a:lstStyle/>
@@ -18810,7 +18586,7 @@
           <a:noFill/>
         </p:spPr>
         <p:txBody>
-          <a:bodyPr wrap="square" lIns="0" tIns="0" rIns="0" bIns="0">
+          <a:bodyPr wrap="square" lIns="0" rIns="0" tIns="0" bIns="0">
             <a:spAutoFit/>
           </a:bodyPr>
           <a:lstStyle/>
@@ -18875,11 +18651,10 @@
           </a:fontRef>
         </p:style>
         <p:txBody>
-          <a:bodyPr wrap="square" rtlCol="0" anchor="ctr"/>
+          <a:bodyPr rtlCol="0" anchor="ctr" wrap="square"/>
           <a:lstStyle/>
           <a:p>
             <a:pPr algn="ctr"/>
-            <a:endParaRPr/>
           </a:p>
         </p:txBody>
       </p:sp>
@@ -18900,7 +18675,7 @@
           <a:noFill/>
         </p:spPr>
         <p:txBody>
-          <a:bodyPr wrap="square" lIns="0" tIns="0" rIns="0" bIns="0">
+          <a:bodyPr wrap="square" lIns="0" rIns="0" tIns="0" bIns="0">
             <a:spAutoFit/>
           </a:bodyPr>
           <a:lstStyle/>
@@ -18945,7 +18720,7 @@
           <a:noFill/>
         </p:spPr>
         <p:txBody>
-          <a:bodyPr wrap="square" lIns="0" tIns="0" rIns="0" bIns="0">
+          <a:bodyPr wrap="square" lIns="0" rIns="0" tIns="0" bIns="0">
             <a:spAutoFit/>
           </a:bodyPr>
           <a:lstStyle/>
@@ -18990,7 +18765,7 @@
           <a:noFill/>
         </p:spPr>
         <p:txBody>
-          <a:bodyPr wrap="square" lIns="0" tIns="0" rIns="0" bIns="0">
+          <a:bodyPr wrap="square" lIns="0" rIns="0" tIns="0" bIns="0">
             <a:spAutoFit/>
           </a:bodyPr>
           <a:lstStyle/>
@@ -19035,7 +18810,7 @@
           <a:noFill/>
         </p:spPr>
         <p:txBody>
-          <a:bodyPr wrap="square" lIns="0" tIns="0" rIns="0" bIns="0">
+          <a:bodyPr wrap="square" lIns="0" rIns="0" tIns="0" bIns="0">
             <a:spAutoFit/>
           </a:bodyPr>
           <a:lstStyle/>
@@ -19080,7 +18855,7 @@
           <a:noFill/>
         </p:spPr>
         <p:txBody>
-          <a:bodyPr wrap="square" lIns="0" tIns="0" rIns="0" bIns="0">
+          <a:bodyPr wrap="square" lIns="0" rIns="0" tIns="0" bIns="0">
             <a:spAutoFit/>
           </a:bodyPr>
           <a:lstStyle/>
@@ -19125,7 +18900,7 @@
           <a:noFill/>
         </p:spPr>
         <p:txBody>
-          <a:bodyPr wrap="square" lIns="0" tIns="0" rIns="0" bIns="0">
+          <a:bodyPr wrap="square" lIns="0" rIns="0" tIns="0" bIns="0">
             <a:spAutoFit/>
           </a:bodyPr>
           <a:lstStyle/>
@@ -19170,7 +18945,7 @@
           <a:noFill/>
         </p:spPr>
         <p:txBody>
-          <a:bodyPr wrap="square" lIns="0" tIns="0" rIns="0" bIns="0">
+          <a:bodyPr wrap="square" lIns="0" rIns="0" tIns="0" bIns="0">
             <a:spAutoFit/>
           </a:bodyPr>
           <a:lstStyle/>
@@ -19215,7 +18990,7 @@
           <a:noFill/>
         </p:spPr>
         <p:txBody>
-          <a:bodyPr wrap="square" lIns="0" tIns="0" rIns="0" bIns="0">
+          <a:bodyPr wrap="square" lIns="0" rIns="0" tIns="0" bIns="0">
             <a:spAutoFit/>
           </a:bodyPr>
           <a:lstStyle/>
@@ -19280,11 +19055,10 @@
           </a:fontRef>
         </p:style>
         <p:txBody>
-          <a:bodyPr wrap="square" rtlCol="0" anchor="ctr"/>
+          <a:bodyPr rtlCol="0" anchor="ctr" wrap="square"/>
           <a:lstStyle/>
           <a:p>
             <a:pPr algn="ctr"/>
-            <a:endParaRPr/>
           </a:p>
         </p:txBody>
       </p:sp>
@@ -19305,7 +19079,7 @@
           <a:noFill/>
         </p:spPr>
         <p:txBody>
-          <a:bodyPr wrap="square" lIns="0" tIns="0" rIns="0" bIns="0">
+          <a:bodyPr wrap="square" lIns="0" rIns="0" tIns="0" bIns="0">
             <a:spAutoFit/>
           </a:bodyPr>
           <a:lstStyle/>
@@ -19350,7 +19124,7 @@
           <a:noFill/>
         </p:spPr>
         <p:txBody>
-          <a:bodyPr wrap="square" lIns="0" tIns="0" rIns="0" bIns="0">
+          <a:bodyPr wrap="square" lIns="0" rIns="0" tIns="0" bIns="0">
             <a:spAutoFit/>
           </a:bodyPr>
           <a:lstStyle/>
@@ -19395,7 +19169,7 @@
           <a:noFill/>
         </p:spPr>
         <p:txBody>
-          <a:bodyPr wrap="square" lIns="0" tIns="0" rIns="0" bIns="0">
+          <a:bodyPr wrap="square" lIns="0" rIns="0" tIns="0" bIns="0">
             <a:spAutoFit/>
           </a:bodyPr>
           <a:lstStyle/>
@@ -19440,7 +19214,7 @@
           <a:noFill/>
         </p:spPr>
         <p:txBody>
-          <a:bodyPr wrap="square" lIns="0" tIns="0" rIns="0" bIns="0">
+          <a:bodyPr wrap="square" lIns="0" rIns="0" tIns="0" bIns="0">
             <a:spAutoFit/>
           </a:bodyPr>
           <a:lstStyle/>
@@ -19505,11 +19279,10 @@
           </a:fontRef>
         </p:style>
         <p:txBody>
-          <a:bodyPr wrap="square" rtlCol="0" anchor="ctr"/>
+          <a:bodyPr rtlCol="0" anchor="ctr" wrap="square"/>
           <a:lstStyle/>
           <a:p>
             <a:pPr algn="ctr"/>
-            <a:endParaRPr/>
           </a:p>
         </p:txBody>
       </p:sp>
@@ -19550,11 +19323,10 @@
           </a:fontRef>
         </p:style>
         <p:txBody>
-          <a:bodyPr wrap="square" rtlCol="0" anchor="ctr"/>
+          <a:bodyPr rtlCol="0" anchor="ctr" wrap="square"/>
           <a:lstStyle/>
           <a:p>
             <a:pPr algn="ctr"/>
-            <a:endParaRPr/>
           </a:p>
         </p:txBody>
       </p:sp>
@@ -19575,7 +19347,7 @@
           <a:noFill/>
         </p:spPr>
         <p:txBody>
-          <a:bodyPr wrap="square" lIns="0" tIns="0" rIns="0" bIns="0">
+          <a:bodyPr wrap="square" lIns="0" rIns="0" tIns="0" bIns="0">
             <a:spAutoFit/>
           </a:bodyPr>
           <a:lstStyle/>
@@ -19595,7 +19367,7 @@
                 </a:solidFill>
                 <a:latin typeface="Segoe UI"/>
               </a:rPr>
-              <a:t>Run A predicted non-flaky exactly zero times</a:t>
+              <a:t>Async, concurrency and time recall is identical across the two runs</a:t>
             </a:r>
             <a:r>
               <a:rPr sz="1250" b="1">
@@ -19604,7 +19376,7 @@
                 </a:solidFill>
                 <a:latin typeface="Segoe UI"/>
               </a:rPr>
-              <a:t> out of 797 — 541 of its non-flaky tests were called order-dependent instead. Run B recovers 687 of 751, and loses all 12 real OD tests.</a:t>
+              <a:t> — the same 17 tests, by name. Only the categories with no token evidence move.</a:t>
             </a:r>
           </a:p>
         </p:txBody>
@@ -19626,7 +19398,7 @@
           <a:noFill/>
         </p:spPr>
         <p:txBody>
-          <a:bodyPr wrap="square" lIns="0" tIns="0" rIns="0" bIns="0">
+          <a:bodyPr wrap="square" lIns="0" rIns="0" tIns="0" bIns="0">
             <a:spAutoFit/>
           </a:bodyPr>
           <a:lstStyle/>
@@ -19649,7 +19421,7 @@
                 </a:solidFill>
                 <a:latin typeface="Segoe UI"/>
               </a:rPr>
-              <a:t>The control — the paper's fold 1, our pipeline</a:t>
+              <a:t>Everything the model predicted, by category</a:t>
             </a:r>
           </a:p>
         </p:txBody>
@@ -19691,11 +19463,10 @@
           </a:fontRef>
         </p:style>
         <p:txBody>
-          <a:bodyPr wrap="square" rtlCol="0" anchor="ctr"/>
+          <a:bodyPr rtlCol="0" anchor="ctr" wrap="square"/>
           <a:lstStyle/>
           <a:p>
             <a:pPr algn="ctr"/>
-            <a:endParaRPr/>
           </a:p>
         </p:txBody>
       </p:sp>
@@ -19708,15 +19479,15 @@
         <p:spPr>
           <a:xfrm>
             <a:off x="6647688" y="3177540"/>
-            <a:ext cx="1847088" cy="219456"/>
-          </a:xfrm>
-          <a:prstGeom prst="rect">
-            <a:avLst/>
-          </a:prstGeom>
-          <a:noFill/>
-        </p:spPr>
-        <p:txBody>
-          <a:bodyPr wrap="square" lIns="0" tIns="0" rIns="0" bIns="0">
+            <a:ext cx="1996592" cy="219456"/>
+          </a:xfrm>
+          <a:prstGeom prst="rect">
+            <a:avLst/>
+          </a:prstGeom>
+          <a:noFill/>
+        </p:spPr>
+        <p:txBody>
+          <a:bodyPr wrap="square" lIns="0" rIns="0" tIns="0" bIns="0">
             <a:spAutoFit/>
           </a:bodyPr>
           <a:lstStyle/>
@@ -19739,7 +19510,7 @@
                 </a:solidFill>
                 <a:latin typeface="Segoe UI"/>
               </a:rPr>
-              <a:t>Class</a:t>
+              <a:t>Predicted category</a:t>
             </a:r>
           </a:p>
         </p:txBody>
@@ -19752,16 +19523,16 @@
         </p:nvSpPr>
         <p:spPr>
           <a:xfrm>
-            <a:off x="8641080" y="3177540"/>
-            <a:ext cx="601218" cy="219456"/>
-          </a:xfrm>
-          <a:prstGeom prst="rect">
-            <a:avLst/>
-          </a:prstGeom>
-          <a:noFill/>
-        </p:spPr>
-        <p:txBody>
-          <a:bodyPr wrap="square" lIns="0" tIns="0" rIns="0" bIns="0">
+            <a:off x="8790584" y="3177540"/>
+            <a:ext cx="800557" cy="219456"/>
+          </a:xfrm>
+          <a:prstGeom prst="rect">
+            <a:avLst/>
+          </a:prstGeom>
+          <a:noFill/>
+        </p:spPr>
+        <p:txBody>
+          <a:bodyPr wrap="square" lIns="0" rIns="0" tIns="0" bIns="0">
             <a:spAutoFit/>
           </a:bodyPr>
           <a:lstStyle/>
@@ -19784,7 +19555,7 @@
                 </a:solidFill>
                 <a:latin typeface="Segoe UI"/>
               </a:rPr>
-              <a:t>P</a:t>
+              <a:t>Actual</a:t>
             </a:r>
           </a:p>
         </p:txBody>
@@ -19797,16 +19568,16 @@
         </p:nvSpPr>
         <p:spPr>
           <a:xfrm>
-            <a:off x="9388602" y="3177540"/>
-            <a:ext cx="601218" cy="219456"/>
-          </a:xfrm>
-          <a:prstGeom prst="rect">
-            <a:avLst/>
-          </a:prstGeom>
-          <a:noFill/>
-        </p:spPr>
-        <p:txBody>
-          <a:bodyPr wrap="square" lIns="0" tIns="0" rIns="0" bIns="0">
+            <a:off x="9737445" y="3177540"/>
+            <a:ext cx="800557" cy="219456"/>
+          </a:xfrm>
+          <a:prstGeom prst="rect">
+            <a:avLst/>
+          </a:prstGeom>
+          <a:noFill/>
+        </p:spPr>
+        <p:txBody>
+          <a:bodyPr wrap="square" lIns="0" rIns="0" tIns="0" bIns="0">
             <a:spAutoFit/>
           </a:bodyPr>
           <a:lstStyle/>
@@ -19829,7 +19600,7 @@
                 </a:solidFill>
                 <a:latin typeface="Segoe UI"/>
               </a:rPr>
-              <a:t>R</a:t>
+              <a:t>Run A</a:t>
             </a:r>
           </a:p>
         </p:txBody>
@@ -19842,16 +19613,16 @@
         </p:nvSpPr>
         <p:spPr>
           <a:xfrm>
-            <a:off x="10136124" y="3177540"/>
-            <a:ext cx="601218" cy="219456"/>
-          </a:xfrm>
-          <a:prstGeom prst="rect">
-            <a:avLst/>
-          </a:prstGeom>
-          <a:noFill/>
-        </p:spPr>
-        <p:txBody>
-          <a:bodyPr wrap="square" lIns="0" tIns="0" rIns="0" bIns="0">
+            <a:off x="10684306" y="3177540"/>
+            <a:ext cx="800557" cy="219456"/>
+          </a:xfrm>
+          <a:prstGeom prst="rect">
+            <a:avLst/>
+          </a:prstGeom>
+          <a:noFill/>
+        </p:spPr>
+        <p:txBody>
+          <a:bodyPr wrap="square" lIns="0" rIns="0" tIns="0" bIns="0">
             <a:spAutoFit/>
           </a:bodyPr>
           <a:lstStyle/>
@@ -19874,7 +19645,7 @@
                 </a:solidFill>
                 <a:latin typeface="Segoe UI"/>
               </a:rPr>
-              <a:t>F1</a:t>
+              <a:t>Run B</a:t>
             </a:r>
           </a:p>
         </p:txBody>
@@ -19887,16 +19658,16 @@
         </p:nvSpPr>
         <p:spPr>
           <a:xfrm>
-            <a:off x="10883646" y="3177540"/>
-            <a:ext cx="601218" cy="219456"/>
-          </a:xfrm>
-          <a:prstGeom prst="rect">
-            <a:avLst/>
-          </a:prstGeom>
-          <a:noFill/>
-        </p:spPr>
-        <p:txBody>
-          <a:bodyPr wrap="square" lIns="0" tIns="0" rIns="0" bIns="0">
+            <a:off x="6647688" y="3451860"/>
+            <a:ext cx="1996592" cy="219456"/>
+          </a:xfrm>
+          <a:prstGeom prst="rect">
+            <a:avLst/>
+          </a:prstGeom>
+          <a:noFill/>
+        </p:spPr>
+        <p:txBody>
+          <a:bodyPr wrap="square" lIns="0" rIns="0" tIns="0" bIns="0">
             <a:spAutoFit/>
           </a:bodyPr>
           <a:lstStyle/>
@@ -19913,13 +19684,13 @@
               </a:spcAft>
             </a:pPr>
             <a:r>
-              <a:rPr sz="1150" b="1" i="0">
-                <a:solidFill>
-                  <a:srgbClr val="FFFFFF"/>
-                </a:solidFill>
-                <a:latin typeface="Segoe UI"/>
-              </a:rPr>
-              <a:t>n</a:t>
+              <a:rPr sz="1150" b="0" i="0">
+                <a:solidFill>
+                  <a:srgbClr val="1A1F2B"/>
+                </a:solidFill>
+                <a:latin typeface="Segoe UI"/>
+              </a:rPr>
+              <a:t>async wait</a:t>
             </a:r>
           </a:p>
         </p:txBody>
@@ -19932,16 +19703,16 @@
         </p:nvSpPr>
         <p:spPr>
           <a:xfrm>
-            <a:off x="6647688" y="3451860"/>
-            <a:ext cx="1847088" cy="219456"/>
-          </a:xfrm>
-          <a:prstGeom prst="rect">
-            <a:avLst/>
-          </a:prstGeom>
-          <a:noFill/>
-        </p:spPr>
-        <p:txBody>
-          <a:bodyPr wrap="square" lIns="0" tIns="0" rIns="0" bIns="0">
+            <a:off x="8790584" y="3451860"/>
+            <a:ext cx="800557" cy="219456"/>
+          </a:xfrm>
+          <a:prstGeom prst="rect">
+            <a:avLst/>
+          </a:prstGeom>
+          <a:noFill/>
+        </p:spPr>
+        <p:txBody>
+          <a:bodyPr wrap="square" lIns="0" rIns="0" tIns="0" bIns="0">
             <a:spAutoFit/>
           </a:bodyPr>
           <a:lstStyle/>
@@ -19964,7 +19735,7 @@
                 </a:solidFill>
                 <a:latin typeface="Segoe UI"/>
               </a:rPr>
-              <a:t>0 async wait</a:t>
+              <a:t>20</a:t>
             </a:r>
           </a:p>
         </p:txBody>
@@ -19977,16 +19748,16 @@
         </p:nvSpPr>
         <p:spPr>
           <a:xfrm>
-            <a:off x="8641080" y="3451860"/>
-            <a:ext cx="601218" cy="219456"/>
-          </a:xfrm>
-          <a:prstGeom prst="rect">
-            <a:avLst/>
-          </a:prstGeom>
-          <a:noFill/>
-        </p:spPr>
-        <p:txBody>
-          <a:bodyPr wrap="square" lIns="0" tIns="0" rIns="0" bIns="0">
+            <a:off x="9737445" y="3451860"/>
+            <a:ext cx="800557" cy="219456"/>
+          </a:xfrm>
+          <a:prstGeom prst="rect">
+            <a:avLst/>
+          </a:prstGeom>
+          <a:noFill/>
+        </p:spPr>
+        <p:txBody>
+          <a:bodyPr wrap="square" lIns="0" rIns="0" tIns="0" bIns="0">
             <a:spAutoFit/>
           </a:bodyPr>
           <a:lstStyle/>
@@ -20009,7 +19780,7 @@
                 </a:solidFill>
                 <a:latin typeface="Segoe UI"/>
               </a:rPr>
-              <a:t>0.50</a:t>
+              <a:t>82</a:t>
             </a:r>
           </a:p>
         </p:txBody>
@@ -20022,16 +19793,16 @@
         </p:nvSpPr>
         <p:spPr>
           <a:xfrm>
-            <a:off x="9388602" y="3451860"/>
-            <a:ext cx="601218" cy="219456"/>
-          </a:xfrm>
-          <a:prstGeom prst="rect">
-            <a:avLst/>
-          </a:prstGeom>
-          <a:noFill/>
-        </p:spPr>
-        <p:txBody>
-          <a:bodyPr wrap="square" lIns="0" tIns="0" rIns="0" bIns="0">
+            <a:off x="10684306" y="3451860"/>
+            <a:ext cx="800557" cy="219456"/>
+          </a:xfrm>
+          <a:prstGeom prst="rect">
+            <a:avLst/>
+          </a:prstGeom>
+          <a:noFill/>
+        </p:spPr>
+        <p:txBody>
+          <a:bodyPr wrap="square" lIns="0" rIns="0" tIns="0" bIns="0">
             <a:spAutoFit/>
           </a:bodyPr>
           <a:lstStyle/>
@@ -20054,104 +19825,14 @@
                 </a:solidFill>
                 <a:latin typeface="Segoe UI"/>
               </a:rPr>
-              <a:t>0.73</a:t>
-            </a:r>
-          </a:p>
-        </p:txBody>
-      </p:sp>
-      <p:sp>
-        <p:nvSpPr>
-          <p:cNvPr id="64" name="TextBox 63"/>
-          <p:cNvSpPr txBox="1"/>
-          <p:nvPr/>
-        </p:nvSpPr>
-        <p:spPr>
-          <a:xfrm>
-            <a:off x="10136124" y="3451860"/>
-            <a:ext cx="601218" cy="219456"/>
-          </a:xfrm>
-          <a:prstGeom prst="rect">
-            <a:avLst/>
-          </a:prstGeom>
-          <a:noFill/>
-        </p:spPr>
-        <p:txBody>
-          <a:bodyPr wrap="square" lIns="0" tIns="0" rIns="0" bIns="0">
-            <a:spAutoFit/>
-          </a:bodyPr>
-          <a:lstStyle/>
-          <a:p>
-            <a:pPr algn="l">
-              <a:lnSpc>
-                <a:spcPct val="100000"/>
-              </a:lnSpc>
-              <a:spcBef>
-                <a:spcPts val="0"/>
-              </a:spcBef>
-              <a:spcAft>
-                <a:spcPts val="0"/>
-              </a:spcAft>
-            </a:pPr>
-            <a:r>
-              <a:rPr sz="1150" b="0" i="0">
-                <a:solidFill>
-                  <a:srgbClr val="1A1F2B"/>
-                </a:solidFill>
-                <a:latin typeface="Segoe UI"/>
-              </a:rPr>
-              <a:t>0.59</a:t>
-            </a:r>
-          </a:p>
-        </p:txBody>
-      </p:sp>
-      <p:sp>
-        <p:nvSpPr>
-          <p:cNvPr id="65" name="TextBox 64"/>
-          <p:cNvSpPr txBox="1"/>
-          <p:nvPr/>
-        </p:nvSpPr>
-        <p:spPr>
-          <a:xfrm>
-            <a:off x="10883646" y="3451860"/>
-            <a:ext cx="601218" cy="219456"/>
-          </a:xfrm>
-          <a:prstGeom prst="rect">
-            <a:avLst/>
-          </a:prstGeom>
-          <a:noFill/>
-        </p:spPr>
-        <p:txBody>
-          <a:bodyPr wrap="square" lIns="0" tIns="0" rIns="0" bIns="0">
-            <a:spAutoFit/>
-          </a:bodyPr>
-          <a:lstStyle/>
-          <a:p>
-            <a:pPr algn="l">
-              <a:lnSpc>
-                <a:spcPct val="100000"/>
-              </a:lnSpc>
-              <a:spcBef>
-                <a:spcPts val="0"/>
-              </a:spcBef>
-              <a:spcAft>
-                <a:spcPts val="0"/>
-              </a:spcAft>
-            </a:pPr>
-            <a:r>
-              <a:rPr sz="1150" b="0" i="0">
-                <a:solidFill>
-                  <a:srgbClr val="1A1F2B"/>
-                </a:solidFill>
-                <a:latin typeface="Segoe UI"/>
-              </a:rPr>
-              <a:t>11</a:t>
-            </a:r>
-          </a:p>
-        </p:txBody>
-      </p:sp>
-      <p:sp>
-        <p:nvSpPr>
-          <p:cNvPr id="66" name="Rectangle 65"/>
+              <a:t>68</a:t>
+            </a:r>
+          </a:p>
+        </p:txBody>
+      </p:sp>
+      <p:sp>
+        <p:nvSpPr>
+          <p:cNvPr id="64" name="Rectangle 63"/>
           <p:cNvSpPr/>
           <p:nvPr/>
         </p:nvSpPr>
@@ -20186,11 +19867,100 @@
           </a:fontRef>
         </p:style>
         <p:txBody>
-          <a:bodyPr wrap="square" rtlCol="0" anchor="ctr"/>
+          <a:bodyPr rtlCol="0" anchor="ctr" wrap="square"/>
           <a:lstStyle/>
           <a:p>
             <a:pPr algn="ctr"/>
-            <a:endParaRPr/>
+          </a:p>
+        </p:txBody>
+      </p:sp>
+      <p:sp>
+        <p:nvSpPr>
+          <p:cNvPr id="65" name="TextBox 64"/>
+          <p:cNvSpPr txBox="1"/>
+          <p:nvPr/>
+        </p:nvSpPr>
+        <p:spPr>
+          <a:xfrm>
+            <a:off x="6647688" y="3726179"/>
+            <a:ext cx="1996592" cy="219456"/>
+          </a:xfrm>
+          <a:prstGeom prst="rect">
+            <a:avLst/>
+          </a:prstGeom>
+          <a:noFill/>
+        </p:spPr>
+        <p:txBody>
+          <a:bodyPr wrap="square" lIns="0" rIns="0" tIns="0" bIns="0">
+            <a:spAutoFit/>
+          </a:bodyPr>
+          <a:lstStyle/>
+          <a:p>
+            <a:pPr algn="l">
+              <a:lnSpc>
+                <a:spcPct val="100000"/>
+              </a:lnSpc>
+              <a:spcBef>
+                <a:spcPts val="0"/>
+              </a:spcBef>
+              <a:spcAft>
+                <a:spcPts val="0"/>
+              </a:spcAft>
+            </a:pPr>
+            <a:r>
+              <a:rPr sz="1150" b="0" i="0">
+                <a:solidFill>
+                  <a:srgbClr val="1A1F2B"/>
+                </a:solidFill>
+                <a:latin typeface="Segoe UI"/>
+              </a:rPr>
+              <a:t>concurrency</a:t>
+            </a:r>
+          </a:p>
+        </p:txBody>
+      </p:sp>
+      <p:sp>
+        <p:nvSpPr>
+          <p:cNvPr id="66" name="TextBox 65"/>
+          <p:cNvSpPr txBox="1"/>
+          <p:nvPr/>
+        </p:nvSpPr>
+        <p:spPr>
+          <a:xfrm>
+            <a:off x="8790584" y="3726179"/>
+            <a:ext cx="800557" cy="219456"/>
+          </a:xfrm>
+          <a:prstGeom prst="rect">
+            <a:avLst/>
+          </a:prstGeom>
+          <a:noFill/>
+        </p:spPr>
+        <p:txBody>
+          <a:bodyPr wrap="square" lIns="0" rIns="0" tIns="0" bIns="0">
+            <a:spAutoFit/>
+          </a:bodyPr>
+          <a:lstStyle/>
+          <a:p>
+            <a:pPr algn="l">
+              <a:lnSpc>
+                <a:spcPct val="100000"/>
+              </a:lnSpc>
+              <a:spcBef>
+                <a:spcPts val="0"/>
+              </a:spcBef>
+              <a:spcAft>
+                <a:spcPts val="0"/>
+              </a:spcAft>
+            </a:pPr>
+            <a:r>
+              <a:rPr sz="1150" b="0" i="0">
+                <a:solidFill>
+                  <a:srgbClr val="1A1F2B"/>
+                </a:solidFill>
+                <a:latin typeface="Segoe UI"/>
+              </a:rPr>
+              <a:t>7</a:t>
+            </a:r>
           </a:p>
         </p:txBody>
       </p:sp>
@@ -20202,16 +19972,16 @@
         </p:nvSpPr>
         <p:spPr>
           <a:xfrm>
-            <a:off x="6647688" y="3726179"/>
-            <a:ext cx="1847088" cy="219456"/>
-          </a:xfrm>
-          <a:prstGeom prst="rect">
-            <a:avLst/>
-          </a:prstGeom>
-          <a:noFill/>
-        </p:spPr>
-        <p:txBody>
-          <a:bodyPr wrap="square" lIns="0" tIns="0" rIns="0" bIns="0">
+            <a:off x="9737445" y="3726179"/>
+            <a:ext cx="800557" cy="219456"/>
+          </a:xfrm>
+          <a:prstGeom prst="rect">
+            <a:avLst/>
+          </a:prstGeom>
+          <a:noFill/>
+        </p:spPr>
+        <p:txBody>
+          <a:bodyPr wrap="square" lIns="0" rIns="0" tIns="0" bIns="0">
             <a:spAutoFit/>
           </a:bodyPr>
           <a:lstStyle/>
@@ -20234,7 +20004,7 @@
                 </a:solidFill>
                 <a:latin typeface="Segoe UI"/>
               </a:rPr>
-              <a:t>1 concurrency</a:t>
+              <a:t>9</a:t>
             </a:r>
           </a:p>
         </p:txBody>
@@ -20247,16 +20017,16 @@
         </p:nvSpPr>
         <p:spPr>
           <a:xfrm>
-            <a:off x="8641080" y="3726179"/>
-            <a:ext cx="601218" cy="219456"/>
-          </a:xfrm>
-          <a:prstGeom prst="rect">
-            <a:avLst/>
-          </a:prstGeom>
-          <a:noFill/>
-        </p:spPr>
-        <p:txBody>
-          <a:bodyPr wrap="square" lIns="0" tIns="0" rIns="0" bIns="0">
+            <a:off x="10684306" y="3726179"/>
+            <a:ext cx="800557" cy="219456"/>
+          </a:xfrm>
+          <a:prstGeom prst="rect">
+            <a:avLst/>
+          </a:prstGeom>
+          <a:noFill/>
+        </p:spPr>
+        <p:txBody>
+          <a:bodyPr wrap="square" lIns="0" rIns="0" tIns="0" bIns="0">
             <a:spAutoFit/>
           </a:bodyPr>
           <a:lstStyle/>
@@ -20279,7 +20049,7 @@
                 </a:solidFill>
                 <a:latin typeface="Segoe UI"/>
               </a:rPr>
-              <a:t>0.23</a:t>
+              <a:t>6</a:t>
             </a:r>
           </a:p>
         </p:txBody>
@@ -20292,16 +20062,16 @@
         </p:nvSpPr>
         <p:spPr>
           <a:xfrm>
-            <a:off x="9388602" y="3726179"/>
-            <a:ext cx="601218" cy="219456"/>
-          </a:xfrm>
-          <a:prstGeom prst="rect">
-            <a:avLst/>
-          </a:prstGeom>
-          <a:noFill/>
-        </p:spPr>
-        <p:txBody>
-          <a:bodyPr wrap="square" lIns="0" tIns="0" rIns="0" bIns="0">
+            <a:off x="6647688" y="4000499"/>
+            <a:ext cx="1996592" cy="219456"/>
+          </a:xfrm>
+          <a:prstGeom prst="rect">
+            <a:avLst/>
+          </a:prstGeom>
+          <a:noFill/>
+        </p:spPr>
+        <p:txBody>
+          <a:bodyPr wrap="square" lIns="0" rIns="0" tIns="0" bIns="0">
             <a:spAutoFit/>
           </a:bodyPr>
           <a:lstStyle/>
@@ -20324,7 +20094,7 @@
                 </a:solidFill>
                 <a:latin typeface="Segoe UI"/>
               </a:rPr>
-              <a:t>0.50</a:t>
+              <a:t>time</a:t>
             </a:r>
           </a:p>
         </p:txBody>
@@ -20337,16 +20107,16 @@
         </p:nvSpPr>
         <p:spPr>
           <a:xfrm>
-            <a:off x="10136124" y="3726179"/>
-            <a:ext cx="601218" cy="219456"/>
-          </a:xfrm>
-          <a:prstGeom prst="rect">
-            <a:avLst/>
-          </a:prstGeom>
-          <a:noFill/>
-        </p:spPr>
-        <p:txBody>
-          <a:bodyPr wrap="square" lIns="0" tIns="0" rIns="0" bIns="0">
+            <a:off x="8790584" y="4000499"/>
+            <a:ext cx="800557" cy="219456"/>
+          </a:xfrm>
+          <a:prstGeom prst="rect">
+            <a:avLst/>
+          </a:prstGeom>
+          <a:noFill/>
+        </p:spPr>
+        <p:txBody>
+          <a:bodyPr wrap="square" lIns="0" rIns="0" tIns="0" bIns="0">
             <a:spAutoFit/>
           </a:bodyPr>
           <a:lstStyle/>
@@ -20369,7 +20139,7 @@
                 </a:solidFill>
                 <a:latin typeface="Segoe UI"/>
               </a:rPr>
-              <a:t>0.32</a:t>
+              <a:t>3</a:t>
             </a:r>
           </a:p>
         </p:txBody>
@@ -20382,16 +20152,16 @@
         </p:nvSpPr>
         <p:spPr>
           <a:xfrm>
-            <a:off x="10883646" y="3726179"/>
-            <a:ext cx="601218" cy="219456"/>
-          </a:xfrm>
-          <a:prstGeom prst="rect">
-            <a:avLst/>
-          </a:prstGeom>
-          <a:noFill/>
-        </p:spPr>
-        <p:txBody>
-          <a:bodyPr wrap="square" lIns="0" tIns="0" rIns="0" bIns="0">
+            <a:off x="9737445" y="4000499"/>
+            <a:ext cx="800557" cy="219456"/>
+          </a:xfrm>
+          <a:prstGeom prst="rect">
+            <a:avLst/>
+          </a:prstGeom>
+          <a:noFill/>
+        </p:spPr>
+        <p:txBody>
+          <a:bodyPr wrap="square" lIns="0" rIns="0" tIns="0" bIns="0">
             <a:spAutoFit/>
           </a:bodyPr>
           <a:lstStyle/>
@@ -20414,7 +20184,7 @@
                 </a:solidFill>
                 <a:latin typeface="Segoe UI"/>
               </a:rPr>
-              <a:t>6</a:t>
+              <a:t>53</a:t>
             </a:r>
           </a:p>
         </p:txBody>
@@ -20427,16 +20197,16 @@
         </p:nvSpPr>
         <p:spPr>
           <a:xfrm>
-            <a:off x="6647688" y="4000499"/>
-            <a:ext cx="1847088" cy="219456"/>
-          </a:xfrm>
-          <a:prstGeom prst="rect">
-            <a:avLst/>
-          </a:prstGeom>
-          <a:noFill/>
-        </p:spPr>
-        <p:txBody>
-          <a:bodyPr wrap="square" lIns="0" tIns="0" rIns="0" bIns="0">
+            <a:off x="10684306" y="4000499"/>
+            <a:ext cx="800557" cy="219456"/>
+          </a:xfrm>
+          <a:prstGeom prst="rect">
+            <a:avLst/>
+          </a:prstGeom>
+          <a:noFill/>
+        </p:spPr>
+        <p:txBody>
+          <a:bodyPr wrap="square" lIns="0" rIns="0" tIns="0" bIns="0">
             <a:spAutoFit/>
           </a:bodyPr>
           <a:lstStyle/>
@@ -20459,186 +20229,6 @@
                 </a:solidFill>
                 <a:latin typeface="Segoe UI"/>
               </a:rPr>
-              <a:t>2 time</a:t>
-            </a:r>
-          </a:p>
-        </p:txBody>
-      </p:sp>
-      <p:sp>
-        <p:nvSpPr>
-          <p:cNvPr id="73" name="TextBox 72"/>
-          <p:cNvSpPr txBox="1"/>
-          <p:nvPr/>
-        </p:nvSpPr>
-        <p:spPr>
-          <a:xfrm>
-            <a:off x="8641080" y="4000499"/>
-            <a:ext cx="601218" cy="219456"/>
-          </a:xfrm>
-          <a:prstGeom prst="rect">
-            <a:avLst/>
-          </a:prstGeom>
-          <a:noFill/>
-        </p:spPr>
-        <p:txBody>
-          <a:bodyPr wrap="square" lIns="0" tIns="0" rIns="0" bIns="0">
-            <a:spAutoFit/>
-          </a:bodyPr>
-          <a:lstStyle/>
-          <a:p>
-            <a:pPr algn="l">
-              <a:lnSpc>
-                <a:spcPct val="100000"/>
-              </a:lnSpc>
-              <a:spcBef>
-                <a:spcPts val="0"/>
-              </a:spcBef>
-              <a:spcAft>
-                <a:spcPts val="0"/>
-              </a:spcAft>
-            </a:pPr>
-            <a:r>
-              <a:rPr sz="1150" b="0" i="0">
-                <a:solidFill>
-                  <a:srgbClr val="1A1F2B"/>
-                </a:solidFill>
-                <a:latin typeface="Segoe UI"/>
-              </a:rPr>
-              <a:t>0.53</a:t>
-            </a:r>
-          </a:p>
-        </p:txBody>
-      </p:sp>
-      <p:sp>
-        <p:nvSpPr>
-          <p:cNvPr id="74" name="TextBox 73"/>
-          <p:cNvSpPr txBox="1"/>
-          <p:nvPr/>
-        </p:nvSpPr>
-        <p:spPr>
-          <a:xfrm>
-            <a:off x="9388602" y="4000499"/>
-            <a:ext cx="601218" cy="219456"/>
-          </a:xfrm>
-          <a:prstGeom prst="rect">
-            <a:avLst/>
-          </a:prstGeom>
-          <a:noFill/>
-        </p:spPr>
-        <p:txBody>
-          <a:bodyPr wrap="square" lIns="0" tIns="0" rIns="0" bIns="0">
-            <a:spAutoFit/>
-          </a:bodyPr>
-          <a:lstStyle/>
-          <a:p>
-            <a:pPr algn="l">
-              <a:lnSpc>
-                <a:spcPct val="100000"/>
-              </a:lnSpc>
-              <a:spcBef>
-                <a:spcPts val="0"/>
-              </a:spcBef>
-              <a:spcAft>
-                <a:spcPts val="0"/>
-              </a:spcAft>
-            </a:pPr>
-            <a:r>
-              <a:rPr sz="1150" b="0" i="0">
-                <a:solidFill>
-                  <a:srgbClr val="1A1F2B"/>
-                </a:solidFill>
-                <a:latin typeface="Segoe UI"/>
-              </a:rPr>
-              <a:t>1.00</a:t>
-            </a:r>
-          </a:p>
-        </p:txBody>
-      </p:sp>
-      <p:sp>
-        <p:nvSpPr>
-          <p:cNvPr id="75" name="TextBox 74"/>
-          <p:cNvSpPr txBox="1"/>
-          <p:nvPr/>
-        </p:nvSpPr>
-        <p:spPr>
-          <a:xfrm>
-            <a:off x="10136124" y="4000499"/>
-            <a:ext cx="601218" cy="219456"/>
-          </a:xfrm>
-          <a:prstGeom prst="rect">
-            <a:avLst/>
-          </a:prstGeom>
-          <a:noFill/>
-        </p:spPr>
-        <p:txBody>
-          <a:bodyPr wrap="square" lIns="0" tIns="0" rIns="0" bIns="0">
-            <a:spAutoFit/>
-          </a:bodyPr>
-          <a:lstStyle/>
-          <a:p>
-            <a:pPr algn="l">
-              <a:lnSpc>
-                <a:spcPct val="100000"/>
-              </a:lnSpc>
-              <a:spcBef>
-                <a:spcPts val="0"/>
-              </a:spcBef>
-              <a:spcAft>
-                <a:spcPts val="0"/>
-              </a:spcAft>
-            </a:pPr>
-            <a:r>
-              <a:rPr sz="1150" b="0" i="0">
-                <a:solidFill>
-                  <a:srgbClr val="1A1F2B"/>
-                </a:solidFill>
-                <a:latin typeface="Segoe UI"/>
-              </a:rPr>
-              <a:t>0.70</a:t>
-            </a:r>
-          </a:p>
-        </p:txBody>
-      </p:sp>
-      <p:sp>
-        <p:nvSpPr>
-          <p:cNvPr id="76" name="TextBox 75"/>
-          <p:cNvSpPr txBox="1"/>
-          <p:nvPr/>
-        </p:nvSpPr>
-        <p:spPr>
-          <a:xfrm>
-            <a:off x="10883646" y="4000499"/>
-            <a:ext cx="601218" cy="219456"/>
-          </a:xfrm>
-          <a:prstGeom prst="rect">
-            <a:avLst/>
-          </a:prstGeom>
-          <a:noFill/>
-        </p:spPr>
-        <p:txBody>
-          <a:bodyPr wrap="square" lIns="0" tIns="0" rIns="0" bIns="0">
-            <a:spAutoFit/>
-          </a:bodyPr>
-          <a:lstStyle/>
-          <a:p>
-            <a:pPr algn="l">
-              <a:lnSpc>
-                <a:spcPct val="100000"/>
-              </a:lnSpc>
-              <a:spcBef>
-                <a:spcPts val="0"/>
-              </a:spcBef>
-              <a:spcAft>
-                <a:spcPts val="0"/>
-              </a:spcAft>
-            </a:pPr>
-            <a:r>
-              <a:rPr sz="1150" b="0" i="0">
-                <a:solidFill>
-                  <a:srgbClr val="1A1F2B"/>
-                </a:solidFill>
-                <a:latin typeface="Segoe UI"/>
-              </a:rPr>
               <a:t>8</a:t>
             </a:r>
           </a:p>
@@ -20646,7 +20236,7 @@
       </p:sp>
       <p:sp>
         <p:nvSpPr>
-          <p:cNvPr id="77" name="Rectangle 76"/>
+          <p:cNvPr id="73" name="Rectangle 72"/>
           <p:cNvSpPr/>
           <p:nvPr/>
         </p:nvSpPr>
@@ -20681,11 +20271,190 @@
           </a:fontRef>
         </p:style>
         <p:txBody>
-          <a:bodyPr wrap="square" rtlCol="0" anchor="ctr"/>
+          <a:bodyPr rtlCol="0" anchor="ctr" wrap="square"/>
           <a:lstStyle/>
           <a:p>
             <a:pPr algn="ctr"/>
-            <a:endParaRPr/>
+          </a:p>
+        </p:txBody>
+      </p:sp>
+      <p:sp>
+        <p:nvSpPr>
+          <p:cNvPr id="74" name="TextBox 73"/>
+          <p:cNvSpPr txBox="1"/>
+          <p:nvPr/>
+        </p:nvSpPr>
+        <p:spPr>
+          <a:xfrm>
+            <a:off x="6647688" y="4274819"/>
+            <a:ext cx="1996592" cy="219456"/>
+          </a:xfrm>
+          <a:prstGeom prst="rect">
+            <a:avLst/>
+          </a:prstGeom>
+          <a:noFill/>
+        </p:spPr>
+        <p:txBody>
+          <a:bodyPr wrap="square" lIns="0" rIns="0" tIns="0" bIns="0">
+            <a:spAutoFit/>
+          </a:bodyPr>
+          <a:lstStyle/>
+          <a:p>
+            <a:pPr algn="l">
+              <a:lnSpc>
+                <a:spcPct val="100000"/>
+              </a:lnSpc>
+              <a:spcBef>
+                <a:spcPts val="0"/>
+              </a:spcBef>
+              <a:spcAft>
+                <a:spcPts val="0"/>
+              </a:spcAft>
+            </a:pPr>
+            <a:r>
+              <a:rPr sz="1150" b="0" i="0">
+                <a:solidFill>
+                  <a:srgbClr val="1A1F2B"/>
+                </a:solidFill>
+                <a:latin typeface="Segoe UI"/>
+              </a:rPr>
+              <a:t>unordered collections</a:t>
+            </a:r>
+          </a:p>
+        </p:txBody>
+      </p:sp>
+      <p:sp>
+        <p:nvSpPr>
+          <p:cNvPr id="75" name="TextBox 74"/>
+          <p:cNvSpPr txBox="1"/>
+          <p:nvPr/>
+        </p:nvSpPr>
+        <p:spPr>
+          <a:xfrm>
+            <a:off x="8790584" y="4274819"/>
+            <a:ext cx="800557" cy="219456"/>
+          </a:xfrm>
+          <a:prstGeom prst="rect">
+            <a:avLst/>
+          </a:prstGeom>
+          <a:noFill/>
+        </p:spPr>
+        <p:txBody>
+          <a:bodyPr wrap="square" lIns="0" rIns="0" tIns="0" bIns="0">
+            <a:spAutoFit/>
+          </a:bodyPr>
+          <a:lstStyle/>
+          <a:p>
+            <a:pPr algn="l">
+              <a:lnSpc>
+                <a:spcPct val="100000"/>
+              </a:lnSpc>
+              <a:spcBef>
+                <a:spcPts val="0"/>
+              </a:spcBef>
+              <a:spcAft>
+                <a:spcPts val="0"/>
+              </a:spcAft>
+            </a:pPr>
+            <a:r>
+              <a:rPr sz="1150" b="0" i="0">
+                <a:solidFill>
+                  <a:srgbClr val="1A1F2B"/>
+                </a:solidFill>
+                <a:latin typeface="Segoe UI"/>
+              </a:rPr>
+              <a:t>4</a:t>
+            </a:r>
+          </a:p>
+        </p:txBody>
+      </p:sp>
+      <p:sp>
+        <p:nvSpPr>
+          <p:cNvPr id="76" name="TextBox 75"/>
+          <p:cNvSpPr txBox="1"/>
+          <p:nvPr/>
+        </p:nvSpPr>
+        <p:spPr>
+          <a:xfrm>
+            <a:off x="9737445" y="4274819"/>
+            <a:ext cx="800557" cy="219456"/>
+          </a:xfrm>
+          <a:prstGeom prst="rect">
+            <a:avLst/>
+          </a:prstGeom>
+          <a:noFill/>
+        </p:spPr>
+        <p:txBody>
+          <a:bodyPr wrap="square" lIns="0" rIns="0" tIns="0" bIns="0">
+            <a:spAutoFit/>
+          </a:bodyPr>
+          <a:lstStyle/>
+          <a:p>
+            <a:pPr algn="l">
+              <a:lnSpc>
+                <a:spcPct val="100000"/>
+              </a:lnSpc>
+              <a:spcBef>
+                <a:spcPts val="0"/>
+              </a:spcBef>
+              <a:spcAft>
+                <a:spcPts val="0"/>
+              </a:spcAft>
+            </a:pPr>
+            <a:r>
+              <a:rPr sz="1150" b="0" i="0">
+                <a:solidFill>
+                  <a:srgbClr val="1A1F2B"/>
+                </a:solidFill>
+                <a:latin typeface="Segoe UI"/>
+              </a:rPr>
+              <a:t>90</a:t>
+            </a:r>
+          </a:p>
+        </p:txBody>
+      </p:sp>
+      <p:sp>
+        <p:nvSpPr>
+          <p:cNvPr id="77" name="TextBox 76"/>
+          <p:cNvSpPr txBox="1"/>
+          <p:nvPr/>
+        </p:nvSpPr>
+        <p:spPr>
+          <a:xfrm>
+            <a:off x="10684306" y="4274819"/>
+            <a:ext cx="800557" cy="219456"/>
+          </a:xfrm>
+          <a:prstGeom prst="rect">
+            <a:avLst/>
+          </a:prstGeom>
+          <a:noFill/>
+        </p:spPr>
+        <p:txBody>
+          <a:bodyPr wrap="square" lIns="0" rIns="0" tIns="0" bIns="0">
+            <a:spAutoFit/>
+          </a:bodyPr>
+          <a:lstStyle/>
+          <a:p>
+            <a:pPr algn="l">
+              <a:lnSpc>
+                <a:spcPct val="100000"/>
+              </a:lnSpc>
+              <a:spcBef>
+                <a:spcPts val="0"/>
+              </a:spcBef>
+              <a:spcAft>
+                <a:spcPts val="0"/>
+              </a:spcAft>
+            </a:pPr>
+            <a:r>
+              <a:rPr sz="1150" b="0" i="0">
+                <a:solidFill>
+                  <a:srgbClr val="1A1F2B"/>
+                </a:solidFill>
+                <a:latin typeface="Segoe UI"/>
+              </a:rPr>
+              <a:t>1</a:t>
+            </a:r>
           </a:p>
         </p:txBody>
       </p:sp>
@@ -20697,16 +20466,16 @@
         </p:nvSpPr>
         <p:spPr>
           <a:xfrm>
-            <a:off x="6647688" y="4274819"/>
-            <a:ext cx="1847088" cy="219456"/>
-          </a:xfrm>
-          <a:prstGeom prst="rect">
-            <a:avLst/>
-          </a:prstGeom>
-          <a:noFill/>
-        </p:spPr>
-        <p:txBody>
-          <a:bodyPr wrap="square" lIns="0" tIns="0" rIns="0" bIns="0">
+            <a:off x="6647688" y="4549139"/>
+            <a:ext cx="1996592" cy="219456"/>
+          </a:xfrm>
+          <a:prstGeom prst="rect">
+            <a:avLst/>
+          </a:prstGeom>
+          <a:noFill/>
+        </p:spPr>
+        <p:txBody>
+          <a:bodyPr wrap="square" lIns="0" rIns="0" tIns="0" bIns="0">
             <a:spAutoFit/>
           </a:bodyPr>
           <a:lstStyle/>
@@ -20723,13 +20492,13 @@
               </a:spcAft>
             </a:pPr>
             <a:r>
-              <a:rPr sz="1150" b="0" i="0">
-                <a:solidFill>
-                  <a:srgbClr val="1A1F2B"/>
-                </a:solidFill>
-                <a:latin typeface="Segoe UI"/>
-              </a:rPr>
-              <a:t>3 unordered coll.</a:t>
+              <a:rPr sz="1150" b="1" i="0">
+                <a:solidFill>
+                  <a:srgbClr val="1A1F2B"/>
+                </a:solidFill>
+                <a:latin typeface="Segoe UI"/>
+              </a:rPr>
+              <a:t>order dependency</a:t>
             </a:r>
           </a:p>
         </p:txBody>
@@ -20742,16 +20511,16 @@
         </p:nvSpPr>
         <p:spPr>
           <a:xfrm>
-            <a:off x="8641080" y="4274819"/>
-            <a:ext cx="601218" cy="219456"/>
-          </a:xfrm>
-          <a:prstGeom prst="rect">
-            <a:avLst/>
-          </a:prstGeom>
-          <a:noFill/>
-        </p:spPr>
-        <p:txBody>
-          <a:bodyPr wrap="square" lIns="0" tIns="0" rIns="0" bIns="0">
+            <a:off x="8790584" y="4549139"/>
+            <a:ext cx="800557" cy="219456"/>
+          </a:xfrm>
+          <a:prstGeom prst="rect">
+            <a:avLst/>
+          </a:prstGeom>
+          <a:noFill/>
+        </p:spPr>
+        <p:txBody>
+          <a:bodyPr wrap="square" lIns="0" rIns="0" tIns="0" bIns="0">
             <a:spAutoFit/>
           </a:bodyPr>
           <a:lstStyle/>
@@ -20768,13 +20537,13 @@
               </a:spcAft>
             </a:pPr>
             <a:r>
-              <a:rPr sz="1150" b="0" i="0">
-                <a:solidFill>
-                  <a:srgbClr val="1A1F2B"/>
-                </a:solidFill>
-                <a:latin typeface="Segoe UI"/>
-              </a:rPr>
-              <a:t>0.64</a:t>
+              <a:rPr sz="1150" b="1" i="0">
+                <a:solidFill>
+                  <a:srgbClr val="1A1F2B"/>
+                </a:solidFill>
+                <a:latin typeface="Segoe UI"/>
+              </a:rPr>
+              <a:t>12</a:t>
             </a:r>
           </a:p>
         </p:txBody>
@@ -20787,16 +20556,16 @@
         </p:nvSpPr>
         <p:spPr>
           <a:xfrm>
-            <a:off x="9388602" y="4274819"/>
-            <a:ext cx="601218" cy="219456"/>
-          </a:xfrm>
-          <a:prstGeom prst="rect">
-            <a:avLst/>
-          </a:prstGeom>
-          <a:noFill/>
-        </p:spPr>
-        <p:txBody>
-          <a:bodyPr wrap="square" lIns="0" tIns="0" rIns="0" bIns="0">
+            <a:off x="9737445" y="4549139"/>
+            <a:ext cx="800557" cy="219456"/>
+          </a:xfrm>
+          <a:prstGeom prst="rect">
+            <a:avLst/>
+          </a:prstGeom>
+          <a:noFill/>
+        </p:spPr>
+        <p:txBody>
+          <a:bodyPr wrap="square" lIns="0" rIns="0" tIns="0" bIns="0">
             <a:spAutoFit/>
           </a:bodyPr>
           <a:lstStyle/>
@@ -20813,13 +20582,13 @@
               </a:spcAft>
             </a:pPr>
             <a:r>
-              <a:rPr sz="1150" b="0" i="0">
-                <a:solidFill>
-                  <a:srgbClr val="1A1F2B"/>
-                </a:solidFill>
-                <a:latin typeface="Segoe UI"/>
-              </a:rPr>
-              <a:t>0.78</a:t>
+              <a:rPr sz="1150" b="1" i="0">
+                <a:solidFill>
+                  <a:srgbClr val="1A1F2B"/>
+                </a:solidFill>
+                <a:latin typeface="Segoe UI"/>
+              </a:rPr>
+              <a:t>563</a:t>
             </a:r>
           </a:p>
         </p:txBody>
@@ -20832,16 +20601,16 @@
         </p:nvSpPr>
         <p:spPr>
           <a:xfrm>
-            <a:off x="10136124" y="4274819"/>
-            <a:ext cx="601218" cy="219456"/>
-          </a:xfrm>
-          <a:prstGeom prst="rect">
-            <a:avLst/>
-          </a:prstGeom>
-          <a:noFill/>
-        </p:spPr>
-        <p:txBody>
-          <a:bodyPr wrap="square" lIns="0" tIns="0" rIns="0" bIns="0">
+            <a:off x="10684306" y="4549139"/>
+            <a:ext cx="800557" cy="219456"/>
+          </a:xfrm>
+          <a:prstGeom prst="rect">
+            <a:avLst/>
+          </a:prstGeom>
+          <a:noFill/>
+        </p:spPr>
+        <p:txBody>
+          <a:bodyPr wrap="square" lIns="0" rIns="0" tIns="0" bIns="0">
             <a:spAutoFit/>
           </a:bodyPr>
           <a:lstStyle/>
@@ -20858,290 +20627,20 @@
               </a:spcAft>
             </a:pPr>
             <a:r>
-              <a:rPr sz="1150" b="0" i="0">
-                <a:solidFill>
-                  <a:srgbClr val="1A1F2B"/>
-                </a:solidFill>
-                <a:latin typeface="Segoe UI"/>
-              </a:rPr>
-              <a:t>0.70</a:t>
-            </a:r>
-          </a:p>
-        </p:txBody>
-      </p:sp>
-      <p:sp>
-        <p:nvSpPr>
-          <p:cNvPr id="82" name="TextBox 81"/>
-          <p:cNvSpPr txBox="1"/>
-          <p:nvPr/>
-        </p:nvSpPr>
-        <p:spPr>
-          <a:xfrm>
-            <a:off x="10883646" y="4274819"/>
-            <a:ext cx="601218" cy="219456"/>
-          </a:xfrm>
-          <a:prstGeom prst="rect">
-            <a:avLst/>
-          </a:prstGeom>
-          <a:noFill/>
-        </p:spPr>
-        <p:txBody>
-          <a:bodyPr wrap="square" lIns="0" tIns="0" rIns="0" bIns="0">
-            <a:spAutoFit/>
-          </a:bodyPr>
-          <a:lstStyle/>
-          <a:p>
-            <a:pPr algn="l">
-              <a:lnSpc>
-                <a:spcPct val="100000"/>
-              </a:lnSpc>
-              <a:spcBef>
-                <a:spcPts val="0"/>
-              </a:spcBef>
-              <a:spcAft>
-                <a:spcPts val="0"/>
-              </a:spcAft>
-            </a:pPr>
-            <a:r>
-              <a:rPr sz="1150" b="0" i="0">
-                <a:solidFill>
-                  <a:srgbClr val="1A1F2B"/>
-                </a:solidFill>
-                <a:latin typeface="Segoe UI"/>
-              </a:rPr>
-              <a:t>9</a:t>
-            </a:r>
-          </a:p>
-        </p:txBody>
-      </p:sp>
-      <p:sp>
-        <p:nvSpPr>
-          <p:cNvPr id="83" name="TextBox 82"/>
-          <p:cNvSpPr txBox="1"/>
-          <p:nvPr/>
-        </p:nvSpPr>
-        <p:spPr>
-          <a:xfrm>
-            <a:off x="6647688" y="4549139"/>
-            <a:ext cx="1847088" cy="219456"/>
-          </a:xfrm>
-          <a:prstGeom prst="rect">
-            <a:avLst/>
-          </a:prstGeom>
-          <a:noFill/>
-        </p:spPr>
-        <p:txBody>
-          <a:bodyPr wrap="square" lIns="0" tIns="0" rIns="0" bIns="0">
-            <a:spAutoFit/>
-          </a:bodyPr>
-          <a:lstStyle/>
-          <a:p>
-            <a:pPr algn="l">
-              <a:lnSpc>
-                <a:spcPct val="100000"/>
-              </a:lnSpc>
-              <a:spcBef>
-                <a:spcPts val="0"/>
-              </a:spcBef>
-              <a:spcAft>
-                <a:spcPts val="0"/>
-              </a:spcAft>
-            </a:pPr>
-            <a:r>
-              <a:rPr sz="1150" b="0" i="0">
-                <a:solidFill>
-                  <a:srgbClr val="1A1F2B"/>
-                </a:solidFill>
-                <a:latin typeface="Segoe UI"/>
-              </a:rPr>
-              <a:t>4 order dependency</a:t>
-            </a:r>
-          </a:p>
-        </p:txBody>
-      </p:sp>
-      <p:sp>
-        <p:nvSpPr>
-          <p:cNvPr id="84" name="TextBox 83"/>
-          <p:cNvSpPr txBox="1"/>
-          <p:nvPr/>
-        </p:nvSpPr>
-        <p:spPr>
-          <a:xfrm>
-            <a:off x="8641080" y="4549139"/>
-            <a:ext cx="601218" cy="219456"/>
-          </a:xfrm>
-          <a:prstGeom prst="rect">
-            <a:avLst/>
-          </a:prstGeom>
-          <a:noFill/>
-        </p:spPr>
-        <p:txBody>
-          <a:bodyPr wrap="square" lIns="0" tIns="0" rIns="0" bIns="0">
-            <a:spAutoFit/>
-          </a:bodyPr>
-          <a:lstStyle/>
-          <a:p>
-            <a:pPr algn="l">
-              <a:lnSpc>
-                <a:spcPct val="100000"/>
-              </a:lnSpc>
-              <a:spcBef>
-                <a:spcPts val="0"/>
-              </a:spcBef>
-              <a:spcAft>
-                <a:spcPts val="0"/>
-              </a:spcAft>
-            </a:pPr>
-            <a:r>
-              <a:rPr sz="1150" b="0" i="0">
-                <a:solidFill>
-                  <a:srgbClr val="1A1F2B"/>
-                </a:solidFill>
-                <a:latin typeface="Segoe UI"/>
-              </a:rPr>
-              <a:t>1.00</a:t>
-            </a:r>
-          </a:p>
-        </p:txBody>
-      </p:sp>
-      <p:sp>
-        <p:nvSpPr>
-          <p:cNvPr id="85" name="TextBox 84"/>
-          <p:cNvSpPr txBox="1"/>
-          <p:nvPr/>
-        </p:nvSpPr>
-        <p:spPr>
-          <a:xfrm>
-            <a:off x="9388602" y="4549139"/>
-            <a:ext cx="601218" cy="219456"/>
-          </a:xfrm>
-          <a:prstGeom prst="rect">
-            <a:avLst/>
-          </a:prstGeom>
-          <a:noFill/>
-        </p:spPr>
-        <p:txBody>
-          <a:bodyPr wrap="square" lIns="0" tIns="0" rIns="0" bIns="0">
-            <a:spAutoFit/>
-          </a:bodyPr>
-          <a:lstStyle/>
-          <a:p>
-            <a:pPr algn="l">
-              <a:lnSpc>
-                <a:spcPct val="100000"/>
-              </a:lnSpc>
-              <a:spcBef>
-                <a:spcPts val="0"/>
-              </a:spcBef>
-              <a:spcAft>
-                <a:spcPts val="0"/>
-              </a:spcAft>
-            </a:pPr>
-            <a:r>
-              <a:rPr sz="1150" b="0" i="0">
-                <a:solidFill>
-                  <a:srgbClr val="1A1F2B"/>
-                </a:solidFill>
-                <a:latin typeface="Segoe UI"/>
-              </a:rPr>
-              <a:t>0.32</a:t>
-            </a:r>
-          </a:p>
-        </p:txBody>
-      </p:sp>
-      <p:sp>
-        <p:nvSpPr>
-          <p:cNvPr id="86" name="TextBox 85"/>
-          <p:cNvSpPr txBox="1"/>
-          <p:nvPr/>
-        </p:nvSpPr>
-        <p:spPr>
-          <a:xfrm>
-            <a:off x="10136124" y="4549139"/>
-            <a:ext cx="601218" cy="219456"/>
-          </a:xfrm>
-          <a:prstGeom prst="rect">
-            <a:avLst/>
-          </a:prstGeom>
-          <a:noFill/>
-        </p:spPr>
-        <p:txBody>
-          <a:bodyPr wrap="square" lIns="0" tIns="0" rIns="0" bIns="0">
-            <a:spAutoFit/>
-          </a:bodyPr>
-          <a:lstStyle/>
-          <a:p>
-            <a:pPr algn="l">
-              <a:lnSpc>
-                <a:spcPct val="100000"/>
-              </a:lnSpc>
-              <a:spcBef>
-                <a:spcPts val="0"/>
-              </a:spcBef>
-              <a:spcAft>
-                <a:spcPts val="0"/>
-              </a:spcAft>
-            </a:pPr>
-            <a:r>
-              <a:rPr sz="1150" b="0" i="0">
-                <a:solidFill>
-                  <a:srgbClr val="1A1F2B"/>
-                </a:solidFill>
-                <a:latin typeface="Segoe UI"/>
-              </a:rPr>
-              <a:t>0.49</a:t>
-            </a:r>
-          </a:p>
-        </p:txBody>
-      </p:sp>
-      <p:sp>
-        <p:nvSpPr>
-          <p:cNvPr id="87" name="TextBox 86"/>
-          <p:cNvSpPr txBox="1"/>
-          <p:nvPr/>
-        </p:nvSpPr>
-        <p:spPr>
-          <a:xfrm>
-            <a:off x="10883646" y="4549139"/>
-            <a:ext cx="601218" cy="219456"/>
-          </a:xfrm>
-          <a:prstGeom prst="rect">
-            <a:avLst/>
-          </a:prstGeom>
-          <a:noFill/>
-        </p:spPr>
-        <p:txBody>
-          <a:bodyPr wrap="square" lIns="0" tIns="0" rIns="0" bIns="0">
-            <a:spAutoFit/>
-          </a:bodyPr>
-          <a:lstStyle/>
-          <a:p>
-            <a:pPr algn="l">
-              <a:lnSpc>
-                <a:spcPct val="100000"/>
-              </a:lnSpc>
-              <a:spcBef>
-                <a:spcPts val="0"/>
-              </a:spcBef>
-              <a:spcAft>
-                <a:spcPts val="0"/>
-              </a:spcAft>
-            </a:pPr>
-            <a:r>
-              <a:rPr sz="1150" b="0" i="0">
-                <a:solidFill>
-                  <a:srgbClr val="1A1F2B"/>
-                </a:solidFill>
-                <a:latin typeface="Segoe UI"/>
-              </a:rPr>
-              <a:t>31</a:t>
-            </a:r>
-          </a:p>
-        </p:txBody>
-      </p:sp>
-      <p:sp>
-        <p:nvSpPr>
-          <p:cNvPr id="88" name="Rectangle 87"/>
+              <a:rPr sz="1150" b="1" i="0">
+                <a:solidFill>
+                  <a:srgbClr val="1A1F2B"/>
+                </a:solidFill>
+                <a:latin typeface="Segoe UI"/>
+              </a:rPr>
+              <a:t>2</a:t>
+            </a:r>
+          </a:p>
+        </p:txBody>
+      </p:sp>
+      <p:sp>
+        <p:nvSpPr>
+          <p:cNvPr id="82" name="Rectangle 81"/>
           <p:cNvSpPr/>
           <p:nvPr/>
         </p:nvSpPr>
@@ -21176,32 +20675,31 @@
           </a:fontRef>
         </p:style>
         <p:txBody>
-          <a:bodyPr wrap="square" rtlCol="0" anchor="ctr"/>
+          <a:bodyPr rtlCol="0" anchor="ctr" wrap="square"/>
           <a:lstStyle/>
           <a:p>
             <a:pPr algn="ctr"/>
-            <a:endParaRPr/>
-          </a:p>
-        </p:txBody>
-      </p:sp>
-      <p:sp>
-        <p:nvSpPr>
-          <p:cNvPr id="89" name="TextBox 88"/>
+          </a:p>
+        </p:txBody>
+      </p:sp>
+      <p:sp>
+        <p:nvSpPr>
+          <p:cNvPr id="83" name="TextBox 82"/>
           <p:cNvSpPr txBox="1"/>
           <p:nvPr/>
         </p:nvSpPr>
         <p:spPr>
           <a:xfrm>
             <a:off x="6647688" y="4823459"/>
-            <a:ext cx="1847088" cy="219456"/>
-          </a:xfrm>
-          <a:prstGeom prst="rect">
-            <a:avLst/>
-          </a:prstGeom>
-          <a:noFill/>
-        </p:spPr>
-        <p:txBody>
-          <a:bodyPr wrap="square" lIns="0" tIns="0" rIns="0" bIns="0">
+            <a:ext cx="1996592" cy="219456"/>
+          </a:xfrm>
+          <a:prstGeom prst="rect">
+            <a:avLst/>
+          </a:prstGeom>
+          <a:noFill/>
+        </p:spPr>
+        <p:txBody>
+          <a:bodyPr wrap="square" lIns="0" rIns="0" tIns="0" bIns="0">
             <a:spAutoFit/>
           </a:bodyPr>
           <a:lstStyle/>
@@ -21224,29 +20722,29 @@
                 </a:solidFill>
                 <a:latin typeface="Segoe UI"/>
               </a:rPr>
-              <a:t>5 non-flaky</a:t>
-            </a:r>
-          </a:p>
-        </p:txBody>
-      </p:sp>
-      <p:sp>
-        <p:nvSpPr>
-          <p:cNvPr id="90" name="TextBox 89"/>
-          <p:cNvSpPr txBox="1"/>
-          <p:nvPr/>
-        </p:nvSpPr>
-        <p:spPr>
-          <a:xfrm>
-            <a:off x="8641080" y="4823459"/>
-            <a:ext cx="601218" cy="219456"/>
-          </a:xfrm>
-          <a:prstGeom prst="rect">
-            <a:avLst/>
-          </a:prstGeom>
-          <a:noFill/>
-        </p:spPr>
-        <p:txBody>
-          <a:bodyPr wrap="square" lIns="0" tIns="0" rIns="0" bIns="0">
+              <a:t>non-flaky</a:t>
+            </a:r>
+          </a:p>
+        </p:txBody>
+      </p:sp>
+      <p:sp>
+        <p:nvSpPr>
+          <p:cNvPr id="84" name="TextBox 83"/>
+          <p:cNvSpPr txBox="1"/>
+          <p:nvPr/>
+        </p:nvSpPr>
+        <p:spPr>
+          <a:xfrm>
+            <a:off x="8790584" y="4823459"/>
+            <a:ext cx="800557" cy="219456"/>
+          </a:xfrm>
+          <a:prstGeom prst="rect">
+            <a:avLst/>
+          </a:prstGeom>
+          <a:noFill/>
+        </p:spPr>
+        <p:txBody>
+          <a:bodyPr wrap="square" lIns="0" rIns="0" tIns="0" bIns="0">
             <a:spAutoFit/>
           </a:bodyPr>
           <a:lstStyle/>
@@ -21269,29 +20767,29 @@
                 </a:solidFill>
                 <a:latin typeface="Segoe UI"/>
               </a:rPr>
-              <a:t>1.00</a:t>
-            </a:r>
-          </a:p>
-        </p:txBody>
-      </p:sp>
-      <p:sp>
-        <p:nvSpPr>
-          <p:cNvPr id="91" name="TextBox 90"/>
-          <p:cNvSpPr txBox="1"/>
-          <p:nvPr/>
-        </p:nvSpPr>
-        <p:spPr>
-          <a:xfrm>
-            <a:off x="9388602" y="4823459"/>
-            <a:ext cx="601218" cy="219456"/>
-          </a:xfrm>
-          <a:prstGeom prst="rect">
-            <a:avLst/>
-          </a:prstGeom>
-          <a:noFill/>
-        </p:spPr>
-        <p:txBody>
-          <a:bodyPr wrap="square" lIns="0" tIns="0" rIns="0" bIns="0">
+              <a:t>751</a:t>
+            </a:r>
+          </a:p>
+        </p:txBody>
+      </p:sp>
+      <p:sp>
+        <p:nvSpPr>
+          <p:cNvPr id="85" name="TextBox 84"/>
+          <p:cNvSpPr txBox="1"/>
+          <p:nvPr/>
+        </p:nvSpPr>
+        <p:spPr>
+          <a:xfrm>
+            <a:off x="9737445" y="4823459"/>
+            <a:ext cx="800557" cy="219456"/>
+          </a:xfrm>
+          <a:prstGeom prst="rect">
+            <a:avLst/>
+          </a:prstGeom>
+          <a:noFill/>
+        </p:spPr>
+        <p:txBody>
+          <a:bodyPr wrap="square" lIns="0" rIns="0" tIns="0" bIns="0">
             <a:spAutoFit/>
           </a:bodyPr>
           <a:lstStyle/>
@@ -21314,29 +20812,29 @@
                 </a:solidFill>
                 <a:latin typeface="Segoe UI"/>
               </a:rPr>
-              <a:t>1.00</a:t>
-            </a:r>
-          </a:p>
-        </p:txBody>
-      </p:sp>
-      <p:sp>
-        <p:nvSpPr>
-          <p:cNvPr id="92" name="TextBox 91"/>
-          <p:cNvSpPr txBox="1"/>
-          <p:nvPr/>
-        </p:nvSpPr>
-        <p:spPr>
-          <a:xfrm>
-            <a:off x="10136124" y="4823459"/>
-            <a:ext cx="601218" cy="219456"/>
-          </a:xfrm>
-          <a:prstGeom prst="rect">
-            <a:avLst/>
-          </a:prstGeom>
-          <a:noFill/>
-        </p:spPr>
-        <p:txBody>
-          <a:bodyPr wrap="square" lIns="0" tIns="0" rIns="0" bIns="0">
+              <a:t>0</a:t>
+            </a:r>
+          </a:p>
+        </p:txBody>
+      </p:sp>
+      <p:sp>
+        <p:nvSpPr>
+          <p:cNvPr id="86" name="TextBox 85"/>
+          <p:cNvSpPr txBox="1"/>
+          <p:nvPr/>
+        </p:nvSpPr>
+        <p:spPr>
+          <a:xfrm>
+            <a:off x="10684306" y="4823459"/>
+            <a:ext cx="800557" cy="219456"/>
+          </a:xfrm>
+          <a:prstGeom prst="rect">
+            <a:avLst/>
+          </a:prstGeom>
+          <a:noFill/>
+        </p:spPr>
+        <p:txBody>
+          <a:bodyPr wrap="square" lIns="0" rIns="0" tIns="0" bIns="0">
             <a:spAutoFit/>
           </a:bodyPr>
           <a:lstStyle/>
@@ -21359,59 +20857,14 @@
                 </a:solidFill>
                 <a:latin typeface="Segoe UI"/>
               </a:rPr>
-              <a:t>1.00</a:t>
-            </a:r>
-          </a:p>
-        </p:txBody>
-      </p:sp>
-      <p:sp>
-        <p:nvSpPr>
-          <p:cNvPr id="93" name="TextBox 92"/>
-          <p:cNvSpPr txBox="1"/>
-          <p:nvPr/>
-        </p:nvSpPr>
-        <p:spPr>
-          <a:xfrm>
-            <a:off x="10883646" y="4823459"/>
-            <a:ext cx="601218" cy="219456"/>
-          </a:xfrm>
-          <a:prstGeom prst="rect">
-            <a:avLst/>
-          </a:prstGeom>
-          <a:noFill/>
-        </p:spPr>
-        <p:txBody>
-          <a:bodyPr wrap="square" lIns="0" tIns="0" rIns="0" bIns="0">
-            <a:spAutoFit/>
-          </a:bodyPr>
-          <a:lstStyle/>
-          <a:p>
-            <a:pPr algn="l">
-              <a:lnSpc>
-                <a:spcPct val="100000"/>
-              </a:lnSpc>
-              <a:spcBef>
-                <a:spcPts val="0"/>
-              </a:spcBef>
-              <a:spcAft>
-                <a:spcPts val="0"/>
-              </a:spcAft>
-            </a:pPr>
-            <a:r>
-              <a:rPr sz="1150" b="1" i="0">
-                <a:solidFill>
-                  <a:srgbClr val="1A1F2B"/>
-                </a:solidFill>
-                <a:latin typeface="Segoe UI"/>
-              </a:rPr>
-              <a:t>2164</a:t>
-            </a:r>
-          </a:p>
-        </p:txBody>
-      </p:sp>
-      <p:sp>
-        <p:nvSpPr>
-          <p:cNvPr id="94" name="Rectangle 93"/>
+              <a:t>712</a:t>
+            </a:r>
+          </a:p>
+        </p:txBody>
+      </p:sp>
+      <p:sp>
+        <p:nvSpPr>
+          <p:cNvPr id="87" name="Rectangle 86"/>
           <p:cNvSpPr/>
           <p:nvPr/>
         </p:nvSpPr>
@@ -21446,17 +20899,16 @@
           </a:fontRef>
         </p:style>
         <p:txBody>
-          <a:bodyPr wrap="square" rtlCol="0" anchor="ctr"/>
+          <a:bodyPr rtlCol="0" anchor="ctr" wrap="square"/>
           <a:lstStyle/>
           <a:p>
             <a:pPr algn="ctr"/>
-            <a:endParaRPr/>
-          </a:p>
-        </p:txBody>
-      </p:sp>
-      <p:sp>
-        <p:nvSpPr>
-          <p:cNvPr id="95" name="Rectangle 94"/>
+          </a:p>
+        </p:txBody>
+      </p:sp>
+      <p:sp>
+        <p:nvSpPr>
+          <p:cNvPr id="88" name="Rectangle 87"/>
           <p:cNvSpPr/>
           <p:nvPr/>
         </p:nvSpPr>
@@ -21469,7 +20921,7 @@
             <a:avLst/>
           </a:prstGeom>
           <a:solidFill>
-            <a:srgbClr val="1E7F53"/>
+            <a:srgbClr val="B32D2D"/>
           </a:solidFill>
           <a:ln>
             <a:noFill/>
@@ -21491,17 +20943,16 @@
           </a:fontRef>
         </p:style>
         <p:txBody>
-          <a:bodyPr wrap="square" rtlCol="0" anchor="ctr"/>
+          <a:bodyPr rtlCol="0" anchor="ctr" wrap="square"/>
           <a:lstStyle/>
           <a:p>
             <a:pPr algn="ctr"/>
-            <a:endParaRPr/>
-          </a:p>
-        </p:txBody>
-      </p:sp>
-      <p:sp>
-        <p:nvSpPr>
-          <p:cNvPr id="96" name="TextBox 95"/>
+          </a:p>
+        </p:txBody>
+      </p:sp>
+      <p:sp>
+        <p:nvSpPr>
+          <p:cNvPr id="89" name="TextBox 88"/>
           <p:cNvSpPr txBox="1"/>
           <p:nvPr/>
         </p:nvSpPr>
@@ -21516,7 +20967,7 @@
           <a:noFill/>
         </p:spPr>
         <p:txBody>
-          <a:bodyPr wrap="square" lIns="0" tIns="0" rIns="0" bIns="0">
+          <a:bodyPr wrap="square" lIns="0" rIns="0" tIns="0" bIns="0">
             <a:spAutoFit/>
           </a:bodyPr>
           <a:lstStyle/>
@@ -21536,23 +20987,23 @@
                 </a:solidFill>
                 <a:latin typeface="Segoe UI"/>
               </a:rPr>
-              <a:t>Matches the artifact's published numbers on all six classes</a:t>
+              <a:t>Run A never predicts non-flaky</a:t>
             </a:r>
             <a:r>
               <a:rPr sz="1250" b="1">
                 <a:solidFill>
-                  <a:srgbClr val="1E7F53"/>
-                </a:solidFill>
-                <a:latin typeface="Segoe UI"/>
-              </a:rPr>
-              <a:t>, checked programmatically. The port is faithful — which means it reproduces the model's flaws faithfully too.</a:t>
-            </a:r>
-          </a:p>
-        </p:txBody>
-      </p:sp>
-      <p:sp>
-        <p:nvSpPr>
-          <p:cNvPr id="97" name="TextBox 96"/>
+                  <a:srgbClr val="B32D2D"/>
+                </a:solidFill>
+                <a:latin typeface="Segoe UI"/>
+              </a:rPr>
+              <a:t> and sends 563 of 797 tests — 71% of the suite — to order dependency, a class it predicts 0.4% of the time on the paper's own fold.</a:t>
+            </a:r>
+          </a:p>
+        </p:txBody>
+      </p:sp>
+      <p:sp>
+        <p:nvSpPr>
+          <p:cNvPr id="90" name="TextBox 89"/>
           <p:cNvSpPr txBox="1"/>
           <p:nvPr/>
         </p:nvSpPr>
@@ -21567,7 +21018,7 @@
           <a:noFill/>
         </p:spPr>
         <p:txBody>
-          <a:bodyPr wrap="square" lIns="0" tIns="0" rIns="0" bIns="0">
+          <a:bodyPr wrap="square" lIns="0" rIns="0" tIns="0" bIns="0">
             <a:spAutoFit/>
           </a:bodyPr>
           <a:lstStyle/>
@@ -21590,14 +21041,14 @@
                 </a:solidFill>
                 <a:latin typeface="Segoe UI"/>
               </a:rPr>
-              <a:t>artifacts/FlakyLens/flakylens-results/ — cricket-tracker-fold1{,-newline}/, control-paper-fold1/</a:t>
-            </a:r>
-          </a:p>
-        </p:txBody>
-      </p:sp>
-      <p:sp>
-        <p:nvSpPr>
-          <p:cNvPr id="98" name="TextBox 97"/>
+              <a:t>artifacts/FlakyLens/flakylens-results/ — cricket-tracker-fold1/ and cricket-tracker-fold1-newline/, joined-predictions.csv</a:t>
+            </a:r>
+          </a:p>
+        </p:txBody>
+      </p:sp>
+      <p:sp>
+        <p:nvSpPr>
+          <p:cNvPr id="91" name="TextBox 90"/>
           <p:cNvSpPr txBox="1"/>
           <p:nvPr/>
         </p:nvSpPr>
@@ -21612,7 +21063,7 @@
           <a:noFill/>
         </p:spPr>
         <p:txBody>
-          <a:bodyPr wrap="square" lIns="0" tIns="0" rIns="0" bIns="0">
+          <a:bodyPr wrap="square" lIns="0" rIns="0" tIns="0" bIns="0">
             <a:spAutoFit/>
           </a:bodyPr>
           <a:lstStyle/>
@@ -21649,7 +21100,7 @@
 </file>
 
 <file path=ppt/slides/slide6.xml><?xml version="1.0" encoding="utf-8"?>
-<p:sld xmlns:a="http://schemas.openxmlformats.org/drawingml/2006/main" xmlns:r="http://schemas.openxmlformats.org/officeDocument/2006/relationships" xmlns:p="http://schemas.openxmlformats.org/presentationml/2006/main">
+<p:sld xmlns:a="http://schemas.openxmlformats.org/drawingml/2006/main" xmlns:p="http://schemas.openxmlformats.org/presentationml/2006/main" xmlns:r="http://schemas.openxmlformats.org/officeDocument/2006/relationships">
   <p:cSld>
     <p:bg>
       <p:bgPr>
@@ -21665,14 +21116,7 @@
         <p:cNvGrpSpPr/>
         <p:nvPr/>
       </p:nvGrpSpPr>
-      <p:grpSpPr>
-        <a:xfrm>
-          <a:off x="0" y="0"/>
-          <a:ext cx="0" cy="0"/>
-          <a:chOff x="0" y="0"/>
-          <a:chExt cx="0" cy="0"/>
-        </a:xfrm>
-      </p:grpSpPr>
+      <p:grpSpPr/>
       <p:sp>
         <p:nvSpPr>
           <p:cNvPr id="2" name="Rectangle 1"/>
@@ -21710,11 +21154,10 @@
           </a:fontRef>
         </p:style>
         <p:txBody>
-          <a:bodyPr wrap="square" rtlCol="0" anchor="ctr"/>
+          <a:bodyPr rtlCol="0" anchor="ctr" wrap="square"/>
           <a:lstStyle/>
           <a:p>
             <a:pPr algn="ctr"/>
-            <a:endParaRPr/>
           </a:p>
         </p:txBody>
       </p:sp>
@@ -21735,7 +21178,7 @@
           <a:noFill/>
         </p:spPr>
         <p:txBody>
-          <a:bodyPr wrap="square" lIns="0" tIns="0" rIns="0" bIns="0">
+          <a:bodyPr wrap="square" lIns="0" rIns="0" tIns="0" bIns="0">
             <a:spAutoFit/>
           </a:bodyPr>
           <a:lstStyle/>
@@ -21780,7 +21223,7 @@
           <a:noFill/>
         </p:spPr>
         <p:txBody>
-          <a:bodyPr wrap="square" lIns="0" tIns="0" rIns="0" bIns="0">
+          <a:bodyPr wrap="square" lIns="0" rIns="0" tIns="0" bIns="0">
             <a:spAutoFit/>
           </a:bodyPr>
           <a:lstStyle/>
@@ -21845,11 +21288,10 @@
           </a:fontRef>
         </p:style>
         <p:txBody>
-          <a:bodyPr wrap="square" rtlCol="0" anchor="ctr"/>
+          <a:bodyPr rtlCol="0" anchor="ctr" wrap="square"/>
           <a:lstStyle/>
           <a:p>
             <a:pPr algn="ctr"/>
-            <a:endParaRPr/>
           </a:p>
         </p:txBody>
       </p:sp>
@@ -21870,7 +21312,7 @@
           <a:noFill/>
         </p:spPr>
         <p:txBody>
-          <a:bodyPr wrap="square" lIns="0" tIns="0" rIns="0" bIns="0">
+          <a:bodyPr wrap="square" lIns="0" rIns="0" tIns="0" bIns="0">
             <a:spAutoFit/>
           </a:bodyPr>
           <a:lstStyle/>
@@ -21935,11 +21377,10 @@
           </a:fontRef>
         </p:style>
         <p:txBody>
-          <a:bodyPr wrap="square" rtlCol="0" anchor="ctr"/>
+          <a:bodyPr rtlCol="0" anchor="ctr" wrap="square"/>
           <a:lstStyle/>
           <a:p>
             <a:pPr algn="ctr"/>
-            <a:endParaRPr/>
           </a:p>
         </p:txBody>
       </p:sp>
@@ -21960,7 +21401,7 @@
           <a:noFill/>
         </p:spPr>
         <p:txBody>
-          <a:bodyPr wrap="square" lIns="0" tIns="0" rIns="0" bIns="0">
+          <a:bodyPr wrap="square" lIns="0" rIns="0" tIns="0" bIns="0">
             <a:spAutoFit/>
           </a:bodyPr>
           <a:lstStyle/>
@@ -22005,7 +21446,7 @@
           <a:noFill/>
         </p:spPr>
         <p:txBody>
-          <a:bodyPr wrap="square" lIns="0" tIns="0" rIns="0" bIns="0">
+          <a:bodyPr wrap="square" lIns="0" rIns="0" tIns="0" bIns="0">
             <a:spAutoFit/>
           </a:bodyPr>
           <a:lstStyle/>
@@ -22050,7 +21491,7 @@
           <a:noFill/>
         </p:spPr>
         <p:txBody>
-          <a:bodyPr wrap="square" lIns="0" tIns="0" rIns="0" bIns="0">
+          <a:bodyPr wrap="square" lIns="0" rIns="0" tIns="0" bIns="0">
             <a:spAutoFit/>
           </a:bodyPr>
           <a:lstStyle/>
@@ -22095,7 +21536,7 @@
           <a:noFill/>
         </p:spPr>
         <p:txBody>
-          <a:bodyPr wrap="square" lIns="0" tIns="0" rIns="0" bIns="0">
+          <a:bodyPr wrap="square" lIns="0" rIns="0" tIns="0" bIns="0">
             <a:spAutoFit/>
           </a:bodyPr>
           <a:lstStyle/>
@@ -22140,7 +21581,7 @@
           <a:noFill/>
         </p:spPr>
         <p:txBody>
-          <a:bodyPr wrap="square" lIns="0" tIns="0" rIns="0" bIns="0">
+          <a:bodyPr wrap="square" lIns="0" rIns="0" tIns="0" bIns="0">
             <a:spAutoFit/>
           </a:bodyPr>
           <a:lstStyle/>
@@ -22185,7 +21626,7 @@
           <a:noFill/>
         </p:spPr>
         <p:txBody>
-          <a:bodyPr wrap="square" lIns="0" tIns="0" rIns="0" bIns="0">
+          <a:bodyPr wrap="square" lIns="0" rIns="0" tIns="0" bIns="0">
             <a:spAutoFit/>
           </a:bodyPr>
           <a:lstStyle/>
@@ -22250,11 +21691,10 @@
           </a:fontRef>
         </p:style>
         <p:txBody>
-          <a:bodyPr wrap="square" rtlCol="0" anchor="ctr"/>
+          <a:bodyPr rtlCol="0" anchor="ctr" wrap="square"/>
           <a:lstStyle/>
           <a:p>
             <a:pPr algn="ctr"/>
-            <a:endParaRPr/>
           </a:p>
         </p:txBody>
       </p:sp>
@@ -22275,7 +21715,7 @@
           <a:noFill/>
         </p:spPr>
         <p:txBody>
-          <a:bodyPr wrap="square" lIns="0" tIns="0" rIns="0" bIns="0">
+          <a:bodyPr wrap="square" lIns="0" rIns="0" tIns="0" bIns="0">
             <a:spAutoFit/>
           </a:bodyPr>
           <a:lstStyle/>
@@ -22320,7 +21760,7 @@
           <a:noFill/>
         </p:spPr>
         <p:txBody>
-          <a:bodyPr wrap="square" lIns="0" tIns="0" rIns="0" bIns="0">
+          <a:bodyPr wrap="square" lIns="0" rIns="0" tIns="0" bIns="0">
             <a:spAutoFit/>
           </a:bodyPr>
           <a:lstStyle/>
@@ -22365,7 +21805,7 @@
           <a:noFill/>
         </p:spPr>
         <p:txBody>
-          <a:bodyPr wrap="square" lIns="0" tIns="0" rIns="0" bIns="0">
+          <a:bodyPr wrap="square" lIns="0" rIns="0" tIns="0" bIns="0">
             <a:spAutoFit/>
           </a:bodyPr>
           <a:lstStyle/>
@@ -22410,7 +21850,7 @@
           <a:noFill/>
         </p:spPr>
         <p:txBody>
-          <a:bodyPr wrap="square" lIns="0" tIns="0" rIns="0" bIns="0">
+          <a:bodyPr wrap="square" lIns="0" rIns="0" tIns="0" bIns="0">
             <a:spAutoFit/>
           </a:bodyPr>
           <a:lstStyle/>
@@ -22455,7 +21895,7 @@
           <a:noFill/>
         </p:spPr>
         <p:txBody>
-          <a:bodyPr wrap="square" lIns="0" tIns="0" rIns="0" bIns="0">
+          <a:bodyPr wrap="square" lIns="0" rIns="0" tIns="0" bIns="0">
             <a:spAutoFit/>
           </a:bodyPr>
           <a:lstStyle/>
@@ -22500,7 +21940,7 @@
           <a:noFill/>
         </p:spPr>
         <p:txBody>
-          <a:bodyPr wrap="square" lIns="0" tIns="0" rIns="0" bIns="0">
+          <a:bodyPr wrap="square" lIns="0" rIns="0" tIns="0" bIns="0">
             <a:spAutoFit/>
           </a:bodyPr>
           <a:lstStyle/>
@@ -22565,11 +22005,10 @@
           </a:fontRef>
         </p:style>
         <p:txBody>
-          <a:bodyPr wrap="square" rtlCol="0" anchor="ctr"/>
+          <a:bodyPr rtlCol="0" anchor="ctr" wrap="square"/>
           <a:lstStyle/>
           <a:p>
             <a:pPr algn="ctr"/>
-            <a:endParaRPr/>
           </a:p>
         </p:txBody>
       </p:sp>
@@ -22590,7 +22029,7 @@
           <a:noFill/>
         </p:spPr>
         <p:txBody>
-          <a:bodyPr wrap="square" lIns="0" tIns="0" rIns="0" bIns="0">
+          <a:bodyPr wrap="square" lIns="0" rIns="0" tIns="0" bIns="0">
             <a:spAutoFit/>
           </a:bodyPr>
           <a:lstStyle/>
@@ -22635,7 +22074,7 @@
           <a:noFill/>
         </p:spPr>
         <p:txBody>
-          <a:bodyPr wrap="square" lIns="0" tIns="0" rIns="0" bIns="0">
+          <a:bodyPr wrap="square" lIns="0" rIns="0" tIns="0" bIns="0">
             <a:spAutoFit/>
           </a:bodyPr>
           <a:lstStyle/>
@@ -22680,7 +22119,7 @@
           <a:noFill/>
         </p:spPr>
         <p:txBody>
-          <a:bodyPr wrap="square" lIns="0" tIns="0" rIns="0" bIns="0">
+          <a:bodyPr wrap="square" lIns="0" rIns="0" tIns="0" bIns="0">
             <a:spAutoFit/>
           </a:bodyPr>
           <a:lstStyle/>
@@ -22725,7 +22164,7 @@
           <a:noFill/>
         </p:spPr>
         <p:txBody>
-          <a:bodyPr wrap="square" lIns="0" tIns="0" rIns="0" bIns="0">
+          <a:bodyPr wrap="square" lIns="0" rIns="0" tIns="0" bIns="0">
             <a:spAutoFit/>
           </a:bodyPr>
           <a:lstStyle/>
@@ -22790,11 +22229,10 @@
           </a:fontRef>
         </p:style>
         <p:txBody>
-          <a:bodyPr wrap="square" rtlCol="0" anchor="ctr"/>
+          <a:bodyPr rtlCol="0" anchor="ctr" wrap="square"/>
           <a:lstStyle/>
           <a:p>
             <a:pPr algn="ctr"/>
-            <a:endParaRPr/>
           </a:p>
         </p:txBody>
       </p:sp>
@@ -22815,7 +22253,7 @@
           <a:noFill/>
         </p:spPr>
         <p:txBody>
-          <a:bodyPr wrap="square" lIns="0" tIns="0" rIns="0" bIns="0">
+          <a:bodyPr wrap="square" lIns="0" rIns="0" tIns="0" bIns="0">
             <a:spAutoFit/>
           </a:bodyPr>
           <a:lstStyle/>
@@ -22860,7 +22298,7 @@
           <a:noFill/>
         </p:spPr>
         <p:txBody>
-          <a:bodyPr wrap="square" lIns="0" tIns="0" rIns="0" bIns="0">
+          <a:bodyPr wrap="square" lIns="0" rIns="0" tIns="0" bIns="0">
             <a:spAutoFit/>
           </a:bodyPr>
           <a:lstStyle/>
@@ -22905,7 +22343,7 @@
           <a:noFill/>
         </p:spPr>
         <p:txBody>
-          <a:bodyPr wrap="square" lIns="0" tIns="0" rIns="0" bIns="0">
+          <a:bodyPr wrap="square" lIns="0" rIns="0" tIns="0" bIns="0">
             <a:spAutoFit/>
           </a:bodyPr>
           <a:lstStyle/>
@@ -22950,7 +22388,7 @@
           <a:noFill/>
         </p:spPr>
         <p:txBody>
-          <a:bodyPr wrap="square" lIns="0" tIns="0" rIns="0" bIns="0">
+          <a:bodyPr wrap="square" lIns="0" rIns="0" tIns="0" bIns="0">
             <a:spAutoFit/>
           </a:bodyPr>
           <a:lstStyle/>
@@ -23015,11 +22453,10 @@
           </a:fontRef>
         </p:style>
         <p:txBody>
-          <a:bodyPr wrap="square" rtlCol="0" anchor="ctr"/>
+          <a:bodyPr rtlCol="0" anchor="ctr" wrap="square"/>
           <a:lstStyle/>
           <a:p>
             <a:pPr algn="ctr"/>
-            <a:endParaRPr/>
           </a:p>
         </p:txBody>
       </p:sp>
@@ -23040,7 +22477,7 @@
           <a:noFill/>
         </p:spPr>
         <p:txBody>
-          <a:bodyPr wrap="square" lIns="0" tIns="0" rIns="0" bIns="0">
+          <a:bodyPr wrap="square" lIns="0" rIns="0" tIns="0" bIns="0">
             <a:spAutoFit/>
           </a:bodyPr>
           <a:lstStyle/>
@@ -23085,7 +22522,7 @@
           <a:noFill/>
         </p:spPr>
         <p:txBody>
-          <a:bodyPr wrap="square" lIns="0" tIns="0" rIns="0" bIns="0">
+          <a:bodyPr wrap="square" lIns="0" rIns="0" tIns="0" bIns="0">
             <a:spAutoFit/>
           </a:bodyPr>
           <a:lstStyle/>
@@ -23130,7 +22567,7 @@
           <a:noFill/>
         </p:spPr>
         <p:txBody>
-          <a:bodyPr wrap="square" lIns="0" tIns="0" rIns="0" bIns="0">
+          <a:bodyPr wrap="square" lIns="0" rIns="0" tIns="0" bIns="0">
             <a:spAutoFit/>
           </a:bodyPr>
           <a:lstStyle/>
@@ -23175,7 +22612,7 @@
           <a:noFill/>
         </p:spPr>
         <p:txBody>
-          <a:bodyPr wrap="square" lIns="0" tIns="0" rIns="0" bIns="0">
+          <a:bodyPr wrap="square" lIns="0" rIns="0" tIns="0" bIns="0">
             <a:spAutoFit/>
           </a:bodyPr>
           <a:lstStyle/>
@@ -23240,11 +22677,10 @@
           </a:fontRef>
         </p:style>
         <p:txBody>
-          <a:bodyPr wrap="square" rtlCol="0" anchor="ctr"/>
+          <a:bodyPr rtlCol="0" anchor="ctr" wrap="square"/>
           <a:lstStyle/>
           <a:p>
             <a:pPr algn="ctr"/>
-            <a:endParaRPr/>
           </a:p>
         </p:txBody>
       </p:sp>
@@ -23265,7 +22701,7 @@
           <a:noFill/>
         </p:spPr>
         <p:txBody>
-          <a:bodyPr wrap="square" lIns="0" tIns="0" rIns="0" bIns="0">
+          <a:bodyPr wrap="square" lIns="0" rIns="0" tIns="0" bIns="0">
             <a:spAutoFit/>
           </a:bodyPr>
           <a:lstStyle/>
@@ -23310,7 +22746,7 @@
           <a:noFill/>
         </p:spPr>
         <p:txBody>
-          <a:bodyPr wrap="square" lIns="0" tIns="0" rIns="0" bIns="0">
+          <a:bodyPr wrap="square" lIns="0" rIns="0" tIns="0" bIns="0">
             <a:spAutoFit/>
           </a:bodyPr>
           <a:lstStyle/>
@@ -23375,11 +22811,10 @@
           </a:fontRef>
         </p:style>
         <p:txBody>
-          <a:bodyPr wrap="square" rtlCol="0" anchor="ctr"/>
+          <a:bodyPr rtlCol="0" anchor="ctr" wrap="square"/>
           <a:lstStyle/>
           <a:p>
             <a:pPr algn="ctr"/>
-            <a:endParaRPr/>
           </a:p>
         </p:txBody>
       </p:sp>
@@ -23420,11 +22855,10 @@
           </a:fontRef>
         </p:style>
         <p:txBody>
-          <a:bodyPr wrap="square" rtlCol="0" anchor="ctr"/>
+          <a:bodyPr rtlCol="0" anchor="ctr" wrap="square"/>
           <a:lstStyle/>
           <a:p>
             <a:pPr algn="ctr"/>
-            <a:endParaRPr/>
           </a:p>
         </p:txBody>
       </p:sp>
@@ -23445,7 +22879,7 @@
           <a:noFill/>
         </p:spPr>
         <p:txBody>
-          <a:bodyPr wrap="square" lIns="0" tIns="0" rIns="0" bIns="0">
+          <a:bodyPr wrap="square" lIns="0" rIns="0" tIns="0" bIns="0">
             <a:spAutoFit/>
           </a:bodyPr>
           <a:lstStyle/>
@@ -23496,7 +22930,7 @@
           <a:noFill/>
         </p:spPr>
         <p:txBody>
-          <a:bodyPr wrap="square" lIns="0" tIns="0" rIns="0" bIns="0">
+          <a:bodyPr wrap="square" lIns="0" rIns="0" tIns="0" bIns="0">
             <a:spAutoFit/>
           </a:bodyPr>
           <a:lstStyle/>
@@ -23643,7 +23077,7 @@
           <a:noFill/>
         </p:spPr>
         <p:txBody>
-          <a:bodyPr wrap="square" lIns="0" tIns="0" rIns="0" bIns="0">
+          <a:bodyPr wrap="square" lIns="0" rIns="0" tIns="0" bIns="0">
             <a:spAutoFit/>
           </a:bodyPr>
           <a:lstStyle/>
@@ -23688,7 +23122,7 @@
           <a:noFill/>
         </p:spPr>
         <p:txBody>
-          <a:bodyPr wrap="square" lIns="0" tIns="0" rIns="0" bIns="0">
+          <a:bodyPr wrap="square" lIns="0" rIns="0" tIns="0" bIns="0">
             <a:spAutoFit/>
           </a:bodyPr>
           <a:lstStyle/>
@@ -23725,7 +23159,7 @@
 </file>
 
 <file path=ppt/slides/slide7.xml><?xml version="1.0" encoding="utf-8"?>
-<p:sld xmlns:a="http://schemas.openxmlformats.org/drawingml/2006/main" xmlns:r="http://schemas.openxmlformats.org/officeDocument/2006/relationships" xmlns:p="http://schemas.openxmlformats.org/presentationml/2006/main">
+<p:sld xmlns:a="http://schemas.openxmlformats.org/drawingml/2006/main" xmlns:p="http://schemas.openxmlformats.org/presentationml/2006/main" xmlns:r="http://schemas.openxmlformats.org/officeDocument/2006/relationships">
   <p:cSld>
     <p:bg>
       <p:bgPr>
@@ -23741,14 +23175,7 @@
         <p:cNvGrpSpPr/>
         <p:nvPr/>
       </p:nvGrpSpPr>
-      <p:grpSpPr>
-        <a:xfrm>
-          <a:off x="0" y="0"/>
-          <a:ext cx="0" cy="0"/>
-          <a:chOff x="0" y="0"/>
-          <a:chExt cx="0" cy="0"/>
-        </a:xfrm>
-      </p:grpSpPr>
+      <p:grpSpPr/>
       <p:sp>
         <p:nvSpPr>
           <p:cNvPr id="2" name="Rectangle 1"/>
@@ -23786,11 +23213,10 @@
           </a:fontRef>
         </p:style>
         <p:txBody>
-          <a:bodyPr wrap="square" rtlCol="0" anchor="ctr"/>
+          <a:bodyPr rtlCol="0" anchor="ctr" wrap="square"/>
           <a:lstStyle/>
           <a:p>
             <a:pPr algn="ctr"/>
-            <a:endParaRPr/>
           </a:p>
         </p:txBody>
       </p:sp>
@@ -23811,7 +23237,7 @@
           <a:noFill/>
         </p:spPr>
         <p:txBody>
-          <a:bodyPr wrap="square" lIns="0" tIns="0" rIns="0" bIns="0">
+          <a:bodyPr wrap="square" lIns="0" rIns="0" tIns="0" bIns="0">
             <a:spAutoFit/>
           </a:bodyPr>
           <a:lstStyle/>
@@ -23856,7 +23282,7 @@
           <a:noFill/>
         </p:spPr>
         <p:txBody>
-          <a:bodyPr wrap="square" lIns="0" tIns="0" rIns="0" bIns="0">
+          <a:bodyPr wrap="square" lIns="0" rIns="0" tIns="0" bIns="0">
             <a:spAutoFit/>
           </a:bodyPr>
           <a:lstStyle/>
@@ -23921,11 +23347,10 @@
           </a:fontRef>
         </p:style>
         <p:txBody>
-          <a:bodyPr wrap="square" rtlCol="0" anchor="ctr"/>
+          <a:bodyPr rtlCol="0" anchor="ctr" wrap="square"/>
           <a:lstStyle/>
           <a:p>
             <a:pPr algn="ctr"/>
-            <a:endParaRPr/>
           </a:p>
         </p:txBody>
       </p:sp>
@@ -23946,7 +23371,7 @@
           <a:noFill/>
         </p:spPr>
         <p:txBody>
-          <a:bodyPr wrap="square" lIns="0" tIns="0" rIns="0" bIns="0">
+          <a:bodyPr wrap="square" lIns="0" rIns="0" tIns="0" bIns="0">
             <a:spAutoFit/>
           </a:bodyPr>
           <a:lstStyle/>
@@ -23991,7 +23416,7 @@
           <a:noFill/>
         </p:spPr>
         <p:txBody>
-          <a:bodyPr wrap="square" lIns="0" tIns="0" rIns="0" bIns="0">
+          <a:bodyPr wrap="square" lIns="0" rIns="0" tIns="0" bIns="0">
             <a:spAutoFit/>
           </a:bodyPr>
           <a:lstStyle/>
@@ -24056,11 +23481,10 @@
           </a:fontRef>
         </p:style>
         <p:txBody>
-          <a:bodyPr wrap="square" rtlCol="0" anchor="ctr"/>
+          <a:bodyPr rtlCol="0" anchor="ctr" wrap="square"/>
           <a:lstStyle/>
           <a:p>
             <a:pPr algn="ctr"/>
-            <a:endParaRPr/>
           </a:p>
         </p:txBody>
       </p:sp>
@@ -24081,7 +23505,7 @@
           <a:noFill/>
         </p:spPr>
         <p:txBody>
-          <a:bodyPr wrap="square" lIns="0" tIns="0" rIns="0" bIns="0">
+          <a:bodyPr wrap="square" lIns="0" rIns="0" tIns="0" bIns="0">
             <a:spAutoFit/>
           </a:bodyPr>
           <a:lstStyle/>
@@ -24163,12 +23587,15 @@
                 <a:spcPts val="300"/>
               </a:spcAft>
             </a:pPr>
-            <a:endParaRPr sz="1000" b="0" i="0">
-              <a:solidFill>
-                <a:srgbClr val="1A1F2B"/>
-              </a:solidFill>
-              <a:latin typeface="Consolas"/>
-            </a:endParaRPr>
+            <a:r>
+              <a:rPr sz="1000" b="0" i="0">
+                <a:solidFill>
+                  <a:srgbClr val="1A1F2B"/>
+                </a:solidFill>
+                <a:latin typeface="Consolas"/>
+              </a:rPr>
+              <a:t/>
+            </a:r>
           </a:p>
           <a:p>
             <a:pPr algn="l">
@@ -24233,7 +23660,7 @@
           <a:noFill/>
         </p:spPr>
         <p:txBody>
-          <a:bodyPr wrap="square" lIns="0" tIns="0" rIns="0" bIns="0">
+          <a:bodyPr wrap="square" lIns="0" rIns="0" tIns="0" bIns="0">
             <a:spAutoFit/>
           </a:bodyPr>
           <a:lstStyle/>
@@ -24318,7 +23745,7 @@
           <a:noFill/>
         </p:spPr>
         <p:txBody>
-          <a:bodyPr wrap="square" lIns="0" tIns="0" rIns="0" bIns="0">
+          <a:bodyPr wrap="square" lIns="0" rIns="0" tIns="0" bIns="0">
             <a:spAutoFit/>
           </a:bodyPr>
           <a:lstStyle/>
@@ -24383,11 +23810,10 @@
           </a:fontRef>
         </p:style>
         <p:txBody>
-          <a:bodyPr wrap="square" rtlCol="0" anchor="ctr"/>
+          <a:bodyPr rtlCol="0" anchor="ctr" wrap="square"/>
           <a:lstStyle/>
           <a:p>
             <a:pPr algn="ctr"/>
-            <a:endParaRPr/>
           </a:p>
         </p:txBody>
       </p:sp>
@@ -24408,7 +23834,7 @@
           <a:noFill/>
         </p:spPr>
         <p:txBody>
-          <a:bodyPr wrap="square" lIns="0" tIns="0" rIns="0" bIns="0">
+          <a:bodyPr wrap="square" lIns="0" rIns="0" tIns="0" bIns="0">
             <a:spAutoFit/>
           </a:bodyPr>
           <a:lstStyle/>
@@ -24453,7 +23879,7 @@
           <a:noFill/>
         </p:spPr>
         <p:txBody>
-          <a:bodyPr wrap="square" lIns="0" tIns="0" rIns="0" bIns="0">
+          <a:bodyPr wrap="square" lIns="0" rIns="0" tIns="0" bIns="0">
             <a:spAutoFit/>
           </a:bodyPr>
           <a:lstStyle/>
@@ -24498,7 +23924,7 @@
           <a:noFill/>
         </p:spPr>
         <p:txBody>
-          <a:bodyPr wrap="square" lIns="0" tIns="0" rIns="0" bIns="0">
+          <a:bodyPr wrap="square" lIns="0" rIns="0" tIns="0" bIns="0">
             <a:spAutoFit/>
           </a:bodyPr>
           <a:lstStyle/>
@@ -24543,7 +23969,7 @@
           <a:noFill/>
         </p:spPr>
         <p:txBody>
-          <a:bodyPr wrap="square" lIns="0" tIns="0" rIns="0" bIns="0">
+          <a:bodyPr wrap="square" lIns="0" rIns="0" tIns="0" bIns="0">
             <a:spAutoFit/>
           </a:bodyPr>
           <a:lstStyle/>
@@ -24608,11 +24034,10 @@
           </a:fontRef>
         </p:style>
         <p:txBody>
-          <a:bodyPr wrap="square" rtlCol="0" anchor="ctr"/>
+          <a:bodyPr rtlCol="0" anchor="ctr" wrap="square"/>
           <a:lstStyle/>
           <a:p>
             <a:pPr algn="ctr"/>
-            <a:endParaRPr/>
           </a:p>
         </p:txBody>
       </p:sp>
@@ -24633,7 +24058,7 @@
           <a:noFill/>
         </p:spPr>
         <p:txBody>
-          <a:bodyPr wrap="square" lIns="0" tIns="0" rIns="0" bIns="0">
+          <a:bodyPr wrap="square" lIns="0" rIns="0" tIns="0" bIns="0">
             <a:spAutoFit/>
           </a:bodyPr>
           <a:lstStyle/>
@@ -24678,7 +24103,7 @@
           <a:noFill/>
         </p:spPr>
         <p:txBody>
-          <a:bodyPr wrap="square" lIns="0" tIns="0" rIns="0" bIns="0">
+          <a:bodyPr wrap="square" lIns="0" rIns="0" tIns="0" bIns="0">
             <a:spAutoFit/>
           </a:bodyPr>
           <a:lstStyle/>
@@ -24723,7 +24148,7 @@
           <a:noFill/>
         </p:spPr>
         <p:txBody>
-          <a:bodyPr wrap="square" lIns="0" tIns="0" rIns="0" bIns="0">
+          <a:bodyPr wrap="square" lIns="0" rIns="0" tIns="0" bIns="0">
             <a:spAutoFit/>
           </a:bodyPr>
           <a:lstStyle/>
@@ -24768,7 +24193,7 @@
           <a:noFill/>
         </p:spPr>
         <p:txBody>
-          <a:bodyPr wrap="square" lIns="0" tIns="0" rIns="0" bIns="0">
+          <a:bodyPr wrap="square" lIns="0" rIns="0" tIns="0" bIns="0">
             <a:spAutoFit/>
           </a:bodyPr>
           <a:lstStyle/>
@@ -24833,11 +24258,10 @@
           </a:fontRef>
         </p:style>
         <p:txBody>
-          <a:bodyPr wrap="square" rtlCol="0" anchor="ctr"/>
+          <a:bodyPr rtlCol="0" anchor="ctr" wrap="square"/>
           <a:lstStyle/>
           <a:p>
             <a:pPr algn="ctr"/>
-            <a:endParaRPr/>
           </a:p>
         </p:txBody>
       </p:sp>
@@ -24858,7 +24282,7 @@
           <a:noFill/>
         </p:spPr>
         <p:txBody>
-          <a:bodyPr wrap="square" lIns="0" tIns="0" rIns="0" bIns="0">
+          <a:bodyPr wrap="square" lIns="0" rIns="0" tIns="0" bIns="0">
             <a:spAutoFit/>
           </a:bodyPr>
           <a:lstStyle/>
@@ -24903,7 +24327,7 @@
           <a:noFill/>
         </p:spPr>
         <p:txBody>
-          <a:bodyPr wrap="square" lIns="0" tIns="0" rIns="0" bIns="0">
+          <a:bodyPr wrap="square" lIns="0" rIns="0" tIns="0" bIns="0">
             <a:spAutoFit/>
           </a:bodyPr>
           <a:lstStyle/>
@@ -24968,11 +24392,10 @@
           </a:fontRef>
         </p:style>
         <p:txBody>
-          <a:bodyPr wrap="square" rtlCol="0" anchor="ctr"/>
+          <a:bodyPr rtlCol="0" anchor="ctr" wrap="square"/>
           <a:lstStyle/>
           <a:p>
             <a:pPr algn="ctr"/>
-            <a:endParaRPr/>
           </a:p>
         </p:txBody>
       </p:sp>
@@ -25013,11 +24436,10 @@
           </a:fontRef>
         </p:style>
         <p:txBody>
-          <a:bodyPr wrap="square" rtlCol="0" anchor="ctr"/>
+          <a:bodyPr rtlCol="0" anchor="ctr" wrap="square"/>
           <a:lstStyle/>
           <a:p>
             <a:pPr algn="ctr"/>
-            <a:endParaRPr/>
           </a:p>
         </p:txBody>
       </p:sp>
@@ -25038,7 +24460,7 @@
           <a:noFill/>
         </p:spPr>
         <p:txBody>
-          <a:bodyPr wrap="square" lIns="0" tIns="0" rIns="0" bIns="0">
+          <a:bodyPr wrap="square" lIns="0" rIns="0" tIns="0" bIns="0">
             <a:spAutoFit/>
           </a:bodyPr>
           <a:lstStyle/>
@@ -25089,7 +24511,7 @@
           <a:noFill/>
         </p:spPr>
         <p:txBody>
-          <a:bodyPr wrap="square" lIns="0" tIns="0" rIns="0" bIns="0">
+          <a:bodyPr wrap="square" lIns="0" rIns="0" tIns="0" bIns="0">
             <a:spAutoFit/>
           </a:bodyPr>
           <a:lstStyle/>
@@ -25134,7 +24556,7 @@
           <a:noFill/>
         </p:spPr>
         <p:txBody>
-          <a:bodyPr wrap="square" lIns="0" tIns="0" rIns="0" bIns="0">
+          <a:bodyPr wrap="square" lIns="0" rIns="0" tIns="0" bIns="0">
             <a:spAutoFit/>
           </a:bodyPr>
           <a:lstStyle/>
@@ -25171,7 +24593,7 @@
 </file>
 
 <file path=ppt/slides/slide8.xml><?xml version="1.0" encoding="utf-8"?>
-<p:sld xmlns:a="http://schemas.openxmlformats.org/drawingml/2006/main" xmlns:r="http://schemas.openxmlformats.org/officeDocument/2006/relationships" xmlns:p="http://schemas.openxmlformats.org/presentationml/2006/main">
+<p:sld xmlns:a="http://schemas.openxmlformats.org/drawingml/2006/main" xmlns:p="http://schemas.openxmlformats.org/presentationml/2006/main" xmlns:r="http://schemas.openxmlformats.org/officeDocument/2006/relationships">
   <p:cSld>
     <p:bg>
       <p:bgPr>
@@ -25187,14 +24609,7 @@
         <p:cNvGrpSpPr/>
         <p:nvPr/>
       </p:nvGrpSpPr>
-      <p:grpSpPr>
-        <a:xfrm>
-          <a:off x="0" y="0"/>
-          <a:ext cx="0" cy="0"/>
-          <a:chOff x="0" y="0"/>
-          <a:chExt cx="0" cy="0"/>
-        </a:xfrm>
-      </p:grpSpPr>
+      <p:grpSpPr/>
       <p:sp>
         <p:nvSpPr>
           <p:cNvPr id="2" name="Rectangle 1"/>
@@ -25232,11 +24647,10 @@
           </a:fontRef>
         </p:style>
         <p:txBody>
-          <a:bodyPr wrap="square" rtlCol="0" anchor="ctr"/>
+          <a:bodyPr rtlCol="0" anchor="ctr" wrap="square"/>
           <a:lstStyle/>
           <a:p>
             <a:pPr algn="ctr"/>
-            <a:endParaRPr/>
           </a:p>
         </p:txBody>
       </p:sp>
@@ -25257,7 +24671,7 @@
           <a:noFill/>
         </p:spPr>
         <p:txBody>
-          <a:bodyPr wrap="square" lIns="0" tIns="0" rIns="0" bIns="0">
+          <a:bodyPr wrap="square" lIns="0" rIns="0" tIns="0" bIns="0">
             <a:spAutoFit/>
           </a:bodyPr>
           <a:lstStyle/>
@@ -25302,7 +24716,7 @@
           <a:noFill/>
         </p:spPr>
         <p:txBody>
-          <a:bodyPr wrap="square" lIns="0" tIns="0" rIns="0" bIns="0">
+          <a:bodyPr wrap="square" lIns="0" rIns="0" tIns="0" bIns="0">
             <a:spAutoFit/>
           </a:bodyPr>
           <a:lstStyle/>
@@ -25367,11 +24781,10 @@
           </a:fontRef>
         </p:style>
         <p:txBody>
-          <a:bodyPr wrap="square" rtlCol="0" anchor="ctr"/>
+          <a:bodyPr rtlCol="0" anchor="ctr" wrap="square"/>
           <a:lstStyle/>
           <a:p>
             <a:pPr algn="ctr"/>
-            <a:endParaRPr/>
           </a:p>
         </p:txBody>
       </p:sp>
@@ -25412,11 +24825,10 @@
           </a:fontRef>
         </p:style>
         <p:txBody>
-          <a:bodyPr wrap="square" rtlCol="0" anchor="ctr"/>
+          <a:bodyPr rtlCol="0" anchor="ctr" wrap="square"/>
           <a:lstStyle/>
           <a:p>
             <a:pPr algn="ctr"/>
-            <a:endParaRPr/>
           </a:p>
         </p:txBody>
       </p:sp>
@@ -25457,11 +24869,10 @@
           </a:fontRef>
         </p:style>
         <p:txBody>
-          <a:bodyPr wrap="square" rtlCol="0" anchor="ctr"/>
+          <a:bodyPr rtlCol="0" anchor="ctr" wrap="square"/>
           <a:lstStyle/>
           <a:p>
             <a:pPr algn="ctr"/>
-            <a:endParaRPr/>
           </a:p>
         </p:txBody>
       </p:sp>
@@ -25482,7 +24893,7 @@
           <a:noFill/>
         </p:spPr>
         <p:txBody>
-          <a:bodyPr wrap="square" lIns="0" tIns="0" rIns="0" bIns="0">
+          <a:bodyPr wrap="square" lIns="0" rIns="0" tIns="0" bIns="0">
             <a:spAutoFit/>
           </a:bodyPr>
           <a:lstStyle/>
@@ -25569,11 +24980,10 @@
           </a:fontRef>
         </p:style>
         <p:txBody>
-          <a:bodyPr wrap="square" rtlCol="0" anchor="ctr"/>
+          <a:bodyPr rtlCol="0" anchor="ctr" wrap="square"/>
           <a:lstStyle/>
           <a:p>
             <a:pPr algn="ctr"/>
-            <a:endParaRPr/>
           </a:p>
         </p:txBody>
       </p:sp>
@@ -25614,11 +25024,10 @@
           </a:fontRef>
         </p:style>
         <p:txBody>
-          <a:bodyPr wrap="square" rtlCol="0" anchor="ctr"/>
+          <a:bodyPr rtlCol="0" anchor="ctr" wrap="square"/>
           <a:lstStyle/>
           <a:p>
             <a:pPr algn="ctr"/>
-            <a:endParaRPr/>
           </a:p>
         </p:txBody>
       </p:sp>
@@ -25639,7 +25048,7 @@
           <a:noFill/>
         </p:spPr>
         <p:txBody>
-          <a:bodyPr wrap="square" lIns="0" tIns="0" rIns="0" bIns="0">
+          <a:bodyPr wrap="square" lIns="0" rIns="0" tIns="0" bIns="0">
             <a:spAutoFit/>
           </a:bodyPr>
           <a:lstStyle/>
@@ -25726,11 +25135,10 @@
           </a:fontRef>
         </p:style>
         <p:txBody>
-          <a:bodyPr wrap="square" rtlCol="0" anchor="ctr"/>
+          <a:bodyPr rtlCol="0" anchor="ctr" wrap="square"/>
           <a:lstStyle/>
           <a:p>
             <a:pPr algn="ctr"/>
-            <a:endParaRPr/>
           </a:p>
         </p:txBody>
       </p:sp>
@@ -25771,11 +25179,10 @@
           </a:fontRef>
         </p:style>
         <p:txBody>
-          <a:bodyPr wrap="square" rtlCol="0" anchor="ctr"/>
+          <a:bodyPr rtlCol="0" anchor="ctr" wrap="square"/>
           <a:lstStyle/>
           <a:p>
             <a:pPr algn="ctr"/>
-            <a:endParaRPr/>
           </a:p>
         </p:txBody>
       </p:sp>
@@ -25796,7 +25203,7 @@
           <a:noFill/>
         </p:spPr>
         <p:txBody>
-          <a:bodyPr wrap="square" lIns="0" tIns="0" rIns="0" bIns="0">
+          <a:bodyPr wrap="square" lIns="0" rIns="0" tIns="0" bIns="0">
             <a:spAutoFit/>
           </a:bodyPr>
           <a:lstStyle/>
@@ -25863,7 +25270,7 @@
           <a:noFill/>
         </p:spPr>
         <p:txBody>
-          <a:bodyPr wrap="square" lIns="0" tIns="0" rIns="0" bIns="0">
+          <a:bodyPr wrap="square" lIns="0" rIns="0" tIns="0" bIns="0">
             <a:spAutoFit/>
           </a:bodyPr>
           <a:lstStyle/>
@@ -25928,11 +25335,10 @@
           </a:fontRef>
         </p:style>
         <p:txBody>
-          <a:bodyPr wrap="square" rtlCol="0" anchor="ctr"/>
+          <a:bodyPr rtlCol="0" anchor="ctr" wrap="square"/>
           <a:lstStyle/>
           <a:p>
             <a:pPr algn="ctr"/>
-            <a:endParaRPr/>
           </a:p>
         </p:txBody>
       </p:sp>
@@ -25953,7 +25359,7 @@
           <a:noFill/>
         </p:spPr>
         <p:txBody>
-          <a:bodyPr wrap="square" lIns="0" tIns="0" rIns="0" bIns="0">
+          <a:bodyPr wrap="square" lIns="0" rIns="0" tIns="0" bIns="0">
             <a:spAutoFit/>
           </a:bodyPr>
           <a:lstStyle/>
@@ -25998,7 +25404,7 @@
           <a:noFill/>
         </p:spPr>
         <p:txBody>
-          <a:bodyPr wrap="square" lIns="0" tIns="0" rIns="0" bIns="0">
+          <a:bodyPr wrap="square" lIns="0" rIns="0" tIns="0" bIns="0">
             <a:spAutoFit/>
           </a:bodyPr>
           <a:lstStyle/>
@@ -26043,7 +25449,7 @@
           <a:noFill/>
         </p:spPr>
         <p:txBody>
-          <a:bodyPr wrap="square" lIns="0" tIns="0" rIns="0" bIns="0">
+          <a:bodyPr wrap="square" lIns="0" rIns="0" tIns="0" bIns="0">
             <a:spAutoFit/>
           </a:bodyPr>
           <a:lstStyle/>
@@ -26088,7 +25494,7 @@
           <a:noFill/>
         </p:spPr>
         <p:txBody>
-          <a:bodyPr wrap="square" lIns="0" tIns="0" rIns="0" bIns="0">
+          <a:bodyPr wrap="square" lIns="0" rIns="0" tIns="0" bIns="0">
             <a:spAutoFit/>
           </a:bodyPr>
           <a:lstStyle/>
@@ -26133,7 +25539,7 @@
           <a:noFill/>
         </p:spPr>
         <p:txBody>
-          <a:bodyPr wrap="square" lIns="0" tIns="0" rIns="0" bIns="0">
+          <a:bodyPr wrap="square" lIns="0" rIns="0" tIns="0" bIns="0">
             <a:spAutoFit/>
           </a:bodyPr>
           <a:lstStyle/>
@@ -26178,7 +25584,7 @@
           <a:noFill/>
         </p:spPr>
         <p:txBody>
-          <a:bodyPr wrap="square" lIns="0" tIns="0" rIns="0" bIns="0">
+          <a:bodyPr wrap="square" lIns="0" rIns="0" tIns="0" bIns="0">
             <a:spAutoFit/>
           </a:bodyPr>
           <a:lstStyle/>
@@ -26243,11 +25649,10 @@
           </a:fontRef>
         </p:style>
         <p:txBody>
-          <a:bodyPr wrap="square" rtlCol="0" anchor="ctr"/>
+          <a:bodyPr rtlCol="0" anchor="ctr" wrap="square"/>
           <a:lstStyle/>
           <a:p>
             <a:pPr algn="ctr"/>
-            <a:endParaRPr/>
           </a:p>
         </p:txBody>
       </p:sp>
@@ -26268,7 +25673,7 @@
           <a:noFill/>
         </p:spPr>
         <p:txBody>
-          <a:bodyPr wrap="square" lIns="0" tIns="0" rIns="0" bIns="0">
+          <a:bodyPr wrap="square" lIns="0" rIns="0" tIns="0" bIns="0">
             <a:spAutoFit/>
           </a:bodyPr>
           <a:lstStyle/>
@@ -26313,7 +25718,7 @@
           <a:noFill/>
         </p:spPr>
         <p:txBody>
-          <a:bodyPr wrap="square" lIns="0" tIns="0" rIns="0" bIns="0">
+          <a:bodyPr wrap="square" lIns="0" rIns="0" tIns="0" bIns="0">
             <a:spAutoFit/>
           </a:bodyPr>
           <a:lstStyle/>
@@ -26358,7 +25763,7 @@
           <a:noFill/>
         </p:spPr>
         <p:txBody>
-          <a:bodyPr wrap="square" lIns="0" tIns="0" rIns="0" bIns="0">
+          <a:bodyPr wrap="square" lIns="0" rIns="0" tIns="0" bIns="0">
             <a:spAutoFit/>
           </a:bodyPr>
           <a:lstStyle/>
@@ -26403,7 +25808,7 @@
           <a:noFill/>
         </p:spPr>
         <p:txBody>
-          <a:bodyPr wrap="square" lIns="0" tIns="0" rIns="0" bIns="0">
+          <a:bodyPr wrap="square" lIns="0" rIns="0" tIns="0" bIns="0">
             <a:spAutoFit/>
           </a:bodyPr>
           <a:lstStyle/>
@@ -26448,7 +25853,7 @@
           <a:noFill/>
         </p:spPr>
         <p:txBody>
-          <a:bodyPr wrap="square" lIns="0" tIns="0" rIns="0" bIns="0">
+          <a:bodyPr wrap="square" lIns="0" rIns="0" tIns="0" bIns="0">
             <a:spAutoFit/>
           </a:bodyPr>
           <a:lstStyle/>
@@ -26493,7 +25898,7 @@
           <a:noFill/>
         </p:spPr>
         <p:txBody>
-          <a:bodyPr wrap="square" lIns="0" tIns="0" rIns="0" bIns="0">
+          <a:bodyPr wrap="square" lIns="0" rIns="0" tIns="0" bIns="0">
             <a:spAutoFit/>
           </a:bodyPr>
           <a:lstStyle/>
@@ -26558,11 +25963,10 @@
           </a:fontRef>
         </p:style>
         <p:txBody>
-          <a:bodyPr wrap="square" rtlCol="0" anchor="ctr"/>
+          <a:bodyPr rtlCol="0" anchor="ctr" wrap="square"/>
           <a:lstStyle/>
           <a:p>
             <a:pPr algn="ctr"/>
-            <a:endParaRPr/>
           </a:p>
         </p:txBody>
       </p:sp>
@@ -26583,7 +25987,7 @@
           <a:noFill/>
         </p:spPr>
         <p:txBody>
-          <a:bodyPr wrap="square" lIns="0" tIns="0" rIns="0" bIns="0">
+          <a:bodyPr wrap="square" lIns="0" rIns="0" tIns="0" bIns="0">
             <a:spAutoFit/>
           </a:bodyPr>
           <a:lstStyle/>
@@ -26628,7 +26032,7 @@
           <a:noFill/>
         </p:spPr>
         <p:txBody>
-          <a:bodyPr wrap="square" lIns="0" tIns="0" rIns="0" bIns="0">
+          <a:bodyPr wrap="square" lIns="0" rIns="0" tIns="0" bIns="0">
             <a:spAutoFit/>
           </a:bodyPr>
           <a:lstStyle/>
@@ -26673,7 +26077,7 @@
           <a:noFill/>
         </p:spPr>
         <p:txBody>
-          <a:bodyPr wrap="square" lIns="0" tIns="0" rIns="0" bIns="0">
+          <a:bodyPr wrap="square" lIns="0" rIns="0" tIns="0" bIns="0">
             <a:spAutoFit/>
           </a:bodyPr>
           <a:lstStyle/>
@@ -26718,7 +26122,7 @@
           <a:noFill/>
         </p:spPr>
         <p:txBody>
-          <a:bodyPr wrap="square" lIns="0" tIns="0" rIns="0" bIns="0">
+          <a:bodyPr wrap="square" lIns="0" rIns="0" tIns="0" bIns="0">
             <a:spAutoFit/>
           </a:bodyPr>
           <a:lstStyle/>
@@ -26763,7 +26167,7 @@
           <a:noFill/>
         </p:spPr>
         <p:txBody>
-          <a:bodyPr wrap="square" lIns="0" tIns="0" rIns="0" bIns="0">
+          <a:bodyPr wrap="square" lIns="0" rIns="0" tIns="0" bIns="0">
             <a:spAutoFit/>
           </a:bodyPr>
           <a:lstStyle/>
@@ -26808,7 +26212,7 @@
           <a:noFill/>
         </p:spPr>
         <p:txBody>
-          <a:bodyPr wrap="square" lIns="0" tIns="0" rIns="0" bIns="0">
+          <a:bodyPr wrap="square" lIns="0" rIns="0" tIns="0" bIns="0">
             <a:spAutoFit/>
           </a:bodyPr>
           <a:lstStyle/>
@@ -26873,11 +26277,10 @@
           </a:fontRef>
         </p:style>
         <p:txBody>
-          <a:bodyPr wrap="square" rtlCol="0" anchor="ctr"/>
+          <a:bodyPr rtlCol="0" anchor="ctr" wrap="square"/>
           <a:lstStyle/>
           <a:p>
             <a:pPr algn="ctr"/>
-            <a:endParaRPr/>
           </a:p>
         </p:txBody>
       </p:sp>
@@ -26898,7 +26301,7 @@
           <a:noFill/>
         </p:spPr>
         <p:txBody>
-          <a:bodyPr wrap="square" lIns="0" tIns="0" rIns="0" bIns="0">
+          <a:bodyPr wrap="square" lIns="0" rIns="0" tIns="0" bIns="0">
             <a:spAutoFit/>
           </a:bodyPr>
           <a:lstStyle/>
@@ -26943,7 +26346,7 @@
           <a:noFill/>
         </p:spPr>
         <p:txBody>
-          <a:bodyPr wrap="square" lIns="0" tIns="0" rIns="0" bIns="0">
+          <a:bodyPr wrap="square" lIns="0" rIns="0" tIns="0" bIns="0">
             <a:spAutoFit/>
           </a:bodyPr>
           <a:lstStyle/>
@@ -26988,7 +26391,7 @@
           <a:noFill/>
         </p:spPr>
         <p:txBody>
-          <a:bodyPr wrap="square" lIns="0" tIns="0" rIns="0" bIns="0">
+          <a:bodyPr wrap="square" lIns="0" rIns="0" tIns="0" bIns="0">
             <a:spAutoFit/>
           </a:bodyPr>
           <a:lstStyle/>
@@ -27053,11 +26456,10 @@
           </a:fontRef>
         </p:style>
         <p:txBody>
-          <a:bodyPr wrap="square" rtlCol="0" anchor="ctr"/>
+          <a:bodyPr rtlCol="0" anchor="ctr" wrap="square"/>
           <a:lstStyle/>
           <a:p>
             <a:pPr algn="ctr"/>
-            <a:endParaRPr/>
           </a:p>
         </p:txBody>
       </p:sp>
@@ -27098,11 +26500,10 @@
           </a:fontRef>
         </p:style>
         <p:txBody>
-          <a:bodyPr wrap="square" rtlCol="0" anchor="ctr"/>
+          <a:bodyPr rtlCol="0" anchor="ctr" wrap="square"/>
           <a:lstStyle/>
           <a:p>
             <a:pPr algn="ctr"/>
-            <a:endParaRPr/>
           </a:p>
         </p:txBody>
       </p:sp>
@@ -27123,7 +26524,7 @@
           <a:noFill/>
         </p:spPr>
         <p:txBody>
-          <a:bodyPr wrap="square" lIns="0" tIns="0" rIns="0" bIns="0">
+          <a:bodyPr wrap="square" lIns="0" rIns="0" tIns="0" bIns="0">
             <a:spAutoFit/>
           </a:bodyPr>
           <a:lstStyle/>
@@ -27174,7 +26575,7 @@
           <a:noFill/>
         </p:spPr>
         <p:txBody>
-          <a:bodyPr wrap="square" lIns="0" tIns="0" rIns="0" bIns="0">
+          <a:bodyPr wrap="square" lIns="0" rIns="0" tIns="0" bIns="0">
             <a:spAutoFit/>
           </a:bodyPr>
           <a:lstStyle/>
@@ -27239,11 +26640,10 @@
           </a:fontRef>
         </p:style>
         <p:txBody>
-          <a:bodyPr wrap="square" rtlCol="0" anchor="ctr"/>
+          <a:bodyPr rtlCol="0" anchor="ctr" wrap="square"/>
           <a:lstStyle/>
           <a:p>
             <a:pPr algn="ctr"/>
-            <a:endParaRPr/>
           </a:p>
         </p:txBody>
       </p:sp>
@@ -27264,7 +26664,7 @@
           <a:noFill/>
         </p:spPr>
         <p:txBody>
-          <a:bodyPr wrap="square" lIns="0" tIns="0" rIns="0" bIns="0">
+          <a:bodyPr wrap="square" lIns="0" rIns="0" tIns="0" bIns="0">
             <a:spAutoFit/>
           </a:bodyPr>
           <a:lstStyle/>
@@ -27309,7 +26709,7 @@
           <a:noFill/>
         </p:spPr>
         <p:txBody>
-          <a:bodyPr wrap="square" lIns="0" tIns="0" rIns="0" bIns="0">
+          <a:bodyPr wrap="square" lIns="0" rIns="0" tIns="0" bIns="0">
             <a:spAutoFit/>
           </a:bodyPr>
           <a:lstStyle/>
@@ -27354,7 +26754,7 @@
           <a:noFill/>
         </p:spPr>
         <p:txBody>
-          <a:bodyPr wrap="square" lIns="0" tIns="0" rIns="0" bIns="0">
+          <a:bodyPr wrap="square" lIns="0" rIns="0" tIns="0" bIns="0">
             <a:spAutoFit/>
           </a:bodyPr>
           <a:lstStyle/>
@@ -27399,7 +26799,7 @@
           <a:noFill/>
         </p:spPr>
         <p:txBody>
-          <a:bodyPr wrap="square" lIns="0" tIns="0" rIns="0" bIns="0">
+          <a:bodyPr wrap="square" lIns="0" rIns="0" tIns="0" bIns="0">
             <a:spAutoFit/>
           </a:bodyPr>
           <a:lstStyle/>
@@ -27464,11 +26864,10 @@
           </a:fontRef>
         </p:style>
         <p:txBody>
-          <a:bodyPr wrap="square" rtlCol="0" anchor="ctr"/>
+          <a:bodyPr rtlCol="0" anchor="ctr" wrap="square"/>
           <a:lstStyle/>
           <a:p>
             <a:pPr algn="ctr"/>
-            <a:endParaRPr/>
           </a:p>
         </p:txBody>
       </p:sp>
@@ -27489,7 +26888,7 @@
           <a:noFill/>
         </p:spPr>
         <p:txBody>
-          <a:bodyPr wrap="square" lIns="0" tIns="0" rIns="0" bIns="0">
+          <a:bodyPr wrap="square" lIns="0" rIns="0" tIns="0" bIns="0">
             <a:spAutoFit/>
           </a:bodyPr>
           <a:lstStyle/>
@@ -27534,7 +26933,7 @@
           <a:noFill/>
         </p:spPr>
         <p:txBody>
-          <a:bodyPr wrap="square" lIns="0" tIns="0" rIns="0" bIns="0">
+          <a:bodyPr wrap="square" lIns="0" rIns="0" tIns="0" bIns="0">
             <a:spAutoFit/>
           </a:bodyPr>
           <a:lstStyle/>
@@ -27579,7 +26978,7 @@
           <a:noFill/>
         </p:spPr>
         <p:txBody>
-          <a:bodyPr wrap="square" lIns="0" tIns="0" rIns="0" bIns="0">
+          <a:bodyPr wrap="square" lIns="0" rIns="0" tIns="0" bIns="0">
             <a:spAutoFit/>
           </a:bodyPr>
           <a:lstStyle/>
@@ -27624,7 +27023,7 @@
           <a:noFill/>
         </p:spPr>
         <p:txBody>
-          <a:bodyPr wrap="square" lIns="0" tIns="0" rIns="0" bIns="0">
+          <a:bodyPr wrap="square" lIns="0" rIns="0" tIns="0" bIns="0">
             <a:spAutoFit/>
           </a:bodyPr>
           <a:lstStyle/>
@@ -27669,7 +27068,7 @@
           <a:noFill/>
         </p:spPr>
         <p:txBody>
-          <a:bodyPr wrap="square" lIns="0" tIns="0" rIns="0" bIns="0">
+          <a:bodyPr wrap="square" lIns="0" rIns="0" tIns="0" bIns="0">
             <a:spAutoFit/>
           </a:bodyPr>
           <a:lstStyle/>
@@ -27734,11 +27133,10 @@
           </a:fontRef>
         </p:style>
         <p:txBody>
-          <a:bodyPr wrap="square" rtlCol="0" anchor="ctr"/>
+          <a:bodyPr rtlCol="0" anchor="ctr" wrap="square"/>
           <a:lstStyle/>
           <a:p>
             <a:pPr algn="ctr"/>
-            <a:endParaRPr/>
           </a:p>
         </p:txBody>
       </p:sp>
@@ -27759,7 +27157,7 @@
           <a:noFill/>
         </p:spPr>
         <p:txBody>
-          <a:bodyPr wrap="square" lIns="0" tIns="0" rIns="0" bIns="0">
+          <a:bodyPr wrap="square" lIns="0" rIns="0" tIns="0" bIns="0">
             <a:spAutoFit/>
           </a:bodyPr>
           <a:lstStyle/>
@@ -27775,7 +27173,15 @@
                 <a:spcPts val="0"/>
               </a:spcAft>
             </a:pPr>
-            <a:endParaRPr/>
+            <a:r>
+              <a:rPr sz="1100" b="1" i="0">
+                <a:solidFill>
+                  <a:srgbClr val="FFFFFF"/>
+                </a:solidFill>
+                <a:latin typeface="Segoe UI"/>
+              </a:rPr>
+              <a:t/>
+            </a:r>
           </a:p>
         </p:txBody>
       </p:sp>
@@ -27796,7 +27202,7 @@
           <a:noFill/>
         </p:spPr>
         <p:txBody>
-          <a:bodyPr wrap="square" lIns="0" tIns="0" rIns="0" bIns="0">
+          <a:bodyPr wrap="square" lIns="0" rIns="0" tIns="0" bIns="0">
             <a:spAutoFit/>
           </a:bodyPr>
           <a:lstStyle/>
@@ -27841,7 +27247,7 @@
           <a:noFill/>
         </p:spPr>
         <p:txBody>
-          <a:bodyPr wrap="square" lIns="0" tIns="0" rIns="0" bIns="0">
+          <a:bodyPr wrap="square" lIns="0" rIns="0" tIns="0" bIns="0">
             <a:spAutoFit/>
           </a:bodyPr>
           <a:lstStyle/>
@@ -27886,7 +27292,7 @@
           <a:noFill/>
         </p:spPr>
         <p:txBody>
-          <a:bodyPr wrap="square" lIns="0" tIns="0" rIns="0" bIns="0">
+          <a:bodyPr wrap="square" lIns="0" rIns="0" tIns="0" bIns="0">
             <a:spAutoFit/>
           </a:bodyPr>
           <a:lstStyle/>
@@ -27931,7 +27337,7 @@
           <a:noFill/>
         </p:spPr>
         <p:txBody>
-          <a:bodyPr wrap="square" lIns="0" tIns="0" rIns="0" bIns="0">
+          <a:bodyPr wrap="square" lIns="0" rIns="0" tIns="0" bIns="0">
             <a:spAutoFit/>
           </a:bodyPr>
           <a:lstStyle/>
@@ -27976,7 +27382,7 @@
           <a:noFill/>
         </p:spPr>
         <p:txBody>
-          <a:bodyPr wrap="square" lIns="0" tIns="0" rIns="0" bIns="0">
+          <a:bodyPr wrap="square" lIns="0" rIns="0" tIns="0" bIns="0">
             <a:spAutoFit/>
           </a:bodyPr>
           <a:lstStyle/>
@@ -28041,11 +27447,10 @@
           </a:fontRef>
         </p:style>
         <p:txBody>
-          <a:bodyPr wrap="square" rtlCol="0" anchor="ctr"/>
+          <a:bodyPr rtlCol="0" anchor="ctr" wrap="square"/>
           <a:lstStyle/>
           <a:p>
             <a:pPr algn="ctr"/>
-            <a:endParaRPr/>
           </a:p>
         </p:txBody>
       </p:sp>
@@ -28066,7 +27471,7 @@
           <a:noFill/>
         </p:spPr>
         <p:txBody>
-          <a:bodyPr wrap="square" lIns="0" tIns="0" rIns="0" bIns="0">
+          <a:bodyPr wrap="square" lIns="0" rIns="0" tIns="0" bIns="0">
             <a:spAutoFit/>
           </a:bodyPr>
           <a:lstStyle/>
@@ -28111,7 +27516,7 @@
           <a:noFill/>
         </p:spPr>
         <p:txBody>
-          <a:bodyPr wrap="square" lIns="0" tIns="0" rIns="0" bIns="0">
+          <a:bodyPr wrap="square" lIns="0" rIns="0" tIns="0" bIns="0">
             <a:spAutoFit/>
           </a:bodyPr>
           <a:lstStyle/>
@@ -28156,7 +27561,7 @@
           <a:noFill/>
         </p:spPr>
         <p:txBody>
-          <a:bodyPr wrap="square" lIns="0" tIns="0" rIns="0" bIns="0">
+          <a:bodyPr wrap="square" lIns="0" rIns="0" tIns="0" bIns="0">
             <a:spAutoFit/>
           </a:bodyPr>
           <a:lstStyle/>
@@ -28201,7 +27606,7 @@
           <a:noFill/>
         </p:spPr>
         <p:txBody>
-          <a:bodyPr wrap="square" lIns="0" tIns="0" rIns="0" bIns="0">
+          <a:bodyPr wrap="square" lIns="0" rIns="0" tIns="0" bIns="0">
             <a:spAutoFit/>
           </a:bodyPr>
           <a:lstStyle/>
@@ -28246,7 +27651,7 @@
           <a:noFill/>
         </p:spPr>
         <p:txBody>
-          <a:bodyPr wrap="square" lIns="0" tIns="0" rIns="0" bIns="0">
+          <a:bodyPr wrap="square" lIns="0" rIns="0" tIns="0" bIns="0">
             <a:spAutoFit/>
           </a:bodyPr>
           <a:lstStyle/>
@@ -28291,7 +27696,7 @@
           <a:noFill/>
         </p:spPr>
         <p:txBody>
-          <a:bodyPr wrap="square" lIns="0" tIns="0" rIns="0" bIns="0">
+          <a:bodyPr wrap="square" lIns="0" rIns="0" tIns="0" bIns="0">
             <a:spAutoFit/>
           </a:bodyPr>
           <a:lstStyle/>
@@ -28336,7 +27741,7 @@
           <a:noFill/>
         </p:spPr>
         <p:txBody>
-          <a:bodyPr wrap="square" lIns="0" tIns="0" rIns="0" bIns="0">
+          <a:bodyPr wrap="square" lIns="0" rIns="0" tIns="0" bIns="0">
             <a:spAutoFit/>
           </a:bodyPr>
           <a:lstStyle/>
@@ -28381,7 +27786,7 @@
           <a:noFill/>
         </p:spPr>
         <p:txBody>
-          <a:bodyPr wrap="square" lIns="0" tIns="0" rIns="0" bIns="0">
+          <a:bodyPr wrap="square" lIns="0" rIns="0" tIns="0" bIns="0">
             <a:spAutoFit/>
           </a:bodyPr>
           <a:lstStyle/>
@@ -28418,7 +27823,7 @@
 </file>
 
 <file path=ppt/slides/slide9.xml><?xml version="1.0" encoding="utf-8"?>
-<p:sld xmlns:a="http://schemas.openxmlformats.org/drawingml/2006/main" xmlns:r="http://schemas.openxmlformats.org/officeDocument/2006/relationships" xmlns:p="http://schemas.openxmlformats.org/presentationml/2006/main">
+<p:sld xmlns:a="http://schemas.openxmlformats.org/drawingml/2006/main" xmlns:p="http://schemas.openxmlformats.org/presentationml/2006/main" xmlns:r="http://schemas.openxmlformats.org/officeDocument/2006/relationships">
   <p:cSld>
     <p:bg>
       <p:bgPr>
@@ -28434,14 +27839,7 @@
         <p:cNvGrpSpPr/>
         <p:nvPr/>
       </p:nvGrpSpPr>
-      <p:grpSpPr>
-        <a:xfrm>
-          <a:off x="0" y="0"/>
-          <a:ext cx="0" cy="0"/>
-          <a:chOff x="0" y="0"/>
-          <a:chExt cx="0" cy="0"/>
-        </a:xfrm>
-      </p:grpSpPr>
+      <p:grpSpPr/>
       <p:sp>
         <p:nvSpPr>
           <p:cNvPr id="2" name="Rectangle 1"/>
@@ -28479,11 +27877,10 @@
           </a:fontRef>
         </p:style>
         <p:txBody>
-          <a:bodyPr wrap="square" rtlCol="0" anchor="ctr"/>
+          <a:bodyPr rtlCol="0" anchor="ctr" wrap="square"/>
           <a:lstStyle/>
           <a:p>
             <a:pPr algn="ctr"/>
-            <a:endParaRPr/>
           </a:p>
         </p:txBody>
       </p:sp>
@@ -28504,7 +27901,7 @@
           <a:noFill/>
         </p:spPr>
         <p:txBody>
-          <a:bodyPr wrap="square" lIns="0" tIns="0" rIns="0" bIns="0">
+          <a:bodyPr wrap="square" lIns="0" rIns="0" tIns="0" bIns="0">
             <a:spAutoFit/>
           </a:bodyPr>
           <a:lstStyle/>
@@ -28549,7 +27946,7 @@
           <a:noFill/>
         </p:spPr>
         <p:txBody>
-          <a:bodyPr wrap="square" lIns="0" tIns="0" rIns="0" bIns="0">
+          <a:bodyPr wrap="square" lIns="0" rIns="0" tIns="0" bIns="0">
             <a:spAutoFit/>
           </a:bodyPr>
           <a:lstStyle/>
@@ -28614,11 +28011,10 @@
           </a:fontRef>
         </p:style>
         <p:txBody>
-          <a:bodyPr wrap="square" rtlCol="0" anchor="ctr"/>
+          <a:bodyPr rtlCol="0" anchor="ctr" wrap="square"/>
           <a:lstStyle/>
           <a:p>
             <a:pPr algn="ctr"/>
-            <a:endParaRPr/>
           </a:p>
         </p:txBody>
       </p:sp>
@@ -28639,7 +28035,7 @@
           <a:noFill/>
         </p:spPr>
         <p:txBody>
-          <a:bodyPr wrap="square" lIns="0" tIns="0" rIns="0" bIns="0">
+          <a:bodyPr wrap="square" lIns="0" rIns="0" tIns="0" bIns="0">
             <a:spAutoFit/>
           </a:bodyPr>
           <a:lstStyle/>
@@ -28704,11 +28100,10 @@
           </a:fontRef>
         </p:style>
         <p:txBody>
-          <a:bodyPr wrap="square" rtlCol="0" anchor="ctr"/>
+          <a:bodyPr rtlCol="0" anchor="ctr" wrap="square"/>
           <a:lstStyle/>
           <a:p>
             <a:pPr algn="ctr"/>
-            <a:endParaRPr/>
           </a:p>
         </p:txBody>
       </p:sp>
@@ -28729,7 +28124,7 @@
           <a:noFill/>
         </p:spPr>
         <p:txBody>
-          <a:bodyPr wrap="square" lIns="0" tIns="0" rIns="0" bIns="0">
+          <a:bodyPr wrap="square" lIns="0" rIns="0" tIns="0" bIns="0">
             <a:spAutoFit/>
           </a:bodyPr>
           <a:lstStyle/>
@@ -28774,7 +28169,7 @@
           <a:noFill/>
         </p:spPr>
         <p:txBody>
-          <a:bodyPr wrap="square" lIns="0" tIns="0" rIns="0" bIns="0">
+          <a:bodyPr wrap="square" lIns="0" rIns="0" tIns="0" bIns="0">
             <a:spAutoFit/>
           </a:bodyPr>
           <a:lstStyle/>
@@ -28819,7 +28214,7 @@
           <a:noFill/>
         </p:spPr>
         <p:txBody>
-          <a:bodyPr wrap="square" lIns="0" tIns="0" rIns="0" bIns="0">
+          <a:bodyPr wrap="square" lIns="0" rIns="0" tIns="0" bIns="0">
             <a:spAutoFit/>
           </a:bodyPr>
           <a:lstStyle/>
@@ -28864,7 +28259,7 @@
           <a:noFill/>
         </p:spPr>
         <p:txBody>
-          <a:bodyPr wrap="square" lIns="0" tIns="0" rIns="0" bIns="0">
+          <a:bodyPr wrap="square" lIns="0" rIns="0" tIns="0" bIns="0">
             <a:spAutoFit/>
           </a:bodyPr>
           <a:lstStyle/>
@@ -28929,11 +28324,10 @@
           </a:fontRef>
         </p:style>
         <p:txBody>
-          <a:bodyPr wrap="square" rtlCol="0" anchor="ctr"/>
+          <a:bodyPr rtlCol="0" anchor="ctr" wrap="square"/>
           <a:lstStyle/>
           <a:p>
             <a:pPr algn="ctr"/>
-            <a:endParaRPr/>
           </a:p>
         </p:txBody>
       </p:sp>
@@ -28954,7 +28348,7 @@
           <a:noFill/>
         </p:spPr>
         <p:txBody>
-          <a:bodyPr wrap="square" lIns="0" tIns="0" rIns="0" bIns="0">
+          <a:bodyPr wrap="square" lIns="0" rIns="0" tIns="0" bIns="0">
             <a:spAutoFit/>
           </a:bodyPr>
           <a:lstStyle/>
@@ -28999,7 +28393,7 @@
           <a:noFill/>
         </p:spPr>
         <p:txBody>
-          <a:bodyPr wrap="square" lIns="0" tIns="0" rIns="0" bIns="0">
+          <a:bodyPr wrap="square" lIns="0" rIns="0" tIns="0" bIns="0">
             <a:spAutoFit/>
           </a:bodyPr>
           <a:lstStyle/>
@@ -29044,7 +28438,7 @@
           <a:noFill/>
         </p:spPr>
         <p:txBody>
-          <a:bodyPr wrap="square" lIns="0" tIns="0" rIns="0" bIns="0">
+          <a:bodyPr wrap="square" lIns="0" rIns="0" tIns="0" bIns="0">
             <a:spAutoFit/>
           </a:bodyPr>
           <a:lstStyle/>
@@ -29089,7 +28483,7 @@
           <a:noFill/>
         </p:spPr>
         <p:txBody>
-          <a:bodyPr wrap="square" lIns="0" tIns="0" rIns="0" bIns="0">
+          <a:bodyPr wrap="square" lIns="0" rIns="0" tIns="0" bIns="0">
             <a:spAutoFit/>
           </a:bodyPr>
           <a:lstStyle/>
@@ -29154,11 +28548,10 @@
           </a:fontRef>
         </p:style>
         <p:txBody>
-          <a:bodyPr wrap="square" rtlCol="0" anchor="ctr"/>
+          <a:bodyPr rtlCol="0" anchor="ctr" wrap="square"/>
           <a:lstStyle/>
           <a:p>
             <a:pPr algn="ctr"/>
-            <a:endParaRPr/>
           </a:p>
         </p:txBody>
       </p:sp>
@@ -29179,7 +28572,7 @@
           <a:noFill/>
         </p:spPr>
         <p:txBody>
-          <a:bodyPr wrap="square" lIns="0" tIns="0" rIns="0" bIns="0">
+          <a:bodyPr wrap="square" lIns="0" rIns="0" tIns="0" bIns="0">
             <a:spAutoFit/>
           </a:bodyPr>
           <a:lstStyle/>
@@ -29224,7 +28617,7 @@
           <a:noFill/>
         </p:spPr>
         <p:txBody>
-          <a:bodyPr wrap="square" lIns="0" tIns="0" rIns="0" bIns="0">
+          <a:bodyPr wrap="square" lIns="0" rIns="0" tIns="0" bIns="0">
             <a:spAutoFit/>
           </a:bodyPr>
           <a:lstStyle/>
@@ -29289,11 +28682,10 @@
           </a:fontRef>
         </p:style>
         <p:txBody>
-          <a:bodyPr wrap="square" rtlCol="0" anchor="ctr"/>
+          <a:bodyPr rtlCol="0" anchor="ctr" wrap="square"/>
           <a:lstStyle/>
           <a:p>
             <a:pPr algn="ctr"/>
-            <a:endParaRPr/>
           </a:p>
         </p:txBody>
       </p:sp>
@@ -29334,11 +28726,10 @@
           </a:fontRef>
         </p:style>
         <p:txBody>
-          <a:bodyPr wrap="square" rtlCol="0" anchor="ctr"/>
+          <a:bodyPr rtlCol="0" anchor="ctr" wrap="square"/>
           <a:lstStyle/>
           <a:p>
             <a:pPr algn="ctr"/>
-            <a:endParaRPr/>
           </a:p>
         </p:txBody>
       </p:sp>
@@ -29359,7 +28750,7 @@
           <a:noFill/>
         </p:spPr>
         <p:txBody>
-          <a:bodyPr wrap="square" lIns="0" tIns="0" rIns="0" bIns="0">
+          <a:bodyPr wrap="square" lIns="0" rIns="0" tIns="0" bIns="0">
             <a:spAutoFit/>
           </a:bodyPr>
           <a:lstStyle/>
@@ -29410,7 +28801,7 @@
           <a:noFill/>
         </p:spPr>
         <p:txBody>
-          <a:bodyPr wrap="square" lIns="0" tIns="0" rIns="0" bIns="0">
+          <a:bodyPr wrap="square" lIns="0" rIns="0" tIns="0" bIns="0">
             <a:spAutoFit/>
           </a:bodyPr>
           <a:lstStyle/>
@@ -29475,11 +28866,10 @@
           </a:fontRef>
         </p:style>
         <p:txBody>
-          <a:bodyPr wrap="square" rtlCol="0" anchor="ctr"/>
+          <a:bodyPr rtlCol="0" anchor="ctr" wrap="square"/>
           <a:lstStyle/>
           <a:p>
             <a:pPr algn="ctr"/>
-            <a:endParaRPr/>
           </a:p>
         </p:txBody>
       </p:sp>
@@ -29500,7 +28890,7 @@
           <a:noFill/>
         </p:spPr>
         <p:txBody>
-          <a:bodyPr wrap="square" lIns="0" tIns="0" rIns="0" bIns="0">
+          <a:bodyPr wrap="square" lIns="0" rIns="0" tIns="0" bIns="0">
             <a:spAutoFit/>
           </a:bodyPr>
           <a:lstStyle/>
@@ -29611,7 +29001,7 @@
           <a:noFill/>
         </p:spPr>
         <p:txBody>
-          <a:bodyPr wrap="square" lIns="0" tIns="0" rIns="0" bIns="0">
+          <a:bodyPr wrap="square" lIns="0" rIns="0" tIns="0" bIns="0">
             <a:spAutoFit/>
           </a:bodyPr>
           <a:lstStyle/>
@@ -29727,7 +29117,7 @@
           <a:noFill/>
         </p:spPr>
         <p:txBody>
-          <a:bodyPr wrap="square" lIns="0" tIns="0" rIns="0" bIns="0">
+          <a:bodyPr wrap="square" lIns="0" rIns="0" tIns="0" bIns="0">
             <a:spAutoFit/>
           </a:bodyPr>
           <a:lstStyle/>
@@ -29772,7 +29162,7 @@
           <a:noFill/>
         </p:spPr>
         <p:txBody>
-          <a:bodyPr wrap="square" lIns="0" tIns="0" rIns="0" bIns="0">
+          <a:bodyPr wrap="square" lIns="0" rIns="0" tIns="0" bIns="0">
             <a:spAutoFit/>
           </a:bodyPr>
           <a:lstStyle/>
